--- a/lessons/lesson-07/slides.pptx
+++ b/lessons/lesson-07/slides.pptx
@@ -2,28 +2,29 @@
 <file path=ppt/presentation.xml><?xml version="1.0" encoding="utf-8"?>
 <p:presentation xmlns:p="http://schemas.openxmlformats.org/presentationml/2006/main">
   <p:sldMasterIdLst>
-    <p:sldMasterId xmlns:r="http://schemas.openxmlformats.org/officeDocument/2006/relationships" id="2147483648" r:id="R6d3eeeed34af4269"/>
+    <p:sldMasterId xmlns:r="http://schemas.openxmlformats.org/officeDocument/2006/relationships" id="2147483648" r:id="R7c46f51f68e34c12"/>
   </p:sldMasterIdLst>
   <p:notesMasterIdLst>
-    <p:notesMasterId xmlns:r="http://schemas.openxmlformats.org/officeDocument/2006/relationships" r:id="R8b02b2b1e63e422c"/>
+    <p:notesMasterId xmlns:r="http://schemas.openxmlformats.org/officeDocument/2006/relationships" r:id="R9695b00706354251"/>
   </p:notesMasterIdLst>
   <p:sldIdLst>
-    <p:sldId xmlns:r="http://schemas.openxmlformats.org/officeDocument/2006/relationships" id="256" r:id="R2a8f54e291c74375"/>
-    <p:sldId xmlns:r="http://schemas.openxmlformats.org/officeDocument/2006/relationships" id="257" r:id="R251dd0dba95a4e67"/>
-    <p:sldId xmlns:r="http://schemas.openxmlformats.org/officeDocument/2006/relationships" id="258" r:id="R742f7171c5534b12"/>
-    <p:sldId xmlns:r="http://schemas.openxmlformats.org/officeDocument/2006/relationships" id="259" r:id="R54fefe5ded7e4930"/>
-    <p:sldId xmlns:r="http://schemas.openxmlformats.org/officeDocument/2006/relationships" id="260" r:id="Rf31f739cd9af4c38"/>
-    <p:sldId xmlns:r="http://schemas.openxmlformats.org/officeDocument/2006/relationships" id="261" r:id="R64676a9f03cc4f92"/>
-    <p:sldId xmlns:r="http://schemas.openxmlformats.org/officeDocument/2006/relationships" id="262" r:id="R5f178eb95c3744fa"/>
-    <p:sldId xmlns:r="http://schemas.openxmlformats.org/officeDocument/2006/relationships" id="263" r:id="Re171506ec8ba4bd9"/>
-    <p:sldId xmlns:r="http://schemas.openxmlformats.org/officeDocument/2006/relationships" id="264" r:id="R1172a784841948b7"/>
-    <p:sldId xmlns:r="http://schemas.openxmlformats.org/officeDocument/2006/relationships" id="265" r:id="R801443cbaf474fc5"/>
-    <p:sldId xmlns:r="http://schemas.openxmlformats.org/officeDocument/2006/relationships" id="266" r:id="R58fa5db92c224b44"/>
-    <p:sldId xmlns:r="http://schemas.openxmlformats.org/officeDocument/2006/relationships" id="267" r:id="Reb9e8b52f4d14169"/>
-    <p:sldId xmlns:r="http://schemas.openxmlformats.org/officeDocument/2006/relationships" id="268" r:id="R946f4bba354e487d"/>
-    <p:sldId xmlns:r="http://schemas.openxmlformats.org/officeDocument/2006/relationships" id="269" r:id="R46a0fde712ee4c38"/>
-    <p:sldId xmlns:r="http://schemas.openxmlformats.org/officeDocument/2006/relationships" id="270" r:id="Rb98a72eeaf204017"/>
-    <p:sldId xmlns:r="http://schemas.openxmlformats.org/officeDocument/2006/relationships" id="271" r:id="Rce46e4d0a61b4734"/>
+    <p:sldId xmlns:r="http://schemas.openxmlformats.org/officeDocument/2006/relationships" id="256" r:id="Rad7b9bc4ba6d44e0"/>
+    <p:sldId xmlns:r="http://schemas.openxmlformats.org/officeDocument/2006/relationships" id="257" r:id="Ra025baa54d394886"/>
+    <p:sldId xmlns:r="http://schemas.openxmlformats.org/officeDocument/2006/relationships" id="258" r:id="R91c3f24dd7cc4566"/>
+    <p:sldId xmlns:r="http://schemas.openxmlformats.org/officeDocument/2006/relationships" id="259" r:id="Rc62fe00c230345c3"/>
+    <p:sldId xmlns:r="http://schemas.openxmlformats.org/officeDocument/2006/relationships" id="260" r:id="R084751d91c0e40d1"/>
+    <p:sldId xmlns:r="http://schemas.openxmlformats.org/officeDocument/2006/relationships" id="261" r:id="R40ba119f79cb4b7d"/>
+    <p:sldId xmlns:r="http://schemas.openxmlformats.org/officeDocument/2006/relationships" id="262" r:id="Rc2955bbd03f54c7a"/>
+    <p:sldId xmlns:r="http://schemas.openxmlformats.org/officeDocument/2006/relationships" id="263" r:id="Rc149b81312e74bb7"/>
+    <p:sldId xmlns:r="http://schemas.openxmlformats.org/officeDocument/2006/relationships" id="264" r:id="R388ac2424cde49c7"/>
+    <p:sldId xmlns:r="http://schemas.openxmlformats.org/officeDocument/2006/relationships" id="265" r:id="R9a28bb417be1456c"/>
+    <p:sldId xmlns:r="http://schemas.openxmlformats.org/officeDocument/2006/relationships" id="266" r:id="Ra5588a71dcf6478a"/>
+    <p:sldId xmlns:r="http://schemas.openxmlformats.org/officeDocument/2006/relationships" id="267" r:id="R1d5d0d147fe74927"/>
+    <p:sldId xmlns:r="http://schemas.openxmlformats.org/officeDocument/2006/relationships" id="268" r:id="R579150b870114fd0"/>
+    <p:sldId xmlns:r="http://schemas.openxmlformats.org/officeDocument/2006/relationships" id="269" r:id="R3112e587224042a5"/>
+    <p:sldId xmlns:r="http://schemas.openxmlformats.org/officeDocument/2006/relationships" id="270" r:id="R7d31546a4a73437b"/>
+    <p:sldId xmlns:r="http://schemas.openxmlformats.org/officeDocument/2006/relationships" id="271" r:id="R5d9a8979eb7747d1"/>
+    <p:sldId xmlns:r="http://schemas.openxmlformats.org/officeDocument/2006/relationships" id="272" r:id="Rdf9a94e8cacc4ad7"/>
   </p:sldIdLst>
   <p:sldSz cx="12192000" cy="6858000"/>
   <p:notesSz cx="6858000" cy="9144000"/>
@@ -1088,6 +1089,101 @@
           <a:lstStyle xmlns:a="http://schemas.openxmlformats.org/drawingml/2006/main"/>
           <a:p xmlns:a="http://schemas.openxmlformats.org/drawingml/2006/main">
             <a:r>
+              <a:t>回收主机制、替代机制、可区分实验与研究判断记录的关系。本页不新增任务。</a:t>
+            </a:r>
+          </a:p>
+          <a:p xmlns:a="http://schemas.openxmlformats.org/drawingml/2006/main">
+            <a:r>
+              <a:t/>
+            </a:r>
+          </a:p>
+          <a:p xmlns:a="http://schemas.openxmlformats.org/drawingml/2006/main">
+            <a:r>
+              <a:t>[Sources]</a:t>
+            </a:r>
+          </a:p>
+          <a:p xmlns:a="http://schemas.openxmlformats.org/drawingml/2006/main">
+            <a:r>
+              <a:t>- /Users/bright/Projects/courses/graduate/lessons/lesson-07/handout.md</a:t>
+            </a:r>
+          </a:p>
+          <a:p xmlns:a="http://schemas.openxmlformats.org/drawingml/2006/main">
+            <a:r>
+              <a:t>- /Users/bright/Projects/courses/graduate/lessons/lesson-07/slides.md</a:t>
+            </a:r>
+          </a:p>
+          <a:p xmlns:a="http://schemas.openxmlformats.org/drawingml/2006/main">
+            <a:r>
+              <a:t>[/Sources]</a:t>
+            </a:r>
+          </a:p>
+        </p:txBody>
+      </p:sp>
+      <p:sp>
+        <p:nvSpPr>
+          <p:cNvPr id="4" name="Slide Number Placeholder 3"/>
+          <p:cNvSpPr>
+            <a:spLocks xmlns:a="http://schemas.openxmlformats.org/drawingml/2006/main" noGrp="1"/>
+          </p:cNvSpPr>
+          <p:nvPr>
+            <p:ph type="sldNum" idx="5"/>
+          </p:nvPr>
+        </p:nvSpPr>
+        <p:spPr/>
+        <p:txBody>
+          <a:bodyPr xmlns:a="http://schemas.openxmlformats.org/drawingml/2006/main"/>
+          <a:lstStyle xmlns:a="http://schemas.openxmlformats.org/drawingml/2006/main"/>
+          <a:p xmlns:a="http://schemas.openxmlformats.org/drawingml/2006/main"/>
+        </p:txBody>
+      </p:sp>
+    </p:spTree>
+  </p:cSld>
+  <p:clrMapOvr>
+    <a:masterClrMapping xmlns:a="http://schemas.openxmlformats.org/drawingml/2006/main"/>
+  </p:clrMapOvr>
+</p:notes>
+</file>
+
+<file path=ppt/notesSlides/notesSlide17.xml><?xml version="1.0" encoding="utf-8"?>
+<p:notes xmlns:p="http://schemas.openxmlformats.org/presentationml/2006/main">
+  <p:cSld>
+    <p:spTree>
+      <p:nvGrpSpPr>
+        <p:cNvPr id="1" name=""/>
+        <p:cNvGrpSpPr/>
+        <p:nvPr/>
+      </p:nvGrpSpPr>
+      <p:grpSpPr>
+        <a:xfrm xmlns:a="http://schemas.openxmlformats.org/drawingml/2006/main"/>
+      </p:grpSpPr>
+      <p:sp>
+        <p:nvSpPr>
+          <p:cNvPr id="2" name="Slide Image Placeholder 1"/>
+          <p:cNvSpPr>
+            <a:spLocks xmlns:a="http://schemas.openxmlformats.org/drawingml/2006/main" noGrp="1"/>
+          </p:cNvSpPr>
+          <p:nvPr>
+            <p:ph type="sldImg" idx="0"/>
+          </p:nvPr>
+        </p:nvSpPr>
+        <p:spPr/>
+      </p:sp>
+      <p:sp>
+        <p:nvSpPr>
+          <p:cNvPr id="3" name="Notes Placeholder 2"/>
+          <p:cNvSpPr>
+            <a:spLocks xmlns:a="http://schemas.openxmlformats.org/drawingml/2006/main" noGrp="1"/>
+          </p:cNvSpPr>
+          <p:nvPr>
+            <p:ph type="body" idx="1"/>
+          </p:nvPr>
+        </p:nvSpPr>
+        <p:spPr/>
+        <p:txBody>
+          <a:bodyPr xmlns:a="http://schemas.openxmlformats.org/drawingml/2006/main"/>
+          <a:lstStyle xmlns:a="http://schemas.openxmlformats.org/drawingml/2006/main"/>
+          <a:p xmlns:a="http://schemas.openxmlformats.org/drawingml/2006/main">
+            <a:r>
               <a:t>收束到开场问题：下一步实验是否真的会改变判断。本课不新增作业，工件进入第 8 课分享和第 9 课判断门。</a:t>
             </a:r>
           </a:p>
@@ -1949,7 +2045,7 @@
           <p:nvPr/>
         </p:nvPicPr>
         <p:blipFill>
-          <a:blip xmlns:r="http://schemas.openxmlformats.org/officeDocument/2006/relationships" xmlns:a="http://schemas.openxmlformats.org/drawingml/2006/main" r:embed="R19fcbd0fafb5459c">
+          <a:blip xmlns:r="http://schemas.openxmlformats.org/officeDocument/2006/relationships" xmlns:a="http://schemas.openxmlformats.org/drawingml/2006/main" r:embed="R06e6371f3f3847a8">
             <a:duotone>
               <a:prstClr val="black"/>
               <a:schemeClr val="accent1">
@@ -2127,7 +2223,7 @@
           <p:nvPr/>
         </p:nvPicPr>
         <p:blipFill rotWithShape="1">
-          <a:blip xmlns:r="http://schemas.openxmlformats.org/officeDocument/2006/relationships" xmlns:a="http://schemas.openxmlformats.org/drawingml/2006/main" r:embed="Rea395c1a79cd4f5d"/>
+          <a:blip xmlns:r="http://schemas.openxmlformats.org/officeDocument/2006/relationships" xmlns:a="http://schemas.openxmlformats.org/drawingml/2006/main" r:embed="R9afdfa328a054e34"/>
           <a:srcRect xmlns:a="http://schemas.openxmlformats.org/drawingml/2006/main" l="74359" t="0" r="1346" b="0"/>
           <a:stretch xmlns:a="http://schemas.openxmlformats.org/drawingml/2006/main"/>
         </p:blipFill>
@@ -2150,7 +2246,7 @@
           <p:nvPr/>
         </p:nvPicPr>
         <p:blipFill rotWithShape="1">
-          <a:blip xmlns:r="http://schemas.openxmlformats.org/officeDocument/2006/relationships" xmlns:a="http://schemas.openxmlformats.org/drawingml/2006/main" r:embed="R5280f4ba0ab643b9">
+          <a:blip xmlns:r="http://schemas.openxmlformats.org/officeDocument/2006/relationships" xmlns:a="http://schemas.openxmlformats.org/drawingml/2006/main" r:embed="R69815df3d2564350">
             <a:alphaModFix amt="35000"/>
           </a:blip>
           <a:srcRect xmlns:a="http://schemas.openxmlformats.org/drawingml/2006/main" l="0" t="9831" r="0" b="36385"/>
@@ -2412,7 +2508,7 @@
           <p:nvPr/>
         </p:nvPicPr>
         <p:blipFill>
-          <a:blip xmlns:r="http://schemas.openxmlformats.org/officeDocument/2006/relationships" xmlns:a="http://schemas.openxmlformats.org/drawingml/2006/main" r:embed="Raed0184705d2477f"/>
+          <a:blip xmlns:r="http://schemas.openxmlformats.org/officeDocument/2006/relationships" xmlns:a="http://schemas.openxmlformats.org/drawingml/2006/main" r:embed="Rf5d7df017ea448c7"/>
           <a:srcRect xmlns:a="http://schemas.openxmlformats.org/drawingml/2006/main" l="0" t="0" r="54251" b="0"/>
           <a:stretch xmlns:a="http://schemas.openxmlformats.org/drawingml/2006/main"/>
         </p:blipFill>
@@ -2669,7 +2765,7 @@
           <p:nvPr/>
         </p:nvPicPr>
         <p:blipFill rotWithShape="1">
-          <a:blip xmlns:r="http://schemas.openxmlformats.org/officeDocument/2006/relationships" xmlns:a="http://schemas.openxmlformats.org/drawingml/2006/main" r:embed="Rbff768b47b5b4dfd"/>
+          <a:blip xmlns:r="http://schemas.openxmlformats.org/officeDocument/2006/relationships" xmlns:a="http://schemas.openxmlformats.org/drawingml/2006/main" r:embed="Re759c330c3b24d5f"/>
           <a:srcRect xmlns:a="http://schemas.openxmlformats.org/drawingml/2006/main" l="0" t="0" r="1346" b="0"/>
           <a:stretch xmlns:a="http://schemas.openxmlformats.org/drawingml/2006/main"/>
         </p:blipFill>
@@ -2852,7 +2948,7 @@
           <p:nvPr/>
         </p:nvPicPr>
         <p:blipFill>
-          <a:blip xmlns:r="http://schemas.openxmlformats.org/officeDocument/2006/relationships" xmlns:a="http://schemas.openxmlformats.org/drawingml/2006/main" r:embed="R407ed0f846b74a2e"/>
+          <a:blip xmlns:r="http://schemas.openxmlformats.org/officeDocument/2006/relationships" xmlns:a="http://schemas.openxmlformats.org/drawingml/2006/main" r:embed="R3d4dab4370aa4469"/>
           <a:stretch xmlns:a="http://schemas.openxmlformats.org/drawingml/2006/main">
             <a:fillRect l="0" t="0" r="0" b="0"/>
           </a:stretch>
@@ -2948,7 +3044,7 @@
           <p:nvPr/>
         </p:nvPicPr>
         <p:blipFill>
-          <a:blip xmlns:r="http://schemas.openxmlformats.org/officeDocument/2006/relationships" xmlns:a="http://schemas.openxmlformats.org/drawingml/2006/main" r:embed="R867464228a404a50">
+          <a:blip xmlns:r="http://schemas.openxmlformats.org/officeDocument/2006/relationships" xmlns:a="http://schemas.openxmlformats.org/drawingml/2006/main" r:embed="Re0b1df4301de4c23">
             <a:duotone>
               <a:prstClr val="black"/>
               <a:schemeClr val="accent1">
@@ -3115,7 +3211,7 @@
           <p:nvPr/>
         </p:nvPicPr>
         <p:blipFill rotWithShape="1">
-          <a:blip xmlns:r="http://schemas.openxmlformats.org/officeDocument/2006/relationships" xmlns:a="http://schemas.openxmlformats.org/drawingml/2006/main" r:embed="R512f4c2931c141f7">
+          <a:blip xmlns:r="http://schemas.openxmlformats.org/officeDocument/2006/relationships" xmlns:a="http://schemas.openxmlformats.org/drawingml/2006/main" r:embed="Re1ae060a2a764031">
             <a:alphaModFix amt="20000"/>
             <a:duotone>
               <a:schemeClr val="accent4">
@@ -3213,10 +3309,10 @@
   </p:cSld>
   <p:clrMap bg1="lt1" tx1="dk1" bg2="lt2" tx2="dk2" accent1="accent1" accent2="accent2" accent3="accent3" accent4="accent4" accent5="accent5" accent6="accent6" hlink="hlink" folHlink="folHlink"/>
   <p:sldLayoutIdLst>
-    <p:sldLayoutId xmlns:r="http://schemas.openxmlformats.org/officeDocument/2006/relationships" id="2147483649" r:id="R6ecb1c9107ac4890"/>
-    <p:sldLayoutId xmlns:r="http://schemas.openxmlformats.org/officeDocument/2006/relationships" id="2147483650" r:id="R41bff0bb5fe54dc1"/>
-    <p:sldLayoutId xmlns:r="http://schemas.openxmlformats.org/officeDocument/2006/relationships" id="2147483651" r:id="R7d78781104024b33"/>
-    <p:sldLayoutId xmlns:r="http://schemas.openxmlformats.org/officeDocument/2006/relationships" id="2147483652" r:id="R66e17e7522b347db"/>
+    <p:sldLayoutId xmlns:r="http://schemas.openxmlformats.org/officeDocument/2006/relationships" id="2147483649" r:id="Rc6698795020f4221"/>
+    <p:sldLayoutId xmlns:r="http://schemas.openxmlformats.org/officeDocument/2006/relationships" id="2147483650" r:id="R8a03c556a97a4231"/>
+    <p:sldLayoutId xmlns:r="http://schemas.openxmlformats.org/officeDocument/2006/relationships" id="2147483651" r:id="R2e7485e5e2d84ed9"/>
+    <p:sldLayoutId xmlns:r="http://schemas.openxmlformats.org/officeDocument/2006/relationships" id="2147483652" r:id="Rdf76429a30fc41d6"/>
   </p:sldLayoutIdLst>
   <p:hf hdr="0" ftr="0" dt="0"/>
   <p:txStyles>
@@ -3749,120 +3845,6 @@
       </p:grpSpPr>
       <p:sp>
         <p:nvSpPr>
-          <p:cNvPr id="3" name="内容占位符 2">
-            <a:extLst xmlns:a="http://schemas.openxmlformats.org/drawingml/2006/main">
-              <a:ext uri="{FF2B5EF4-FFF2-40B4-BE49-F238E27FC236}">
-                <a16:creationId xmlns:a16="http://schemas.microsoft.com/office/drawing/2014/main" id="{D1D30E0E-D2D5-4C08-A919-2A1C2D5A8D02}"/>
-              </a:ext>
-            </a:extLst>
-          </p:cNvPr>
-          <p:cNvSpPr>
-            <a:spLocks xmlns:a="http://schemas.openxmlformats.org/drawingml/2006/main" noGrp="1"/>
-          </p:cNvSpPr>
-          <p:nvPr>
-            <p:ph idx="10"/>
-          </p:nvPr>
-        </p:nvSpPr>
-        <p:spPr>
-          <a:xfrm xmlns:a="http://schemas.openxmlformats.org/drawingml/2006/main">
-            <a:off x="1238250" y="3048000"/>
-            <a:ext cx="9715500" cy="2343150"/>
-          </a:xfrm>
-        </p:spPr>
-        <p:txBody>
-          <a:bodyPr xmlns:a="http://schemas.openxmlformats.org/drawingml/2006/main" lIns="0" tIns="0" rIns="0" bIns="0" anchor="ctr"/>
-          <a:lstStyle xmlns:a="http://schemas.openxmlformats.org/drawingml/2006/main"/>
-          <a:p xmlns:a="http://schemas.openxmlformats.org/drawingml/2006/main">
-            <a:pPr algn="ctr">
-              <a:lnSpc>
-                <a:spcPct val="125000"/>
-              </a:lnSpc>
-              <a:buNone/>
-            </a:pPr>
-            <a:r>
-              <a:rPr sz="1800" b="1">
-                <a:solidFill>
-                  <a:srgbClr val="18354E"/>
-                </a:solidFill>
-                <a:latin typeface="Microsoft YaHei"/>
-                <a:ea typeface="Microsoft YaHei"/>
-                <a:cs typeface="Microsoft YaHei"/>
-              </a:rPr>
-              <a:t>问题门输出 → 机制解释 → 可区分实验 → 有记录的取舍</a:t>
-            </a:r>
-            <a:endParaRPr>
-              <a:latin typeface="+mn-ea"/>
-              <a:ea typeface="+mn-ea"/>
-              <a:cs typeface="+mn-ea"/>
-            </a:endParaRPr>
-          </a:p>
-          <a:p xmlns:a="http://schemas.openxmlformats.org/drawingml/2006/main">
-            <a:r>
-              <a:rPr>
-                <a:latin typeface="+mn-ea"/>
-                <a:ea typeface="+mn-ea"/>
-                <a:cs typeface="+mn-ea"/>
-              </a:rPr>
-              <a:t/>
-            </a:r>
-            <a:endParaRPr>
-              <a:latin typeface="+mn-ea"/>
-              <a:ea typeface="+mn-ea"/>
-              <a:cs typeface="+mn-ea"/>
-            </a:endParaRPr>
-          </a:p>
-          <a:p xmlns:a="http://schemas.openxmlformats.org/drawingml/2006/main">
-            <a:pPr algn="ctr">
-              <a:lnSpc>
-                <a:spcPct val="125000"/>
-              </a:lnSpc>
-              <a:buNone/>
-            </a:pPr>
-            <a:r>
-              <a:rPr sz="1800" b="1">
-                <a:solidFill>
-                  <a:srgbClr val="18354E"/>
-                </a:solidFill>
-                <a:latin typeface="Microsoft YaHei"/>
-                <a:ea typeface="Microsoft YaHei"/>
-                <a:cs typeface="Microsoft YaHei"/>
-              </a:rPr>
-              <a:t>机制假设回答“为什么”，实验必须能够改变判断</a:t>
-            </a:r>
-            <a:endParaRPr>
-              <a:latin typeface="+mn-ea"/>
-              <a:ea typeface="+mn-ea"/>
-              <a:cs typeface="+mn-ea"/>
-            </a:endParaRPr>
-          </a:p>
-          <a:p xmlns:a="http://schemas.openxmlformats.org/drawingml/2006/main">
-            <a:pPr algn="ctr">
-              <a:lnSpc>
-                <a:spcPct val="125000"/>
-              </a:lnSpc>
-              <a:buNone/>
-            </a:pPr>
-            <a:r>
-              <a:rPr sz="1800" b="1">
-                <a:solidFill>
-                  <a:srgbClr val="18354E"/>
-                </a:solidFill>
-                <a:latin typeface="Microsoft YaHei"/>
-                <a:ea typeface="Microsoft YaHei"/>
-                <a:cs typeface="Microsoft YaHei"/>
-              </a:rPr>
-              <a:t>第七讲｜阶段三：机制假设 + 阶段六：研究判断</a:t>
-            </a:r>
-            <a:endParaRPr>
-              <a:latin typeface="+mn-ea"/>
-              <a:ea typeface="+mn-ea"/>
-              <a:cs typeface="+mn-ea"/>
-            </a:endParaRPr>
-          </a:p>
-        </p:txBody>
-      </p:sp>
-      <p:sp>
-        <p:nvSpPr>
           <p:cNvPr id="2" name="矩形 11">
             <a:extLst xmlns:a="http://schemas.openxmlformats.org/drawingml/2006/main">
               <a:ext uri="{FF2B5EF4-FFF2-40B4-BE49-F238E27FC236}">
@@ -3877,8 +3859,8 @@
         </p:nvSpPr>
         <p:spPr>
           <a:xfrm xmlns:a="http://schemas.openxmlformats.org/drawingml/2006/main">
-            <a:off x="1333500" y="1295400"/>
-            <a:ext cx="9525000" cy="1645920"/>
+            <a:off x="1143000" y="1790700"/>
+            <a:ext cx="9906000" cy="1645920"/>
           </a:xfrm>
           <a:prstGeom xmlns:a="http://schemas.openxmlformats.org/drawingml/2006/main" prst="rect">
             <a:avLst/>
@@ -3897,7 +3879,7 @@
               <a:buNone/>
             </a:pPr>
             <a:r>
-              <a:rPr sz="2925" b="1">
+              <a:rPr sz="3150" b="1">
                 <a:solidFill>
                   <a:srgbClr val="C8161E"/>
                 </a:solidFill>
@@ -3905,7 +3887,7 @@
                 <a:ea typeface="Microsoft YaHei"/>
                 <a:cs typeface="Microsoft YaHei"/>
               </a:rPr>
-              <a:t>机制假设、研究判断与实验设计</a:t>
+              <a:t>第7讲 机制假设、研究判断与实验设计</a:t>
             </a:r>
             <a:endParaRPr sz="4000" b="1" kern="0" spc="20">
               <a:solidFill>
@@ -4015,7 +3997,7 @@
           <p:cNvPr id="6" name="p10-check-title">
             <a:extLst xmlns:a="http://schemas.openxmlformats.org/drawingml/2006/main">
               <a:ext uri="{FF2B5EF4-FFF2-40B4-BE49-F238E27FC236}">
-                <a16:creationId xmlns:a16="http://schemas.microsoft.com/office/drawing/2014/main" id="{B547F51B-3106-4EA4-9982-B4FCF3F67145}"/>
+                <a16:creationId xmlns:a16="http://schemas.microsoft.com/office/drawing/2014/main" id="{2D79ECF3-E4FA-4412-9252-59B2CB9CED73}"/>
               </a:ext>
             </a:extLst>
           </p:cNvPr>
@@ -4068,7 +4050,7 @@
           <p:cNvPr id="7" name="p10-n-0">
             <a:extLst xmlns:a="http://schemas.openxmlformats.org/drawingml/2006/main">
               <a:ext uri="{FF2B5EF4-FFF2-40B4-BE49-F238E27FC236}">
-                <a16:creationId xmlns:a16="http://schemas.microsoft.com/office/drawing/2014/main" id="{A19A2BD6-AB6C-4017-90DF-6321FBD8D267}"/>
+                <a16:creationId xmlns:a16="http://schemas.microsoft.com/office/drawing/2014/main" id="{5511B9E7-46E9-4208-BBD9-42B501033F61}"/>
               </a:ext>
             </a:extLst>
           </p:cNvPr>
@@ -4125,7 +4107,7 @@
           <p:cNvPr id="8" name="p10-c-0">
             <a:extLst xmlns:a="http://schemas.openxmlformats.org/drawingml/2006/main">
               <a:ext uri="{FF2B5EF4-FFF2-40B4-BE49-F238E27FC236}">
-                <a16:creationId xmlns:a16="http://schemas.microsoft.com/office/drawing/2014/main" id="{D34BA272-235A-49C1-B46A-9CBB49D5339B}"/>
+                <a16:creationId xmlns:a16="http://schemas.microsoft.com/office/drawing/2014/main" id="{270128FA-14C0-4317-9F68-C2E852F67055}"/>
               </a:ext>
             </a:extLst>
           </p:cNvPr>
@@ -4180,7 +4162,7 @@
           <p:cNvPr id="9" name="p10-n-1">
             <a:extLst xmlns:a="http://schemas.openxmlformats.org/drawingml/2006/main">
               <a:ext uri="{FF2B5EF4-FFF2-40B4-BE49-F238E27FC236}">
-                <a16:creationId xmlns:a16="http://schemas.microsoft.com/office/drawing/2014/main" id="{A544C3E7-22DC-44DB-B07B-3A249B101EDB}"/>
+                <a16:creationId xmlns:a16="http://schemas.microsoft.com/office/drawing/2014/main" id="{521CA435-6475-4D89-A0A9-332018F6DA09}"/>
               </a:ext>
             </a:extLst>
           </p:cNvPr>
@@ -4237,7 +4219,7 @@
           <p:cNvPr id="10" name="p10-c-1">
             <a:extLst xmlns:a="http://schemas.openxmlformats.org/drawingml/2006/main">
               <a:ext uri="{FF2B5EF4-FFF2-40B4-BE49-F238E27FC236}">
-                <a16:creationId xmlns:a16="http://schemas.microsoft.com/office/drawing/2014/main" id="{20869FD4-80EE-49B7-ABD8-6FAABEAA8C96}"/>
+                <a16:creationId xmlns:a16="http://schemas.microsoft.com/office/drawing/2014/main" id="{5364D616-68F1-4EDE-B222-CC2976CD4580}"/>
               </a:ext>
             </a:extLst>
           </p:cNvPr>
@@ -4292,7 +4274,7 @@
           <p:cNvPr id="11" name="p10-n-2">
             <a:extLst xmlns:a="http://schemas.openxmlformats.org/drawingml/2006/main">
               <a:ext uri="{FF2B5EF4-FFF2-40B4-BE49-F238E27FC236}">
-                <a16:creationId xmlns:a16="http://schemas.microsoft.com/office/drawing/2014/main" id="{6BE843B9-3097-4315-93AD-50C403427B37}"/>
+                <a16:creationId xmlns:a16="http://schemas.microsoft.com/office/drawing/2014/main" id="{47AF826F-1D9F-48AA-A6A3-8B3570FB204D}"/>
               </a:ext>
             </a:extLst>
           </p:cNvPr>
@@ -4349,7 +4331,7 @@
           <p:cNvPr id="12" name="p10-c-2">
             <a:extLst xmlns:a="http://schemas.openxmlformats.org/drawingml/2006/main">
               <a:ext uri="{FF2B5EF4-FFF2-40B4-BE49-F238E27FC236}">
-                <a16:creationId xmlns:a16="http://schemas.microsoft.com/office/drawing/2014/main" id="{45AAD4EE-4401-4254-8688-B27AAA22F6B3}"/>
+                <a16:creationId xmlns:a16="http://schemas.microsoft.com/office/drawing/2014/main" id="{824C5A59-8AC1-40F6-87D0-A66A3761BCF2}"/>
               </a:ext>
             </a:extLst>
           </p:cNvPr>
@@ -4404,7 +4386,7 @@
           <p:cNvPr id="13" name="p10-n-3">
             <a:extLst xmlns:a="http://schemas.openxmlformats.org/drawingml/2006/main">
               <a:ext uri="{FF2B5EF4-FFF2-40B4-BE49-F238E27FC236}">
-                <a16:creationId xmlns:a16="http://schemas.microsoft.com/office/drawing/2014/main" id="{53E0BE10-6F66-4380-AF0D-E1525079D427}"/>
+                <a16:creationId xmlns:a16="http://schemas.microsoft.com/office/drawing/2014/main" id="{A2017534-FD27-4ECB-9A08-023C71826CCB}"/>
               </a:ext>
             </a:extLst>
           </p:cNvPr>
@@ -4461,7 +4443,7 @@
           <p:cNvPr id="14" name="p10-c-3">
             <a:extLst xmlns:a="http://schemas.openxmlformats.org/drawingml/2006/main">
               <a:ext uri="{FF2B5EF4-FFF2-40B4-BE49-F238E27FC236}">
-                <a16:creationId xmlns:a16="http://schemas.microsoft.com/office/drawing/2014/main" id="{3352A5AB-5095-4D82-89A5-4A14EE124100}"/>
+                <a16:creationId xmlns:a16="http://schemas.microsoft.com/office/drawing/2014/main" id="{0AF8F9C3-DC6C-4332-89EA-4AB2B37B3402}"/>
               </a:ext>
             </a:extLst>
           </p:cNvPr>
@@ -4516,7 +4498,7 @@
           <p:cNvPr id="15" name="p10-n-4">
             <a:extLst xmlns:a="http://schemas.openxmlformats.org/drawingml/2006/main">
               <a:ext uri="{FF2B5EF4-FFF2-40B4-BE49-F238E27FC236}">
-                <a16:creationId xmlns:a16="http://schemas.microsoft.com/office/drawing/2014/main" id="{F13BCF1E-455C-4173-A4CB-D3598CF64C24}"/>
+                <a16:creationId xmlns:a16="http://schemas.microsoft.com/office/drawing/2014/main" id="{AC9CAB0D-B727-4E44-9D08-9A539FC2ECEA}"/>
               </a:ext>
             </a:extLst>
           </p:cNvPr>
@@ -4573,7 +4555,7 @@
           <p:cNvPr id="16" name="p10-c-4">
             <a:extLst xmlns:a="http://schemas.openxmlformats.org/drawingml/2006/main">
               <a:ext uri="{FF2B5EF4-FFF2-40B4-BE49-F238E27FC236}">
-                <a16:creationId xmlns:a16="http://schemas.microsoft.com/office/drawing/2014/main" id="{148FD9FF-EDDB-43E2-89F3-8E8063479CC8}"/>
+                <a16:creationId xmlns:a16="http://schemas.microsoft.com/office/drawing/2014/main" id="{E633915D-44D6-440B-BF01-711C4ACFD4E7}"/>
               </a:ext>
             </a:extLst>
           </p:cNvPr>
@@ -4628,7 +4610,7 @@
           <p:cNvPr id="17" name="p10-n-5">
             <a:extLst xmlns:a="http://schemas.openxmlformats.org/drawingml/2006/main">
               <a:ext uri="{FF2B5EF4-FFF2-40B4-BE49-F238E27FC236}">
-                <a16:creationId xmlns:a16="http://schemas.microsoft.com/office/drawing/2014/main" id="{1E6A4C37-A205-46AF-AC5C-CD3CDD6FF851}"/>
+                <a16:creationId xmlns:a16="http://schemas.microsoft.com/office/drawing/2014/main" id="{90BB824F-9392-4C1C-B973-A90EC92BC819}"/>
               </a:ext>
             </a:extLst>
           </p:cNvPr>
@@ -4685,7 +4667,7 @@
           <p:cNvPr id="18" name="p10-c-5">
             <a:extLst xmlns:a="http://schemas.openxmlformats.org/drawingml/2006/main">
               <a:ext uri="{FF2B5EF4-FFF2-40B4-BE49-F238E27FC236}">
-                <a16:creationId xmlns:a16="http://schemas.microsoft.com/office/drawing/2014/main" id="{3BD84F7D-7D42-4EC6-B21C-FF3DEBB9CC70}"/>
+                <a16:creationId xmlns:a16="http://schemas.microsoft.com/office/drawing/2014/main" id="{6D1A96FB-E4D0-40AB-801F-689892A00FDC}"/>
               </a:ext>
             </a:extLst>
           </p:cNvPr>
@@ -4740,7 +4722,7 @@
           <p:cNvPr id="19" name="p10-flow-1">
             <a:extLst xmlns:a="http://schemas.openxmlformats.org/drawingml/2006/main">
               <a:ext uri="{FF2B5EF4-FFF2-40B4-BE49-F238E27FC236}">
-                <a16:creationId xmlns:a16="http://schemas.microsoft.com/office/drawing/2014/main" id="{837AA74F-EFFE-481A-8FC5-7A6590CC997B}"/>
+                <a16:creationId xmlns:a16="http://schemas.microsoft.com/office/drawing/2014/main" id="{56355645-B0FD-498B-BD66-890BD6780F4B}"/>
               </a:ext>
             </a:extLst>
           </p:cNvPr>
@@ -4771,7 +4753,7 @@
           <p:cNvPr id="20" name="p10-flow-2">
             <a:extLst xmlns:a="http://schemas.openxmlformats.org/drawingml/2006/main">
               <a:ext uri="{FF2B5EF4-FFF2-40B4-BE49-F238E27FC236}">
-                <a16:creationId xmlns:a16="http://schemas.microsoft.com/office/drawing/2014/main" id="{7EABA4EF-BEC3-43D0-9141-D2D1589A9A64}"/>
+                <a16:creationId xmlns:a16="http://schemas.microsoft.com/office/drawing/2014/main" id="{0D470172-05D8-42E0-AD6F-4FE9B94A37F0}"/>
               </a:ext>
             </a:extLst>
           </p:cNvPr>
@@ -4802,7 +4784,7 @@
           <p:cNvPr id="21" name="p10-flow-3">
             <a:extLst xmlns:a="http://schemas.openxmlformats.org/drawingml/2006/main">
               <a:ext uri="{FF2B5EF4-FFF2-40B4-BE49-F238E27FC236}">
-                <a16:creationId xmlns:a16="http://schemas.microsoft.com/office/drawing/2014/main" id="{C1320900-3AC7-42EE-B13C-9C2AB6FBC2C5}"/>
+                <a16:creationId xmlns:a16="http://schemas.microsoft.com/office/drawing/2014/main" id="{E7D1D5F6-8AF1-4AF2-B058-48DB736D614C}"/>
               </a:ext>
             </a:extLst>
           </p:cNvPr>
@@ -4833,7 +4815,7 @@
           <p:cNvPr id="22" name="p10-ai">
             <a:extLst xmlns:a="http://schemas.openxmlformats.org/drawingml/2006/main">
               <a:ext uri="{FF2B5EF4-FFF2-40B4-BE49-F238E27FC236}">
-                <a16:creationId xmlns:a16="http://schemas.microsoft.com/office/drawing/2014/main" id="{147B0E74-C522-4E59-81D1-5565EFDAD9F8}"/>
+                <a16:creationId xmlns:a16="http://schemas.microsoft.com/office/drawing/2014/main" id="{BD0BC814-A23F-4581-969F-7B5DB0ED5360}"/>
               </a:ext>
             </a:extLst>
           </p:cNvPr>
@@ -4894,7 +4876,7 @@
           <p:cNvPr id="23" name="p10-audit">
             <a:extLst xmlns:a="http://schemas.openxmlformats.org/drawingml/2006/main">
               <a:ext uri="{FF2B5EF4-FFF2-40B4-BE49-F238E27FC236}">
-                <a16:creationId xmlns:a16="http://schemas.microsoft.com/office/drawing/2014/main" id="{6944FDA3-D8C6-40AA-BA09-D022D9C77EB0}"/>
+                <a16:creationId xmlns:a16="http://schemas.microsoft.com/office/drawing/2014/main" id="{FE63C4B8-114F-4299-B31A-EAD9A6D5502E}"/>
               </a:ext>
             </a:extLst>
           </p:cNvPr>
@@ -4955,7 +4937,7 @@
           <p:cNvPr id="24" name="p10-main">
             <a:extLst xmlns:a="http://schemas.openxmlformats.org/drawingml/2006/main">
               <a:ext uri="{FF2B5EF4-FFF2-40B4-BE49-F238E27FC236}">
-                <a16:creationId xmlns:a16="http://schemas.microsoft.com/office/drawing/2014/main" id="{E50CE592-92C7-47DA-B5CE-6C6F08789A2C}"/>
+                <a16:creationId xmlns:a16="http://schemas.microsoft.com/office/drawing/2014/main" id="{DEE3B860-AC3D-4F9D-A7D5-3763EC85E15B}"/>
               </a:ext>
             </a:extLst>
           </p:cNvPr>
@@ -5040,7 +5022,7 @@
           <p:cNvPr id="25" name="p10-clue">
             <a:extLst xmlns:a="http://schemas.openxmlformats.org/drawingml/2006/main">
               <a:ext uri="{FF2B5EF4-FFF2-40B4-BE49-F238E27FC236}">
-                <a16:creationId xmlns:a16="http://schemas.microsoft.com/office/drawing/2014/main" id="{77CD080E-CFB2-44CC-88E3-5EC0AEDE7201}"/>
+                <a16:creationId xmlns:a16="http://schemas.microsoft.com/office/drawing/2014/main" id="{B3BB2044-E79B-468D-9D8E-C9304F043F9D}"/>
               </a:ext>
             </a:extLst>
           </p:cNvPr>
@@ -5125,7 +5107,7 @@
           <p:cNvPr id="26" name="p10-record">
             <a:extLst xmlns:a="http://schemas.openxmlformats.org/drawingml/2006/main">
               <a:ext uri="{FF2B5EF4-FFF2-40B4-BE49-F238E27FC236}">
-                <a16:creationId xmlns:a16="http://schemas.microsoft.com/office/drawing/2014/main" id="{13C33102-5BA6-4939-B59B-799B1E006772}"/>
+                <a16:creationId xmlns:a16="http://schemas.microsoft.com/office/drawing/2014/main" id="{9F73D98B-5515-46A1-B1E8-0D8A162EFC4E}"/>
               </a:ext>
             </a:extLst>
           </p:cNvPr>
@@ -5272,7 +5254,7 @@
           <p:cNvPr id="6" name="p11-real-method">
             <a:extLst xmlns:a="http://schemas.openxmlformats.org/drawingml/2006/main">
               <a:ext uri="{FF2B5EF4-FFF2-40B4-BE49-F238E27FC236}">
-                <a16:creationId xmlns:a16="http://schemas.microsoft.com/office/drawing/2014/main" id="{779B0942-8A05-49FE-85E2-794E014E15F9}"/>
+                <a16:creationId xmlns:a16="http://schemas.microsoft.com/office/drawing/2014/main" id="{D14E89E5-B032-47B5-81E6-8DB8730BAF28}"/>
               </a:ext>
             </a:extLst>
           </p:cNvPr>
@@ -5327,7 +5309,7 @@
           <p:cNvPr id="7" name="p11-watermark">
             <a:extLst xmlns:a="http://schemas.openxmlformats.org/drawingml/2006/main">
               <a:ext uri="{FF2B5EF4-FFF2-40B4-BE49-F238E27FC236}">
-                <a16:creationId xmlns:a16="http://schemas.microsoft.com/office/drawing/2014/main" id="{499ECA34-4AAF-47CA-9449-FE88180E8A8B}"/>
+                <a16:creationId xmlns:a16="http://schemas.microsoft.com/office/drawing/2014/main" id="{CCEA316D-9BF3-49AE-B721-BF0CF0837116}"/>
               </a:ext>
             </a:extLst>
           </p:cNvPr>
@@ -5380,7 +5362,7 @@
           <p:cNvPr id="8" name="p11-line-0">
             <a:extLst xmlns:a="http://schemas.openxmlformats.org/drawingml/2006/main">
               <a:ext uri="{FF2B5EF4-FFF2-40B4-BE49-F238E27FC236}">
-                <a16:creationId xmlns:a16="http://schemas.microsoft.com/office/drawing/2014/main" id="{B87B29A8-1108-436E-AEB0-1270DF2EFF81}"/>
+                <a16:creationId xmlns:a16="http://schemas.microsoft.com/office/drawing/2014/main" id="{A60A8397-4D2F-4BEA-A020-084E02F32A9E}"/>
               </a:ext>
             </a:extLst>
           </p:cNvPr>
@@ -5411,7 +5393,7 @@
           <p:cNvPr id="9" name="p11-line-1">
             <a:extLst xmlns:a="http://schemas.openxmlformats.org/drawingml/2006/main">
               <a:ext uri="{FF2B5EF4-FFF2-40B4-BE49-F238E27FC236}">
-                <a16:creationId xmlns:a16="http://schemas.microsoft.com/office/drawing/2014/main" id="{B0FEBC1E-FD0F-441F-9820-3A5627017298}"/>
+                <a16:creationId xmlns:a16="http://schemas.microsoft.com/office/drawing/2014/main" id="{6DB8E4CC-1AB5-434E-94F2-99865C626118}"/>
               </a:ext>
             </a:extLst>
           </p:cNvPr>
@@ -5442,7 +5424,7 @@
           <p:cNvPr id="10" name="p11-line-2">
             <a:extLst xmlns:a="http://schemas.openxmlformats.org/drawingml/2006/main">
               <a:ext uri="{FF2B5EF4-FFF2-40B4-BE49-F238E27FC236}">
-                <a16:creationId xmlns:a16="http://schemas.microsoft.com/office/drawing/2014/main" id="{F1F65E36-10C9-463D-BAE7-DC7EC77EDAE6}"/>
+                <a16:creationId xmlns:a16="http://schemas.microsoft.com/office/drawing/2014/main" id="{7AD0D330-89C9-4926-8F95-DE14109BD28C}"/>
               </a:ext>
             </a:extLst>
           </p:cNvPr>
@@ -5473,7 +5455,7 @@
           <p:cNvPr id="11" name="p11-number-0">
             <a:extLst xmlns:a="http://schemas.openxmlformats.org/drawingml/2006/main">
               <a:ext uri="{FF2B5EF4-FFF2-40B4-BE49-F238E27FC236}">
-                <a16:creationId xmlns:a16="http://schemas.microsoft.com/office/drawing/2014/main" id="{85820754-5246-4F1E-B690-8B85F648DA5A}"/>
+                <a16:creationId xmlns:a16="http://schemas.microsoft.com/office/drawing/2014/main" id="{B7162B37-D267-43EA-83DD-0B46286F6E88}"/>
               </a:ext>
             </a:extLst>
           </p:cNvPr>
@@ -5530,7 +5512,7 @@
           <p:cNvPr id="12" name="p11-step-0">
             <a:extLst xmlns:a="http://schemas.openxmlformats.org/drawingml/2006/main">
               <a:ext uri="{FF2B5EF4-FFF2-40B4-BE49-F238E27FC236}">
-                <a16:creationId xmlns:a16="http://schemas.microsoft.com/office/drawing/2014/main" id="{5C09C265-C682-4F81-A3B4-2E87C85AC702}"/>
+                <a16:creationId xmlns:a16="http://schemas.microsoft.com/office/drawing/2014/main" id="{958DF2AE-CDD7-42B6-88FA-CDC78B836F88}"/>
               </a:ext>
             </a:extLst>
           </p:cNvPr>
@@ -5639,7 +5621,7 @@
           <p:cNvPr id="13" name="p11-number-1">
             <a:extLst xmlns:a="http://schemas.openxmlformats.org/drawingml/2006/main">
               <a:ext uri="{FF2B5EF4-FFF2-40B4-BE49-F238E27FC236}">
-                <a16:creationId xmlns:a16="http://schemas.microsoft.com/office/drawing/2014/main" id="{5AF48074-7B2C-4F1F-B8A0-C05481AF018E}"/>
+                <a16:creationId xmlns:a16="http://schemas.microsoft.com/office/drawing/2014/main" id="{E649AB7F-85A3-4CC2-A7C1-836E832813CD}"/>
               </a:ext>
             </a:extLst>
           </p:cNvPr>
@@ -5696,7 +5678,7 @@
           <p:cNvPr id="14" name="p11-step-1">
             <a:extLst xmlns:a="http://schemas.openxmlformats.org/drawingml/2006/main">
               <a:ext uri="{FF2B5EF4-FFF2-40B4-BE49-F238E27FC236}">
-                <a16:creationId xmlns:a16="http://schemas.microsoft.com/office/drawing/2014/main" id="{A913CB4D-B6B9-44DC-BB06-6C4788EDA2AC}"/>
+                <a16:creationId xmlns:a16="http://schemas.microsoft.com/office/drawing/2014/main" id="{F168C7DA-9636-4968-974C-6AB808A751B3}"/>
               </a:ext>
             </a:extLst>
           </p:cNvPr>
@@ -5805,7 +5787,7 @@
           <p:cNvPr id="15" name="p11-number-2">
             <a:extLst xmlns:a="http://schemas.openxmlformats.org/drawingml/2006/main">
               <a:ext uri="{FF2B5EF4-FFF2-40B4-BE49-F238E27FC236}">
-                <a16:creationId xmlns:a16="http://schemas.microsoft.com/office/drawing/2014/main" id="{36810931-D500-4C60-9C25-ED4EADE632F9}"/>
+                <a16:creationId xmlns:a16="http://schemas.microsoft.com/office/drawing/2014/main" id="{727462FA-B70F-4336-A1FD-ADA8CC295B7B}"/>
               </a:ext>
             </a:extLst>
           </p:cNvPr>
@@ -5862,7 +5844,7 @@
           <p:cNvPr id="16" name="p11-step-2">
             <a:extLst xmlns:a="http://schemas.openxmlformats.org/drawingml/2006/main">
               <a:ext uri="{FF2B5EF4-FFF2-40B4-BE49-F238E27FC236}">
-                <a16:creationId xmlns:a16="http://schemas.microsoft.com/office/drawing/2014/main" id="{266F0D64-89C6-4A02-8BE8-471979B797CF}"/>
+                <a16:creationId xmlns:a16="http://schemas.microsoft.com/office/drawing/2014/main" id="{32458310-4C45-45E4-A578-0DE2B4C67C33}"/>
               </a:ext>
             </a:extLst>
           </p:cNvPr>
@@ -5995,7 +5977,7 @@
           <p:cNvPr id="17" name="p11-number-3">
             <a:extLst xmlns:a="http://schemas.openxmlformats.org/drawingml/2006/main">
               <a:ext uri="{FF2B5EF4-FFF2-40B4-BE49-F238E27FC236}">
-                <a16:creationId xmlns:a16="http://schemas.microsoft.com/office/drawing/2014/main" id="{5D3189B3-9D1A-4846-BB14-A6716F04C5FE}"/>
+                <a16:creationId xmlns:a16="http://schemas.microsoft.com/office/drawing/2014/main" id="{2E2CF2B5-C1E4-4607-8700-21A03C003E75}"/>
               </a:ext>
             </a:extLst>
           </p:cNvPr>
@@ -6052,7 +6034,7 @@
           <p:cNvPr id="18" name="p11-step-3">
             <a:extLst xmlns:a="http://schemas.openxmlformats.org/drawingml/2006/main">
               <a:ext uri="{FF2B5EF4-FFF2-40B4-BE49-F238E27FC236}">
-                <a16:creationId xmlns:a16="http://schemas.microsoft.com/office/drawing/2014/main" id="{67E5AD88-25DA-40FF-975B-DEBBAD05D2FC}"/>
+                <a16:creationId xmlns:a16="http://schemas.microsoft.com/office/drawing/2014/main" id="{B52B12C2-0AB9-4AB8-82F6-9C59EF80BA63}"/>
               </a:ext>
             </a:extLst>
           </p:cNvPr>
@@ -6161,7 +6143,7 @@
           <p:cNvPr id="19" name="p11-predictions-title">
             <a:extLst xmlns:a="http://schemas.openxmlformats.org/drawingml/2006/main">
               <a:ext uri="{FF2B5EF4-FFF2-40B4-BE49-F238E27FC236}">
-                <a16:creationId xmlns:a16="http://schemas.microsoft.com/office/drawing/2014/main" id="{21A2F0DA-CA09-4243-865B-37F60F175242}"/>
+                <a16:creationId xmlns:a16="http://schemas.microsoft.com/office/drawing/2014/main" id="{A74867A3-B86B-4233-9D50-FA8B5FAECE84}"/>
               </a:ext>
             </a:extLst>
           </p:cNvPr>
@@ -6214,7 +6196,7 @@
           <p:cNvPr id="20" name="p11-pred-0">
             <a:extLst xmlns:a="http://schemas.openxmlformats.org/drawingml/2006/main">
               <a:ext uri="{FF2B5EF4-FFF2-40B4-BE49-F238E27FC236}">
-                <a16:creationId xmlns:a16="http://schemas.microsoft.com/office/drawing/2014/main" id="{7E1B4197-33E7-4BC7-8556-C4F56FE2D681}"/>
+                <a16:creationId xmlns:a16="http://schemas.microsoft.com/office/drawing/2014/main" id="{A0DF403E-C3C2-4A6C-84D3-842987E01AD8}"/>
               </a:ext>
             </a:extLst>
           </p:cNvPr>
@@ -6275,7 +6257,7 @@
           <p:cNvPr id="21" name="p11-pred-1">
             <a:extLst xmlns:a="http://schemas.openxmlformats.org/drawingml/2006/main">
               <a:ext uri="{FF2B5EF4-FFF2-40B4-BE49-F238E27FC236}">
-                <a16:creationId xmlns:a16="http://schemas.microsoft.com/office/drawing/2014/main" id="{C24D780D-8F74-4910-AEAB-D6BE8C73D9D2}"/>
+                <a16:creationId xmlns:a16="http://schemas.microsoft.com/office/drawing/2014/main" id="{AB0E9FEA-CA67-4440-8173-32E619913986}"/>
               </a:ext>
             </a:extLst>
           </p:cNvPr>
@@ -6336,7 +6318,7 @@
           <p:cNvPr id="22" name="p11-pred-2">
             <a:extLst xmlns:a="http://schemas.openxmlformats.org/drawingml/2006/main">
               <a:ext uri="{FF2B5EF4-FFF2-40B4-BE49-F238E27FC236}">
-                <a16:creationId xmlns:a16="http://schemas.microsoft.com/office/drawing/2014/main" id="{B5A80BD8-A2F1-4253-8B26-372996D1972F}"/>
+                <a16:creationId xmlns:a16="http://schemas.microsoft.com/office/drawing/2014/main" id="{2D914A26-4AD0-4B63-9C4C-422726B71E65}"/>
               </a:ext>
             </a:extLst>
           </p:cNvPr>
@@ -6489,7 +6471,7 @@
           <p:cNvPr id="6" name="p12-watermark">
             <a:extLst xmlns:a="http://schemas.openxmlformats.org/drawingml/2006/main">
               <a:ext uri="{FF2B5EF4-FFF2-40B4-BE49-F238E27FC236}">
-                <a16:creationId xmlns:a16="http://schemas.microsoft.com/office/drawing/2014/main" id="{B361D7CC-F9EF-4E30-9661-D99A852830BD}"/>
+                <a16:creationId xmlns:a16="http://schemas.microsoft.com/office/drawing/2014/main" id="{F4332F7F-5DB7-4B2B-81A1-595B68747CC2}"/>
               </a:ext>
             </a:extLst>
           </p:cNvPr>
@@ -6542,7 +6524,7 @@
           <p:cNvPr id="7" name="p12-line-0">
             <a:extLst xmlns:a="http://schemas.openxmlformats.org/drawingml/2006/main">
               <a:ext uri="{FF2B5EF4-FFF2-40B4-BE49-F238E27FC236}">
-                <a16:creationId xmlns:a16="http://schemas.microsoft.com/office/drawing/2014/main" id="{63B90261-6F90-45DF-AA70-1EA1B50A9847}"/>
+                <a16:creationId xmlns:a16="http://schemas.microsoft.com/office/drawing/2014/main" id="{5CD60A4D-7E10-4D2D-A02B-3061DF619879}"/>
               </a:ext>
             </a:extLst>
           </p:cNvPr>
@@ -6573,7 +6555,7 @@
           <p:cNvPr id="8" name="p12-line-1">
             <a:extLst xmlns:a="http://schemas.openxmlformats.org/drawingml/2006/main">
               <a:ext uri="{FF2B5EF4-FFF2-40B4-BE49-F238E27FC236}">
-                <a16:creationId xmlns:a16="http://schemas.microsoft.com/office/drawing/2014/main" id="{B20D5CF3-20FE-4BFD-83AD-C8E8693E7263}"/>
+                <a16:creationId xmlns:a16="http://schemas.microsoft.com/office/drawing/2014/main" id="{E6E3A93F-1330-48BE-8826-00616C2603B1}"/>
               </a:ext>
             </a:extLst>
           </p:cNvPr>
@@ -6604,7 +6586,7 @@
           <p:cNvPr id="9" name="p12-line-2">
             <a:extLst xmlns:a="http://schemas.openxmlformats.org/drawingml/2006/main">
               <a:ext uri="{FF2B5EF4-FFF2-40B4-BE49-F238E27FC236}">
-                <a16:creationId xmlns:a16="http://schemas.microsoft.com/office/drawing/2014/main" id="{F691B6F6-F774-4C18-953A-44BC95D83551}"/>
+                <a16:creationId xmlns:a16="http://schemas.microsoft.com/office/drawing/2014/main" id="{D62A8078-E41A-46CF-8C46-140D6DCD5388}"/>
               </a:ext>
             </a:extLst>
           </p:cNvPr>
@@ -6635,7 +6617,7 @@
           <p:cNvPr id="10" name="p12-line-3">
             <a:extLst xmlns:a="http://schemas.openxmlformats.org/drawingml/2006/main">
               <a:ext uri="{FF2B5EF4-FFF2-40B4-BE49-F238E27FC236}">
-                <a16:creationId xmlns:a16="http://schemas.microsoft.com/office/drawing/2014/main" id="{152990A5-061D-44B7-B401-17520FD03E10}"/>
+                <a16:creationId xmlns:a16="http://schemas.microsoft.com/office/drawing/2014/main" id="{DEAAFB4F-6C4B-4CAA-9EF9-522D5577AF7D}"/>
               </a:ext>
             </a:extLst>
           </p:cNvPr>
@@ -6666,7 +6648,7 @@
           <p:cNvPr id="11" name="p12-number-0">
             <a:extLst xmlns:a="http://schemas.openxmlformats.org/drawingml/2006/main">
               <a:ext uri="{FF2B5EF4-FFF2-40B4-BE49-F238E27FC236}">
-                <a16:creationId xmlns:a16="http://schemas.microsoft.com/office/drawing/2014/main" id="{7C79769E-0FD3-4850-954A-CBF826E72621}"/>
+                <a16:creationId xmlns:a16="http://schemas.microsoft.com/office/drawing/2014/main" id="{B3EC952B-8A10-4A50-9DE9-58C8FC993758}"/>
               </a:ext>
             </a:extLst>
           </p:cNvPr>
@@ -6723,7 +6705,7 @@
           <p:cNvPr id="12" name="p12-step-0">
             <a:extLst xmlns:a="http://schemas.openxmlformats.org/drawingml/2006/main">
               <a:ext uri="{FF2B5EF4-FFF2-40B4-BE49-F238E27FC236}">
-                <a16:creationId xmlns:a16="http://schemas.microsoft.com/office/drawing/2014/main" id="{5B0F8BB8-F0A4-4F63-8BCF-59EF0D6E9E42}"/>
+                <a16:creationId xmlns:a16="http://schemas.microsoft.com/office/drawing/2014/main" id="{C74C6B72-DA66-44C8-9B54-58FF4F7987D0}"/>
               </a:ext>
             </a:extLst>
           </p:cNvPr>
@@ -6778,7 +6760,7 @@
           <p:cNvPr id="13" name="p12-number-1">
             <a:extLst xmlns:a="http://schemas.openxmlformats.org/drawingml/2006/main">
               <a:ext uri="{FF2B5EF4-FFF2-40B4-BE49-F238E27FC236}">
-                <a16:creationId xmlns:a16="http://schemas.microsoft.com/office/drawing/2014/main" id="{E6D85153-01C1-44EA-88A6-4E14D69B6037}"/>
+                <a16:creationId xmlns:a16="http://schemas.microsoft.com/office/drawing/2014/main" id="{B13E46C2-A847-4812-999E-8102F229B4E3}"/>
               </a:ext>
             </a:extLst>
           </p:cNvPr>
@@ -6835,7 +6817,7 @@
           <p:cNvPr id="14" name="p12-step-1">
             <a:extLst xmlns:a="http://schemas.openxmlformats.org/drawingml/2006/main">
               <a:ext uri="{FF2B5EF4-FFF2-40B4-BE49-F238E27FC236}">
-                <a16:creationId xmlns:a16="http://schemas.microsoft.com/office/drawing/2014/main" id="{9EF2D3A8-0CBE-4821-8DD9-479E7274494E}"/>
+                <a16:creationId xmlns:a16="http://schemas.microsoft.com/office/drawing/2014/main" id="{5C6D5FDF-C624-4FF7-BDE3-44C25A99F4D8}"/>
               </a:ext>
             </a:extLst>
           </p:cNvPr>
@@ -6890,7 +6872,7 @@
           <p:cNvPr id="15" name="p12-number-2">
             <a:extLst xmlns:a="http://schemas.openxmlformats.org/drawingml/2006/main">
               <a:ext uri="{FF2B5EF4-FFF2-40B4-BE49-F238E27FC236}">
-                <a16:creationId xmlns:a16="http://schemas.microsoft.com/office/drawing/2014/main" id="{56A75EBD-30B2-4723-9EC3-9ECC8BDF2B62}"/>
+                <a16:creationId xmlns:a16="http://schemas.microsoft.com/office/drawing/2014/main" id="{897F0CA6-3850-4114-8FCF-E073FBA163F2}"/>
               </a:ext>
             </a:extLst>
           </p:cNvPr>
@@ -6947,7 +6929,7 @@
           <p:cNvPr id="16" name="p12-step-2">
             <a:extLst xmlns:a="http://schemas.openxmlformats.org/drawingml/2006/main">
               <a:ext uri="{FF2B5EF4-FFF2-40B4-BE49-F238E27FC236}">
-                <a16:creationId xmlns:a16="http://schemas.microsoft.com/office/drawing/2014/main" id="{6BCD5D7A-0421-48A5-8DFA-3174D8F903DF}"/>
+                <a16:creationId xmlns:a16="http://schemas.microsoft.com/office/drawing/2014/main" id="{430EEEC6-F2FE-4A81-A951-25C0546C7984}"/>
               </a:ext>
             </a:extLst>
           </p:cNvPr>
@@ -7002,7 +6984,7 @@
           <p:cNvPr id="17" name="p12-number-3">
             <a:extLst xmlns:a="http://schemas.openxmlformats.org/drawingml/2006/main">
               <a:ext uri="{FF2B5EF4-FFF2-40B4-BE49-F238E27FC236}">
-                <a16:creationId xmlns:a16="http://schemas.microsoft.com/office/drawing/2014/main" id="{0C4AE8CF-3B50-4120-8753-C290B965A4AC}"/>
+                <a16:creationId xmlns:a16="http://schemas.microsoft.com/office/drawing/2014/main" id="{F268325D-C587-4AF9-AC93-CD662EC08B35}"/>
               </a:ext>
             </a:extLst>
           </p:cNvPr>
@@ -7059,7 +7041,7 @@
           <p:cNvPr id="18" name="p12-step-3">
             <a:extLst xmlns:a="http://schemas.openxmlformats.org/drawingml/2006/main">
               <a:ext uri="{FF2B5EF4-FFF2-40B4-BE49-F238E27FC236}">
-                <a16:creationId xmlns:a16="http://schemas.microsoft.com/office/drawing/2014/main" id="{28B785BB-655F-41F0-BD3D-4B4293A6036D}"/>
+                <a16:creationId xmlns:a16="http://schemas.microsoft.com/office/drawing/2014/main" id="{4D36A58A-8EDD-411F-8DCD-4442C3840FB4}"/>
               </a:ext>
             </a:extLst>
           </p:cNvPr>
@@ -7114,7 +7096,7 @@
           <p:cNvPr id="19" name="p12-number-4">
             <a:extLst xmlns:a="http://schemas.openxmlformats.org/drawingml/2006/main">
               <a:ext uri="{FF2B5EF4-FFF2-40B4-BE49-F238E27FC236}">
-                <a16:creationId xmlns:a16="http://schemas.microsoft.com/office/drawing/2014/main" id="{60FB5EC1-DE96-4382-A03E-E09C34B99346}"/>
+                <a16:creationId xmlns:a16="http://schemas.microsoft.com/office/drawing/2014/main" id="{6213D672-0D90-42F7-B7E3-1162E55C3843}"/>
               </a:ext>
             </a:extLst>
           </p:cNvPr>
@@ -7171,7 +7153,7 @@
           <p:cNvPr id="20" name="p12-step-4">
             <a:extLst xmlns:a="http://schemas.openxmlformats.org/drawingml/2006/main">
               <a:ext uri="{FF2B5EF4-FFF2-40B4-BE49-F238E27FC236}">
-                <a16:creationId xmlns:a16="http://schemas.microsoft.com/office/drawing/2014/main" id="{B0425DC0-0016-4830-B146-0B9727DA6089}"/>
+                <a16:creationId xmlns:a16="http://schemas.microsoft.com/office/drawing/2014/main" id="{8A19A7A9-693C-49A6-BD76-73B5DED5C0BB}"/>
               </a:ext>
             </a:extLst>
           </p:cNvPr>
@@ -7226,7 +7208,7 @@
           <p:cNvPr id="21" name="p12-audit-h-0">
             <a:extLst xmlns:a="http://schemas.openxmlformats.org/drawingml/2006/main">
               <a:ext uri="{FF2B5EF4-FFF2-40B4-BE49-F238E27FC236}">
-                <a16:creationId xmlns:a16="http://schemas.microsoft.com/office/drawing/2014/main" id="{C0B12B48-6759-4F0E-B56F-E3E6E14A2287}"/>
+                <a16:creationId xmlns:a16="http://schemas.microsoft.com/office/drawing/2014/main" id="{5494FFDF-F584-45CF-8CA1-67797A987D42}"/>
               </a:ext>
             </a:extLst>
           </p:cNvPr>
@@ -7281,7 +7263,7 @@
           <p:cNvPr id="22" name="p12-audit-h-1">
             <a:extLst xmlns:a="http://schemas.openxmlformats.org/drawingml/2006/main">
               <a:ext uri="{FF2B5EF4-FFF2-40B4-BE49-F238E27FC236}">
-                <a16:creationId xmlns:a16="http://schemas.microsoft.com/office/drawing/2014/main" id="{3C68CC6E-6DC7-4423-8540-901296EC7C20}"/>
+                <a16:creationId xmlns:a16="http://schemas.microsoft.com/office/drawing/2014/main" id="{125EF463-E42C-46AC-B416-AD2500FB4BCE}"/>
               </a:ext>
             </a:extLst>
           </p:cNvPr>
@@ -7336,7 +7318,7 @@
           <p:cNvPr id="23" name="p12-audit-h-2">
             <a:extLst xmlns:a="http://schemas.openxmlformats.org/drawingml/2006/main">
               <a:ext uri="{FF2B5EF4-FFF2-40B4-BE49-F238E27FC236}">
-                <a16:creationId xmlns:a16="http://schemas.microsoft.com/office/drawing/2014/main" id="{AEB87396-EA69-4AA6-9F8C-CF44A67387C2}"/>
+                <a16:creationId xmlns:a16="http://schemas.microsoft.com/office/drawing/2014/main" id="{9C8CE1E4-1374-4DF2-A7F8-A1BA858EFC8C}"/>
               </a:ext>
             </a:extLst>
           </p:cNvPr>
@@ -7391,7 +7373,7 @@
           <p:cNvPr id="24" name="p12-audit-r0-0">
             <a:extLst xmlns:a="http://schemas.openxmlformats.org/drawingml/2006/main">
               <a:ext uri="{FF2B5EF4-FFF2-40B4-BE49-F238E27FC236}">
-                <a16:creationId xmlns:a16="http://schemas.microsoft.com/office/drawing/2014/main" id="{8DDB9EB8-3D02-44E1-83A3-8EAE39E4002A}"/>
+                <a16:creationId xmlns:a16="http://schemas.microsoft.com/office/drawing/2014/main" id="{006D0357-9371-4C78-A9B7-663975F2C3B8}"/>
               </a:ext>
             </a:extLst>
           </p:cNvPr>
@@ -7452,7 +7434,7 @@
           <p:cNvPr id="25" name="p12-audit-r0-1">
             <a:extLst xmlns:a="http://schemas.openxmlformats.org/drawingml/2006/main">
               <a:ext uri="{FF2B5EF4-FFF2-40B4-BE49-F238E27FC236}">
-                <a16:creationId xmlns:a16="http://schemas.microsoft.com/office/drawing/2014/main" id="{E40D7360-FECE-4EAF-BF01-37F8690452EA}"/>
+                <a16:creationId xmlns:a16="http://schemas.microsoft.com/office/drawing/2014/main" id="{B7942704-6EA5-4DEB-A95F-121FBCD7D4B4}"/>
               </a:ext>
             </a:extLst>
           </p:cNvPr>
@@ -7513,7 +7495,7 @@
           <p:cNvPr id="26" name="p12-audit-r0-2">
             <a:extLst xmlns:a="http://schemas.openxmlformats.org/drawingml/2006/main">
               <a:ext uri="{FF2B5EF4-FFF2-40B4-BE49-F238E27FC236}">
-                <a16:creationId xmlns:a16="http://schemas.microsoft.com/office/drawing/2014/main" id="{BA2E70B5-0E6E-4E03-BCB3-DF23D40743EA}"/>
+                <a16:creationId xmlns:a16="http://schemas.microsoft.com/office/drawing/2014/main" id="{59268119-48E3-49E9-A382-40A567422D3C}"/>
               </a:ext>
             </a:extLst>
           </p:cNvPr>
@@ -7574,7 +7556,7 @@
           <p:cNvPr id="27" name="p12-audit-r1-0">
             <a:extLst xmlns:a="http://schemas.openxmlformats.org/drawingml/2006/main">
               <a:ext uri="{FF2B5EF4-FFF2-40B4-BE49-F238E27FC236}">
-                <a16:creationId xmlns:a16="http://schemas.microsoft.com/office/drawing/2014/main" id="{6B5BEC6D-4916-4FB3-8504-6AA3DC385152}"/>
+                <a16:creationId xmlns:a16="http://schemas.microsoft.com/office/drawing/2014/main" id="{095ED41B-C0A5-4D92-A2B6-A1C117880FA4}"/>
               </a:ext>
             </a:extLst>
           </p:cNvPr>
@@ -7635,7 +7617,7 @@
           <p:cNvPr id="28" name="p12-audit-r1-1">
             <a:extLst xmlns:a="http://schemas.openxmlformats.org/drawingml/2006/main">
               <a:ext uri="{FF2B5EF4-FFF2-40B4-BE49-F238E27FC236}">
-                <a16:creationId xmlns:a16="http://schemas.microsoft.com/office/drawing/2014/main" id="{B9D933DD-814C-4D50-900C-9A7CDE4BD8CD}"/>
+                <a16:creationId xmlns:a16="http://schemas.microsoft.com/office/drawing/2014/main" id="{DF906BB0-57C5-4822-AADD-23694E96998C}"/>
               </a:ext>
             </a:extLst>
           </p:cNvPr>
@@ -7696,7 +7678,7 @@
           <p:cNvPr id="29" name="p12-audit-r1-2">
             <a:extLst xmlns:a="http://schemas.openxmlformats.org/drawingml/2006/main">
               <a:ext uri="{FF2B5EF4-FFF2-40B4-BE49-F238E27FC236}">
-                <a16:creationId xmlns:a16="http://schemas.microsoft.com/office/drawing/2014/main" id="{D06B92A9-21B7-4E66-9AAA-75F96CCD2114}"/>
+                <a16:creationId xmlns:a16="http://schemas.microsoft.com/office/drawing/2014/main" id="{8061A23E-34D8-45BF-9E9F-B9FFE493DCEA}"/>
               </a:ext>
             </a:extLst>
           </p:cNvPr>
@@ -7757,7 +7739,7 @@
           <p:cNvPr id="30" name="p12-audit-r2-0">
             <a:extLst xmlns:a="http://schemas.openxmlformats.org/drawingml/2006/main">
               <a:ext uri="{FF2B5EF4-FFF2-40B4-BE49-F238E27FC236}">
-                <a16:creationId xmlns:a16="http://schemas.microsoft.com/office/drawing/2014/main" id="{08FF1DF7-86CD-4FBE-B08C-BC5787474451}"/>
+                <a16:creationId xmlns:a16="http://schemas.microsoft.com/office/drawing/2014/main" id="{72F1816E-956C-4264-9283-EA634BAC606D}"/>
               </a:ext>
             </a:extLst>
           </p:cNvPr>
@@ -7818,7 +7800,7 @@
           <p:cNvPr id="31" name="p12-audit-r2-1">
             <a:extLst xmlns:a="http://schemas.openxmlformats.org/drawingml/2006/main">
               <a:ext uri="{FF2B5EF4-FFF2-40B4-BE49-F238E27FC236}">
-                <a16:creationId xmlns:a16="http://schemas.microsoft.com/office/drawing/2014/main" id="{413CD15A-0336-421C-8829-692557E3F9B3}"/>
+                <a16:creationId xmlns:a16="http://schemas.microsoft.com/office/drawing/2014/main" id="{B149ADBF-50F7-4220-8E59-8DB946AB1368}"/>
               </a:ext>
             </a:extLst>
           </p:cNvPr>
@@ -7879,7 +7861,7 @@
           <p:cNvPr id="32" name="p12-audit-r2-2">
             <a:extLst xmlns:a="http://schemas.openxmlformats.org/drawingml/2006/main">
               <a:ext uri="{FF2B5EF4-FFF2-40B4-BE49-F238E27FC236}">
-                <a16:creationId xmlns:a16="http://schemas.microsoft.com/office/drawing/2014/main" id="{6AD79BC1-8663-46EA-93AD-5241033D94A4}"/>
+                <a16:creationId xmlns:a16="http://schemas.microsoft.com/office/drawing/2014/main" id="{B7931345-4E53-4064-A083-6E09CBA292F2}"/>
               </a:ext>
             </a:extLst>
           </p:cNvPr>
@@ -7940,7 +7922,7 @@
           <p:cNvPr id="33" name="p12-bottom">
             <a:extLst xmlns:a="http://schemas.openxmlformats.org/drawingml/2006/main">
               <a:ext uri="{FF2B5EF4-FFF2-40B4-BE49-F238E27FC236}">
-                <a16:creationId xmlns:a16="http://schemas.microsoft.com/office/drawing/2014/main" id="{DCD81FFA-7228-4701-B69B-5A63DC92CDFE}"/>
+                <a16:creationId xmlns:a16="http://schemas.microsoft.com/office/drawing/2014/main" id="{7AC68A83-1A55-4A97-A8C8-5986208BEB1D}"/>
               </a:ext>
             </a:extLst>
           </p:cNvPr>
@@ -8085,7 +8067,7 @@
           <p:cNvPr id="6" name="p13-errors-title">
             <a:extLst xmlns:a="http://schemas.openxmlformats.org/drawingml/2006/main">
               <a:ext uri="{FF2B5EF4-FFF2-40B4-BE49-F238E27FC236}">
-                <a16:creationId xmlns:a16="http://schemas.microsoft.com/office/drawing/2014/main" id="{71856844-90AB-4B18-AF96-A6503C6251C8}"/>
+                <a16:creationId xmlns:a16="http://schemas.microsoft.com/office/drawing/2014/main" id="{F93DFFFE-085E-468C-8B99-76FFBF49BE01}"/>
               </a:ext>
             </a:extLst>
           </p:cNvPr>
@@ -8138,7 +8120,7 @@
           <p:cNvPr id="7" name="p13-x-0">
             <a:extLst xmlns:a="http://schemas.openxmlformats.org/drawingml/2006/main">
               <a:ext uri="{FF2B5EF4-FFF2-40B4-BE49-F238E27FC236}">
-                <a16:creationId xmlns:a16="http://schemas.microsoft.com/office/drawing/2014/main" id="{4D58DC74-D686-499C-AA5B-94BF2130289F}"/>
+                <a16:creationId xmlns:a16="http://schemas.microsoft.com/office/drawing/2014/main" id="{B362704E-B518-4A27-BEC6-48D3F649AC02}"/>
               </a:ext>
             </a:extLst>
           </p:cNvPr>
@@ -8195,7 +8177,7 @@
           <p:cNvPr id="8" name="p13-error-0">
             <a:extLst xmlns:a="http://schemas.openxmlformats.org/drawingml/2006/main">
               <a:ext uri="{FF2B5EF4-FFF2-40B4-BE49-F238E27FC236}">
-                <a16:creationId xmlns:a16="http://schemas.microsoft.com/office/drawing/2014/main" id="{02DCF035-D477-4D3C-9029-1890AABB8625}"/>
+                <a16:creationId xmlns:a16="http://schemas.microsoft.com/office/drawing/2014/main" id="{F1F662D5-826C-490D-BB1B-35E8E1E15464}"/>
               </a:ext>
             </a:extLst>
           </p:cNvPr>
@@ -8250,7 +8232,7 @@
           <p:cNvPr id="9" name="p13-x-1">
             <a:extLst xmlns:a="http://schemas.openxmlformats.org/drawingml/2006/main">
               <a:ext uri="{FF2B5EF4-FFF2-40B4-BE49-F238E27FC236}">
-                <a16:creationId xmlns:a16="http://schemas.microsoft.com/office/drawing/2014/main" id="{69B64104-24B8-481B-BDEE-E5A6337986B2}"/>
+                <a16:creationId xmlns:a16="http://schemas.microsoft.com/office/drawing/2014/main" id="{391E2DDA-F5D0-4184-AF8A-560F86626E43}"/>
               </a:ext>
             </a:extLst>
           </p:cNvPr>
@@ -8307,7 +8289,7 @@
           <p:cNvPr id="10" name="p13-error-1">
             <a:extLst xmlns:a="http://schemas.openxmlformats.org/drawingml/2006/main">
               <a:ext uri="{FF2B5EF4-FFF2-40B4-BE49-F238E27FC236}">
-                <a16:creationId xmlns:a16="http://schemas.microsoft.com/office/drawing/2014/main" id="{4B39BE41-EEF4-4CC0-995D-EEE79ED84DF0}"/>
+                <a16:creationId xmlns:a16="http://schemas.microsoft.com/office/drawing/2014/main" id="{B9A4B802-B399-4CEB-840B-403D289C28B2}"/>
               </a:ext>
             </a:extLst>
           </p:cNvPr>
@@ -8362,7 +8344,7 @@
           <p:cNvPr id="11" name="p13-x-2">
             <a:extLst xmlns:a="http://schemas.openxmlformats.org/drawingml/2006/main">
               <a:ext uri="{FF2B5EF4-FFF2-40B4-BE49-F238E27FC236}">
-                <a16:creationId xmlns:a16="http://schemas.microsoft.com/office/drawing/2014/main" id="{4F45536D-937D-40D9-A13C-E32B2B36B67E}"/>
+                <a16:creationId xmlns:a16="http://schemas.microsoft.com/office/drawing/2014/main" id="{F6A51ADA-F96D-439E-B40E-3AD77F7B0996}"/>
               </a:ext>
             </a:extLst>
           </p:cNvPr>
@@ -8419,7 +8401,7 @@
           <p:cNvPr id="12" name="p13-error-2">
             <a:extLst xmlns:a="http://schemas.openxmlformats.org/drawingml/2006/main">
               <a:ext uri="{FF2B5EF4-FFF2-40B4-BE49-F238E27FC236}">
-                <a16:creationId xmlns:a16="http://schemas.microsoft.com/office/drawing/2014/main" id="{1DAA50C7-AD37-46AB-A228-E27446BAE80C}"/>
+                <a16:creationId xmlns:a16="http://schemas.microsoft.com/office/drawing/2014/main" id="{7A379D65-A950-4A79-A3E9-17312134CDF4}"/>
               </a:ext>
             </a:extLst>
           </p:cNvPr>
@@ -8474,7 +8456,7 @@
           <p:cNvPr id="13" name="p13-x-3">
             <a:extLst xmlns:a="http://schemas.openxmlformats.org/drawingml/2006/main">
               <a:ext uri="{FF2B5EF4-FFF2-40B4-BE49-F238E27FC236}">
-                <a16:creationId xmlns:a16="http://schemas.microsoft.com/office/drawing/2014/main" id="{9375676C-C41B-493F-8288-B50CEE1814AF}"/>
+                <a16:creationId xmlns:a16="http://schemas.microsoft.com/office/drawing/2014/main" id="{A2C538C7-5BF0-4009-A7CA-090EE7811440}"/>
               </a:ext>
             </a:extLst>
           </p:cNvPr>
@@ -8531,7 +8513,7 @@
           <p:cNvPr id="14" name="p13-error-3">
             <a:extLst xmlns:a="http://schemas.openxmlformats.org/drawingml/2006/main">
               <a:ext uri="{FF2B5EF4-FFF2-40B4-BE49-F238E27FC236}">
-                <a16:creationId xmlns:a16="http://schemas.microsoft.com/office/drawing/2014/main" id="{06AB6F7B-4299-4737-A1FE-7C515F9CC280}"/>
+                <a16:creationId xmlns:a16="http://schemas.microsoft.com/office/drawing/2014/main" id="{8B607853-3D10-42BF-95EC-0A0B99916087}"/>
               </a:ext>
             </a:extLst>
           </p:cNvPr>
@@ -8586,7 +8568,7 @@
           <p:cNvPr id="15" name="p13-x-4">
             <a:extLst xmlns:a="http://schemas.openxmlformats.org/drawingml/2006/main">
               <a:ext uri="{FF2B5EF4-FFF2-40B4-BE49-F238E27FC236}">
-                <a16:creationId xmlns:a16="http://schemas.microsoft.com/office/drawing/2014/main" id="{A909A87B-B304-47C0-A7C9-91330D94FD3B}"/>
+                <a16:creationId xmlns:a16="http://schemas.microsoft.com/office/drawing/2014/main" id="{71F1C089-7741-4FDD-8CB0-BE8AB2FE7BFB}"/>
               </a:ext>
             </a:extLst>
           </p:cNvPr>
@@ -8643,7 +8625,7 @@
           <p:cNvPr id="16" name="p13-error-4">
             <a:extLst xmlns:a="http://schemas.openxmlformats.org/drawingml/2006/main">
               <a:ext uri="{FF2B5EF4-FFF2-40B4-BE49-F238E27FC236}">
-                <a16:creationId xmlns:a16="http://schemas.microsoft.com/office/drawing/2014/main" id="{8E9906A5-7F1D-4962-B095-AA1288027C2D}"/>
+                <a16:creationId xmlns:a16="http://schemas.microsoft.com/office/drawing/2014/main" id="{1E53D314-7F57-4806-A06F-F969894705C9}"/>
               </a:ext>
             </a:extLst>
           </p:cNvPr>
@@ -8698,7 +8680,7 @@
           <p:cNvPr id="17" name="p13-x-5">
             <a:extLst xmlns:a="http://schemas.openxmlformats.org/drawingml/2006/main">
               <a:ext uri="{FF2B5EF4-FFF2-40B4-BE49-F238E27FC236}">
-                <a16:creationId xmlns:a16="http://schemas.microsoft.com/office/drawing/2014/main" id="{36CE0546-D137-46DC-94C5-97B8A281EC30}"/>
+                <a16:creationId xmlns:a16="http://schemas.microsoft.com/office/drawing/2014/main" id="{0F3078CA-8C22-4861-B42B-4CD161A3B39D}"/>
               </a:ext>
             </a:extLst>
           </p:cNvPr>
@@ -8755,7 +8737,7 @@
           <p:cNvPr id="18" name="p13-error-5">
             <a:extLst xmlns:a="http://schemas.openxmlformats.org/drawingml/2006/main">
               <a:ext uri="{FF2B5EF4-FFF2-40B4-BE49-F238E27FC236}">
-                <a16:creationId xmlns:a16="http://schemas.microsoft.com/office/drawing/2014/main" id="{0890A4ED-A874-4AEC-AC9E-7FA46EB7FD7B}"/>
+                <a16:creationId xmlns:a16="http://schemas.microsoft.com/office/drawing/2014/main" id="{3F320225-84BE-4828-97D8-2D108D77E708}"/>
               </a:ext>
             </a:extLst>
           </p:cNvPr>
@@ -8810,7 +8792,7 @@
           <p:cNvPr id="19" name="p13-x-6">
             <a:extLst xmlns:a="http://schemas.openxmlformats.org/drawingml/2006/main">
               <a:ext uri="{FF2B5EF4-FFF2-40B4-BE49-F238E27FC236}">
-                <a16:creationId xmlns:a16="http://schemas.microsoft.com/office/drawing/2014/main" id="{ED8F7FDC-0AB2-4DBE-8DBB-F560FCD639BA}"/>
+                <a16:creationId xmlns:a16="http://schemas.microsoft.com/office/drawing/2014/main" id="{F3F4300D-8950-4DCB-978E-529411099FF9}"/>
               </a:ext>
             </a:extLst>
           </p:cNvPr>
@@ -8867,7 +8849,7 @@
           <p:cNvPr id="20" name="p13-error-6">
             <a:extLst xmlns:a="http://schemas.openxmlformats.org/drawingml/2006/main">
               <a:ext uri="{FF2B5EF4-FFF2-40B4-BE49-F238E27FC236}">
-                <a16:creationId xmlns:a16="http://schemas.microsoft.com/office/drawing/2014/main" id="{F89CE36D-922E-4ECE-A87B-F965F1A6A3D2}"/>
+                <a16:creationId xmlns:a16="http://schemas.microsoft.com/office/drawing/2014/main" id="{AF3538CA-2C8E-402E-99A8-C5E0392F2CBB}"/>
               </a:ext>
             </a:extLst>
           </p:cNvPr>
@@ -8922,7 +8904,7 @@
           <p:cNvPr id="21" name="p13-x-7">
             <a:extLst xmlns:a="http://schemas.openxmlformats.org/drawingml/2006/main">
               <a:ext uri="{FF2B5EF4-FFF2-40B4-BE49-F238E27FC236}">
-                <a16:creationId xmlns:a16="http://schemas.microsoft.com/office/drawing/2014/main" id="{8C611713-C40D-4417-AB7A-6E87E66CAD4B}"/>
+                <a16:creationId xmlns:a16="http://schemas.microsoft.com/office/drawing/2014/main" id="{BA95B8F0-E6F8-41FA-9059-3CD040E517C7}"/>
               </a:ext>
             </a:extLst>
           </p:cNvPr>
@@ -8979,7 +8961,7 @@
           <p:cNvPr id="22" name="p13-error-7">
             <a:extLst xmlns:a="http://schemas.openxmlformats.org/drawingml/2006/main">
               <a:ext uri="{FF2B5EF4-FFF2-40B4-BE49-F238E27FC236}">
-                <a16:creationId xmlns:a16="http://schemas.microsoft.com/office/drawing/2014/main" id="{E28047DF-88A9-4855-AB11-D9356DFC29ED}"/>
+                <a16:creationId xmlns:a16="http://schemas.microsoft.com/office/drawing/2014/main" id="{C43F425A-2FE7-456C-9DF4-310181405F12}"/>
               </a:ext>
             </a:extLst>
           </p:cNvPr>
@@ -9034,7 +9016,7 @@
           <p:cNvPr id="23" name="p13-x-8">
             <a:extLst xmlns:a="http://schemas.openxmlformats.org/drawingml/2006/main">
               <a:ext uri="{FF2B5EF4-FFF2-40B4-BE49-F238E27FC236}">
-                <a16:creationId xmlns:a16="http://schemas.microsoft.com/office/drawing/2014/main" id="{CCBAEDBA-2A05-4CBC-B971-B9A0602C48D2}"/>
+                <a16:creationId xmlns:a16="http://schemas.microsoft.com/office/drawing/2014/main" id="{0F846B4E-C54C-4FD1-B935-F99E7787A96C}"/>
               </a:ext>
             </a:extLst>
           </p:cNvPr>
@@ -9091,7 +9073,7 @@
           <p:cNvPr id="24" name="p13-error-8">
             <a:extLst xmlns:a="http://schemas.openxmlformats.org/drawingml/2006/main">
               <a:ext uri="{FF2B5EF4-FFF2-40B4-BE49-F238E27FC236}">
-                <a16:creationId xmlns:a16="http://schemas.microsoft.com/office/drawing/2014/main" id="{0B06501A-0DCE-4293-94DC-7A3399119928}"/>
+                <a16:creationId xmlns:a16="http://schemas.microsoft.com/office/drawing/2014/main" id="{CF623240-8DA4-465A-9BFA-8A87CBE807F4}"/>
               </a:ext>
             </a:extLst>
           </p:cNvPr>
@@ -9146,7 +9128,7 @@
           <p:cNvPr id="25" name="p13-x-9">
             <a:extLst xmlns:a="http://schemas.openxmlformats.org/drawingml/2006/main">
               <a:ext uri="{FF2B5EF4-FFF2-40B4-BE49-F238E27FC236}">
-                <a16:creationId xmlns:a16="http://schemas.microsoft.com/office/drawing/2014/main" id="{C9A54971-7E60-44D5-927E-08276EE840EC}"/>
+                <a16:creationId xmlns:a16="http://schemas.microsoft.com/office/drawing/2014/main" id="{2005104D-A004-48A0-A7D6-3A43AE39CB8B}"/>
               </a:ext>
             </a:extLst>
           </p:cNvPr>
@@ -9203,7 +9185,7 @@
           <p:cNvPr id="26" name="p13-error-9">
             <a:extLst xmlns:a="http://schemas.openxmlformats.org/drawingml/2006/main">
               <a:ext uri="{FF2B5EF4-FFF2-40B4-BE49-F238E27FC236}">
-                <a16:creationId xmlns:a16="http://schemas.microsoft.com/office/drawing/2014/main" id="{F5C90FA9-2F6C-451A-B625-53D8221B3DAF}"/>
+                <a16:creationId xmlns:a16="http://schemas.microsoft.com/office/drawing/2014/main" id="{676B5616-40B7-4D75-BA86-341F3146ED82}"/>
               </a:ext>
             </a:extLst>
           </p:cNvPr>
@@ -9258,7 +9240,7 @@
           <p:cNvPr id="27" name="p13-separator">
             <a:extLst xmlns:a="http://schemas.openxmlformats.org/drawingml/2006/main">
               <a:ext uri="{FF2B5EF4-FFF2-40B4-BE49-F238E27FC236}">
-                <a16:creationId xmlns:a16="http://schemas.microsoft.com/office/drawing/2014/main" id="{768B091C-4F33-4476-AEA6-0497CBC75C76}"/>
+                <a16:creationId xmlns:a16="http://schemas.microsoft.com/office/drawing/2014/main" id="{EAF562C6-31D0-436C-9074-7170143EEDCF}"/>
               </a:ext>
             </a:extLst>
           </p:cNvPr>
@@ -9289,7 +9271,7 @@
           <p:cNvPr id="28" name="p13-questions-title">
             <a:extLst xmlns:a="http://schemas.openxmlformats.org/drawingml/2006/main">
               <a:ext uri="{FF2B5EF4-FFF2-40B4-BE49-F238E27FC236}">
-                <a16:creationId xmlns:a16="http://schemas.microsoft.com/office/drawing/2014/main" id="{ABA98E70-B0D7-4614-B474-818D96EEBBD5}"/>
+                <a16:creationId xmlns:a16="http://schemas.microsoft.com/office/drawing/2014/main" id="{01D5633D-A15A-4983-85B6-73DD45C8195D}"/>
               </a:ext>
             </a:extLst>
           </p:cNvPr>
@@ -9342,7 +9324,7 @@
           <p:cNvPr id="29" name="p13-qn-0">
             <a:extLst xmlns:a="http://schemas.openxmlformats.org/drawingml/2006/main">
               <a:ext uri="{FF2B5EF4-FFF2-40B4-BE49-F238E27FC236}">
-                <a16:creationId xmlns:a16="http://schemas.microsoft.com/office/drawing/2014/main" id="{C4871595-B99B-4555-9EEC-B07FF7E5DA67}"/>
+                <a16:creationId xmlns:a16="http://schemas.microsoft.com/office/drawing/2014/main" id="{D2296514-CEF6-45D1-A23A-C649E277A795}"/>
               </a:ext>
             </a:extLst>
           </p:cNvPr>
@@ -9399,7 +9381,7 @@
           <p:cNvPr id="30" name="p13-q-0">
             <a:extLst xmlns:a="http://schemas.openxmlformats.org/drawingml/2006/main">
               <a:ext uri="{FF2B5EF4-FFF2-40B4-BE49-F238E27FC236}">
-                <a16:creationId xmlns:a16="http://schemas.microsoft.com/office/drawing/2014/main" id="{B700BAD8-2572-4173-8A5D-947041220E0B}"/>
+                <a16:creationId xmlns:a16="http://schemas.microsoft.com/office/drawing/2014/main" id="{645C0CE3-ED95-4821-A9A5-0D4E8963775D}"/>
               </a:ext>
             </a:extLst>
           </p:cNvPr>
@@ -9454,7 +9436,7 @@
           <p:cNvPr id="31" name="p13-qn-1">
             <a:extLst xmlns:a="http://schemas.openxmlformats.org/drawingml/2006/main">
               <a:ext uri="{FF2B5EF4-FFF2-40B4-BE49-F238E27FC236}">
-                <a16:creationId xmlns:a16="http://schemas.microsoft.com/office/drawing/2014/main" id="{C20404CA-9CF6-4DC1-AC4A-022265968D27}"/>
+                <a16:creationId xmlns:a16="http://schemas.microsoft.com/office/drawing/2014/main" id="{51D78517-147C-47EB-9833-3B1B4430788B}"/>
               </a:ext>
             </a:extLst>
           </p:cNvPr>
@@ -9511,7 +9493,7 @@
           <p:cNvPr id="32" name="p13-q-1">
             <a:extLst xmlns:a="http://schemas.openxmlformats.org/drawingml/2006/main">
               <a:ext uri="{FF2B5EF4-FFF2-40B4-BE49-F238E27FC236}">
-                <a16:creationId xmlns:a16="http://schemas.microsoft.com/office/drawing/2014/main" id="{EC400163-9581-41D7-9BBD-D0CB22053331}"/>
+                <a16:creationId xmlns:a16="http://schemas.microsoft.com/office/drawing/2014/main" id="{BD58525E-3470-4E5B-B5F0-7D3A96F09C0B}"/>
               </a:ext>
             </a:extLst>
           </p:cNvPr>
@@ -9566,7 +9548,7 @@
           <p:cNvPr id="33" name="p13-qn-2">
             <a:extLst xmlns:a="http://schemas.openxmlformats.org/drawingml/2006/main">
               <a:ext uri="{FF2B5EF4-FFF2-40B4-BE49-F238E27FC236}">
-                <a16:creationId xmlns:a16="http://schemas.microsoft.com/office/drawing/2014/main" id="{068A23F9-F373-4489-A55E-87F963E8D2ED}"/>
+                <a16:creationId xmlns:a16="http://schemas.microsoft.com/office/drawing/2014/main" id="{25490159-D944-4CCD-BCB4-231A4F2266D9}"/>
               </a:ext>
             </a:extLst>
           </p:cNvPr>
@@ -9623,7 +9605,7 @@
           <p:cNvPr id="34" name="p13-q-2">
             <a:extLst xmlns:a="http://schemas.openxmlformats.org/drawingml/2006/main">
               <a:ext uri="{FF2B5EF4-FFF2-40B4-BE49-F238E27FC236}">
-                <a16:creationId xmlns:a16="http://schemas.microsoft.com/office/drawing/2014/main" id="{6D14C059-0CB0-434C-9518-54CC242E1BE1}"/>
+                <a16:creationId xmlns:a16="http://schemas.microsoft.com/office/drawing/2014/main" id="{D5805528-65BE-4081-8322-2EAA86C979D0}"/>
               </a:ext>
             </a:extLst>
           </p:cNvPr>
@@ -9678,7 +9660,7 @@
           <p:cNvPr id="35" name="p13-qn-3">
             <a:extLst xmlns:a="http://schemas.openxmlformats.org/drawingml/2006/main">
               <a:ext uri="{FF2B5EF4-FFF2-40B4-BE49-F238E27FC236}">
-                <a16:creationId xmlns:a16="http://schemas.microsoft.com/office/drawing/2014/main" id="{B393CC17-B518-4BF2-A50C-9F0437EC3559}"/>
+                <a16:creationId xmlns:a16="http://schemas.microsoft.com/office/drawing/2014/main" id="{30909F43-6036-4A3C-A28A-445A3F024314}"/>
               </a:ext>
             </a:extLst>
           </p:cNvPr>
@@ -9735,7 +9717,7 @@
           <p:cNvPr id="36" name="p13-q-3">
             <a:extLst xmlns:a="http://schemas.openxmlformats.org/drawingml/2006/main">
               <a:ext uri="{FF2B5EF4-FFF2-40B4-BE49-F238E27FC236}">
-                <a16:creationId xmlns:a16="http://schemas.microsoft.com/office/drawing/2014/main" id="{8938ABFC-5C03-49CE-A542-7170F5EDF478}"/>
+                <a16:creationId xmlns:a16="http://schemas.microsoft.com/office/drawing/2014/main" id="{B5B5D3F4-4B8C-417D-B92C-E58C194A36DF}"/>
               </a:ext>
             </a:extLst>
           </p:cNvPr>
@@ -9790,7 +9772,7 @@
           <p:cNvPr id="37" name="p13-qn-4">
             <a:extLst xmlns:a="http://schemas.openxmlformats.org/drawingml/2006/main">
               <a:ext uri="{FF2B5EF4-FFF2-40B4-BE49-F238E27FC236}">
-                <a16:creationId xmlns:a16="http://schemas.microsoft.com/office/drawing/2014/main" id="{6D656E8B-3958-4179-98F4-35C323BECEAD}"/>
+                <a16:creationId xmlns:a16="http://schemas.microsoft.com/office/drawing/2014/main" id="{A440626E-D5F9-4E4F-931D-342B489F3E15}"/>
               </a:ext>
             </a:extLst>
           </p:cNvPr>
@@ -9847,7 +9829,7 @@
           <p:cNvPr id="38" name="p13-q-4">
             <a:extLst xmlns:a="http://schemas.openxmlformats.org/drawingml/2006/main">
               <a:ext uri="{FF2B5EF4-FFF2-40B4-BE49-F238E27FC236}">
-                <a16:creationId xmlns:a16="http://schemas.microsoft.com/office/drawing/2014/main" id="{D8F56985-8ADC-487F-ACD1-4CF5F958510A}"/>
+                <a16:creationId xmlns:a16="http://schemas.microsoft.com/office/drawing/2014/main" id="{FB15CF79-B95C-433A-B8D0-D8D7CDC63BF2}"/>
               </a:ext>
             </a:extLst>
           </p:cNvPr>
@@ -9902,7 +9884,7 @@
           <p:cNvPr id="39" name="p13-bottom">
             <a:extLst xmlns:a="http://schemas.openxmlformats.org/drawingml/2006/main">
               <a:ext uri="{FF2B5EF4-FFF2-40B4-BE49-F238E27FC236}">
-                <a16:creationId xmlns:a16="http://schemas.microsoft.com/office/drawing/2014/main" id="{5D4D8581-DCA4-4C9B-BC79-C6B51D059A04}"/>
+                <a16:creationId xmlns:a16="http://schemas.microsoft.com/office/drawing/2014/main" id="{C203E126-FAA3-4A55-A3F3-B96B692DFA39}"/>
               </a:ext>
             </a:extLst>
           </p:cNvPr>
@@ -10047,7 +10029,7 @@
           <p:cNvPr id="6" name="p14-time">
             <a:extLst xmlns:a="http://schemas.openxmlformats.org/drawingml/2006/main">
               <a:ext uri="{FF2B5EF4-FFF2-40B4-BE49-F238E27FC236}">
-                <a16:creationId xmlns:a16="http://schemas.microsoft.com/office/drawing/2014/main" id="{EF84F1B6-EAE3-4186-A66E-06D8BE7B87A4}"/>
+                <a16:creationId xmlns:a16="http://schemas.microsoft.com/office/drawing/2014/main" id="{18D8F6FE-C397-4BDB-B150-162F042A85DA}"/>
               </a:ext>
             </a:extLst>
           </p:cNvPr>
@@ -10100,7 +10082,7 @@
           <p:cNvPr id="7" name="p14-line-0">
             <a:extLst xmlns:a="http://schemas.openxmlformats.org/drawingml/2006/main">
               <a:ext uri="{FF2B5EF4-FFF2-40B4-BE49-F238E27FC236}">
-                <a16:creationId xmlns:a16="http://schemas.microsoft.com/office/drawing/2014/main" id="{7C146B49-6269-4795-94D7-D6D295A3E1C8}"/>
+                <a16:creationId xmlns:a16="http://schemas.microsoft.com/office/drawing/2014/main" id="{6F251EAB-2956-4C9C-99E0-7303685BD338}"/>
               </a:ext>
             </a:extLst>
           </p:cNvPr>
@@ -10131,7 +10113,7 @@
           <p:cNvPr id="8" name="p14-line-1">
             <a:extLst xmlns:a="http://schemas.openxmlformats.org/drawingml/2006/main">
               <a:ext uri="{FF2B5EF4-FFF2-40B4-BE49-F238E27FC236}">
-                <a16:creationId xmlns:a16="http://schemas.microsoft.com/office/drawing/2014/main" id="{16965FC2-AD38-4F66-BAB7-62CB1E93B7A5}"/>
+                <a16:creationId xmlns:a16="http://schemas.microsoft.com/office/drawing/2014/main" id="{173D05D2-A3F0-43EE-83D2-E8D7448ED0BC}"/>
               </a:ext>
             </a:extLst>
           </p:cNvPr>
@@ -10162,7 +10144,7 @@
           <p:cNvPr id="9" name="p14-line-2">
             <a:extLst xmlns:a="http://schemas.openxmlformats.org/drawingml/2006/main">
               <a:ext uri="{FF2B5EF4-FFF2-40B4-BE49-F238E27FC236}">
-                <a16:creationId xmlns:a16="http://schemas.microsoft.com/office/drawing/2014/main" id="{C2CE7955-8FD1-489D-8F9B-750A454E51AE}"/>
+                <a16:creationId xmlns:a16="http://schemas.microsoft.com/office/drawing/2014/main" id="{B4C48394-ED8B-4B90-9937-C520A84C799E}"/>
               </a:ext>
             </a:extLst>
           </p:cNvPr>
@@ -10193,7 +10175,7 @@
           <p:cNvPr id="10" name="p14-line-3">
             <a:extLst xmlns:a="http://schemas.openxmlformats.org/drawingml/2006/main">
               <a:ext uri="{FF2B5EF4-FFF2-40B4-BE49-F238E27FC236}">
-                <a16:creationId xmlns:a16="http://schemas.microsoft.com/office/drawing/2014/main" id="{F8AB2648-F1AD-4929-AA17-AF7CB45772E7}"/>
+                <a16:creationId xmlns:a16="http://schemas.microsoft.com/office/drawing/2014/main" id="{94B158E5-9D0B-47DB-9860-F02E626ACB2D}"/>
               </a:ext>
             </a:extLst>
           </p:cNvPr>
@@ -10224,7 +10206,7 @@
           <p:cNvPr id="11" name="p14-line-4">
             <a:extLst xmlns:a="http://schemas.openxmlformats.org/drawingml/2006/main">
               <a:ext uri="{FF2B5EF4-FFF2-40B4-BE49-F238E27FC236}">
-                <a16:creationId xmlns:a16="http://schemas.microsoft.com/office/drawing/2014/main" id="{430E6DBA-E891-4117-9823-7BA88C09036B}"/>
+                <a16:creationId xmlns:a16="http://schemas.microsoft.com/office/drawing/2014/main" id="{9701713B-7DED-402D-BD7C-C5BE8EC91C6C}"/>
               </a:ext>
             </a:extLst>
           </p:cNvPr>
@@ -10255,7 +10237,7 @@
           <p:cNvPr id="12" name="p14-n-0">
             <a:extLst xmlns:a="http://schemas.openxmlformats.org/drawingml/2006/main">
               <a:ext uri="{FF2B5EF4-FFF2-40B4-BE49-F238E27FC236}">
-                <a16:creationId xmlns:a16="http://schemas.microsoft.com/office/drawing/2014/main" id="{1AADF66B-F6BC-4046-9DD8-38A401C30AFF}"/>
+                <a16:creationId xmlns:a16="http://schemas.microsoft.com/office/drawing/2014/main" id="{D511675E-482D-4E39-B884-52C601888C18}"/>
               </a:ext>
             </a:extLst>
           </p:cNvPr>
@@ -10312,7 +10294,7 @@
           <p:cNvPr id="13" name="p14-task-0">
             <a:extLst xmlns:a="http://schemas.openxmlformats.org/drawingml/2006/main">
               <a:ext uri="{FF2B5EF4-FFF2-40B4-BE49-F238E27FC236}">
-                <a16:creationId xmlns:a16="http://schemas.microsoft.com/office/drawing/2014/main" id="{5E7282E1-B2B6-4031-BA1A-A2FAA8DE334E}"/>
+                <a16:creationId xmlns:a16="http://schemas.microsoft.com/office/drawing/2014/main" id="{1A8A54E8-DE0E-459A-9D5D-63C702BBCCD8}"/>
               </a:ext>
             </a:extLst>
           </p:cNvPr>
@@ -10367,7 +10349,7 @@
           <p:cNvPr id="14" name="p14-n-1">
             <a:extLst xmlns:a="http://schemas.openxmlformats.org/drawingml/2006/main">
               <a:ext uri="{FF2B5EF4-FFF2-40B4-BE49-F238E27FC236}">
-                <a16:creationId xmlns:a16="http://schemas.microsoft.com/office/drawing/2014/main" id="{BC0C243D-EB32-4C55-98F3-F4F09FACCE76}"/>
+                <a16:creationId xmlns:a16="http://schemas.microsoft.com/office/drawing/2014/main" id="{A1540655-E05F-422A-B0A8-67B4EA38EEE9}"/>
               </a:ext>
             </a:extLst>
           </p:cNvPr>
@@ -10424,7 +10406,7 @@
           <p:cNvPr id="15" name="p14-task-1">
             <a:extLst xmlns:a="http://schemas.openxmlformats.org/drawingml/2006/main">
               <a:ext uri="{FF2B5EF4-FFF2-40B4-BE49-F238E27FC236}">
-                <a16:creationId xmlns:a16="http://schemas.microsoft.com/office/drawing/2014/main" id="{FDF0972C-6B31-4C9E-A98F-116A2C44A685}"/>
+                <a16:creationId xmlns:a16="http://schemas.microsoft.com/office/drawing/2014/main" id="{373F643F-698D-412C-B652-A0E46A37B348}"/>
               </a:ext>
             </a:extLst>
           </p:cNvPr>
@@ -10479,7 +10461,7 @@
           <p:cNvPr id="16" name="p14-n-2">
             <a:extLst xmlns:a="http://schemas.openxmlformats.org/drawingml/2006/main">
               <a:ext uri="{FF2B5EF4-FFF2-40B4-BE49-F238E27FC236}">
-                <a16:creationId xmlns:a16="http://schemas.microsoft.com/office/drawing/2014/main" id="{6B2CD1E6-8E97-401E-8A0D-BDA815858B61}"/>
+                <a16:creationId xmlns:a16="http://schemas.microsoft.com/office/drawing/2014/main" id="{C803FC5A-E676-4C00-A829-C29316ACE4BE}"/>
               </a:ext>
             </a:extLst>
           </p:cNvPr>
@@ -10536,7 +10518,7 @@
           <p:cNvPr id="17" name="p14-task-2">
             <a:extLst xmlns:a="http://schemas.openxmlformats.org/drawingml/2006/main">
               <a:ext uri="{FF2B5EF4-FFF2-40B4-BE49-F238E27FC236}">
-                <a16:creationId xmlns:a16="http://schemas.microsoft.com/office/drawing/2014/main" id="{E9E75F71-8523-4B50-9646-E72F71A15E4F}"/>
+                <a16:creationId xmlns:a16="http://schemas.microsoft.com/office/drawing/2014/main" id="{8C6CB712-F0C4-4CBD-B159-118E64CAE03F}"/>
               </a:ext>
             </a:extLst>
           </p:cNvPr>
@@ -10591,7 +10573,7 @@
           <p:cNvPr id="18" name="p14-n-3">
             <a:extLst xmlns:a="http://schemas.openxmlformats.org/drawingml/2006/main">
               <a:ext uri="{FF2B5EF4-FFF2-40B4-BE49-F238E27FC236}">
-                <a16:creationId xmlns:a16="http://schemas.microsoft.com/office/drawing/2014/main" id="{2D99C565-9398-47A1-8B14-A683C8483FBC}"/>
+                <a16:creationId xmlns:a16="http://schemas.microsoft.com/office/drawing/2014/main" id="{B96DF411-A16C-4CB9-B1A3-069A9621361D}"/>
               </a:ext>
             </a:extLst>
           </p:cNvPr>
@@ -10648,7 +10630,7 @@
           <p:cNvPr id="19" name="p14-task-3">
             <a:extLst xmlns:a="http://schemas.openxmlformats.org/drawingml/2006/main">
               <a:ext uri="{FF2B5EF4-FFF2-40B4-BE49-F238E27FC236}">
-                <a16:creationId xmlns:a16="http://schemas.microsoft.com/office/drawing/2014/main" id="{62486E2D-5488-40DA-B90F-260AF1F44F2F}"/>
+                <a16:creationId xmlns:a16="http://schemas.microsoft.com/office/drawing/2014/main" id="{C2023CB4-E1D1-4289-B8DF-3ABC8E3E21C8}"/>
               </a:ext>
             </a:extLst>
           </p:cNvPr>
@@ -10703,7 +10685,7 @@
           <p:cNvPr id="20" name="p14-n-4">
             <a:extLst xmlns:a="http://schemas.openxmlformats.org/drawingml/2006/main">
               <a:ext uri="{FF2B5EF4-FFF2-40B4-BE49-F238E27FC236}">
-                <a16:creationId xmlns:a16="http://schemas.microsoft.com/office/drawing/2014/main" id="{73AEEB18-6538-406F-85D3-3742C3563CD4}"/>
+                <a16:creationId xmlns:a16="http://schemas.microsoft.com/office/drawing/2014/main" id="{D9A52266-6342-4AFF-A681-34BD7BAC4F3E}"/>
               </a:ext>
             </a:extLst>
           </p:cNvPr>
@@ -10760,7 +10742,7 @@
           <p:cNvPr id="21" name="p14-task-4">
             <a:extLst xmlns:a="http://schemas.openxmlformats.org/drawingml/2006/main">
               <a:ext uri="{FF2B5EF4-FFF2-40B4-BE49-F238E27FC236}">
-                <a16:creationId xmlns:a16="http://schemas.microsoft.com/office/drawing/2014/main" id="{D488D5B7-F4F7-4940-979F-E7C28063E3EA}"/>
+                <a16:creationId xmlns:a16="http://schemas.microsoft.com/office/drawing/2014/main" id="{1BF2D13E-9045-4B6B-91F7-AF40B460F602}"/>
               </a:ext>
             </a:extLst>
           </p:cNvPr>
@@ -10815,7 +10797,7 @@
           <p:cNvPr id="22" name="p14-n-5">
             <a:extLst xmlns:a="http://schemas.openxmlformats.org/drawingml/2006/main">
               <a:ext uri="{FF2B5EF4-FFF2-40B4-BE49-F238E27FC236}">
-                <a16:creationId xmlns:a16="http://schemas.microsoft.com/office/drawing/2014/main" id="{5AE6EC58-8950-4316-AB75-F498E868AB31}"/>
+                <a16:creationId xmlns:a16="http://schemas.microsoft.com/office/drawing/2014/main" id="{01341A55-472C-4B2A-A8D2-BD4C3E7264EC}"/>
               </a:ext>
             </a:extLst>
           </p:cNvPr>
@@ -10872,7 +10854,7 @@
           <p:cNvPr id="23" name="p14-task-5">
             <a:extLst xmlns:a="http://schemas.openxmlformats.org/drawingml/2006/main">
               <a:ext uri="{FF2B5EF4-FFF2-40B4-BE49-F238E27FC236}">
-                <a16:creationId xmlns:a16="http://schemas.microsoft.com/office/drawing/2014/main" id="{FB3E1938-AEBE-4492-9E4B-F5874770E82D}"/>
+                <a16:creationId xmlns:a16="http://schemas.microsoft.com/office/drawing/2014/main" id="{ABA9CA70-CEEE-42E5-BF58-D5A0E5F181C7}"/>
               </a:ext>
             </a:extLst>
           </p:cNvPr>
@@ -10927,7 +10909,7 @@
           <p:cNvPr id="24" name="p14-min-title">
             <a:extLst xmlns:a="http://schemas.openxmlformats.org/drawingml/2006/main">
               <a:ext uri="{FF2B5EF4-FFF2-40B4-BE49-F238E27FC236}">
-                <a16:creationId xmlns:a16="http://schemas.microsoft.com/office/drawing/2014/main" id="{74DFA1CA-6C4B-4E79-90B6-A3C581A29095}"/>
+                <a16:creationId xmlns:a16="http://schemas.microsoft.com/office/drawing/2014/main" id="{8060E083-FD70-44AF-9458-6EA54CDBC1CD}"/>
               </a:ext>
             </a:extLst>
           </p:cNvPr>
@@ -10980,7 +10962,7 @@
           <p:cNvPr id="25" name="p14-min">
             <a:extLst xmlns:a="http://schemas.openxmlformats.org/drawingml/2006/main">
               <a:ext uri="{FF2B5EF4-FFF2-40B4-BE49-F238E27FC236}">
-                <a16:creationId xmlns:a16="http://schemas.microsoft.com/office/drawing/2014/main" id="{3D047E2A-9F87-4C8F-A0B5-B8DC304B1DD9}"/>
+                <a16:creationId xmlns:a16="http://schemas.microsoft.com/office/drawing/2014/main" id="{3694D6BD-B92E-4552-B3D7-ECED0D654170}"/>
               </a:ext>
             </a:extLst>
           </p:cNvPr>
@@ -11163,7 +11145,7 @@
           <p:cNvPr id="26" name="p14-fallback">
             <a:extLst xmlns:a="http://schemas.openxmlformats.org/drawingml/2006/main">
               <a:ext uri="{FF2B5EF4-FFF2-40B4-BE49-F238E27FC236}">
-                <a16:creationId xmlns:a16="http://schemas.microsoft.com/office/drawing/2014/main" id="{A45EF55D-8F89-44AD-8869-84392452D52E}"/>
+                <a16:creationId xmlns:a16="http://schemas.microsoft.com/office/drawing/2014/main" id="{D3D749C7-72A4-4D2C-9A47-DF84587D6DBC}"/>
               </a:ext>
             </a:extLst>
           </p:cNvPr>
@@ -11314,7 +11296,7 @@
           <p:cNvPr id="6" name="p15-label-0">
             <a:extLst xmlns:a="http://schemas.openxmlformats.org/drawingml/2006/main">
               <a:ext uri="{FF2B5EF4-FFF2-40B4-BE49-F238E27FC236}">
-                <a16:creationId xmlns:a16="http://schemas.microsoft.com/office/drawing/2014/main" id="{01CEADBD-119F-48BF-9D05-6AF772739F64}"/>
+                <a16:creationId xmlns:a16="http://schemas.microsoft.com/office/drawing/2014/main" id="{FBC5C33A-B537-47B5-80A3-0DEF4EFD8835}"/>
               </a:ext>
             </a:extLst>
           </p:cNvPr>
@@ -11371,7 +11353,7 @@
           <p:cNvPr id="7" name="p15-question-0">
             <a:extLst xmlns:a="http://schemas.openxmlformats.org/drawingml/2006/main">
               <a:ext uri="{FF2B5EF4-FFF2-40B4-BE49-F238E27FC236}">
-                <a16:creationId xmlns:a16="http://schemas.microsoft.com/office/drawing/2014/main" id="{77FB39AD-016C-4A63-BBC0-7EE0C6C802FD}"/>
+                <a16:creationId xmlns:a16="http://schemas.microsoft.com/office/drawing/2014/main" id="{A93FA185-222C-494C-B3BA-AB3BD1B18B3E}"/>
               </a:ext>
             </a:extLst>
           </p:cNvPr>
@@ -11426,7 +11408,7 @@
           <p:cNvPr id="8" name="p15-label-1">
             <a:extLst xmlns:a="http://schemas.openxmlformats.org/drawingml/2006/main">
               <a:ext uri="{FF2B5EF4-FFF2-40B4-BE49-F238E27FC236}">
-                <a16:creationId xmlns:a16="http://schemas.microsoft.com/office/drawing/2014/main" id="{CC499D9E-5209-4F12-9ADB-0275023CC1F3}"/>
+                <a16:creationId xmlns:a16="http://schemas.microsoft.com/office/drawing/2014/main" id="{CC6F7CAF-2CA2-4A7A-A966-163BC43BE5CB}"/>
               </a:ext>
             </a:extLst>
           </p:cNvPr>
@@ -11483,7 +11465,7 @@
           <p:cNvPr id="9" name="p15-question-1">
             <a:extLst xmlns:a="http://schemas.openxmlformats.org/drawingml/2006/main">
               <a:ext uri="{FF2B5EF4-FFF2-40B4-BE49-F238E27FC236}">
-                <a16:creationId xmlns:a16="http://schemas.microsoft.com/office/drawing/2014/main" id="{B3AC7DD8-D182-41C8-B7A6-6288EC0DF830}"/>
+                <a16:creationId xmlns:a16="http://schemas.microsoft.com/office/drawing/2014/main" id="{F1D958A3-5735-4BAF-B49D-BF8E3CF065A7}"/>
               </a:ext>
             </a:extLst>
           </p:cNvPr>
@@ -11538,7 +11520,7 @@
           <p:cNvPr id="10" name="p15-label-2">
             <a:extLst xmlns:a="http://schemas.openxmlformats.org/drawingml/2006/main">
               <a:ext uri="{FF2B5EF4-FFF2-40B4-BE49-F238E27FC236}">
-                <a16:creationId xmlns:a16="http://schemas.microsoft.com/office/drawing/2014/main" id="{1459F5CE-33DA-4EDB-BCEA-AD1D5AD06B78}"/>
+                <a16:creationId xmlns:a16="http://schemas.microsoft.com/office/drawing/2014/main" id="{46F50318-0C02-4622-8731-5F1D95291E6B}"/>
               </a:ext>
             </a:extLst>
           </p:cNvPr>
@@ -11595,7 +11577,7 @@
           <p:cNvPr id="11" name="p15-question-2">
             <a:extLst xmlns:a="http://schemas.openxmlformats.org/drawingml/2006/main">
               <a:ext uri="{FF2B5EF4-FFF2-40B4-BE49-F238E27FC236}">
-                <a16:creationId xmlns:a16="http://schemas.microsoft.com/office/drawing/2014/main" id="{9E16F024-C7AB-4293-AEB1-F1F5068B2FB8}"/>
+                <a16:creationId xmlns:a16="http://schemas.microsoft.com/office/drawing/2014/main" id="{080C7553-8199-4488-952F-C018F55AE1D3}"/>
               </a:ext>
             </a:extLst>
           </p:cNvPr>
@@ -11650,7 +11632,7 @@
           <p:cNvPr id="12" name="p15-label-3">
             <a:extLst xmlns:a="http://schemas.openxmlformats.org/drawingml/2006/main">
               <a:ext uri="{FF2B5EF4-FFF2-40B4-BE49-F238E27FC236}">
-                <a16:creationId xmlns:a16="http://schemas.microsoft.com/office/drawing/2014/main" id="{144A9075-6454-4381-A0A7-06F90A28C5C2}"/>
+                <a16:creationId xmlns:a16="http://schemas.microsoft.com/office/drawing/2014/main" id="{BF1310C9-F400-4F89-9E39-22BDB8852E36}"/>
               </a:ext>
             </a:extLst>
           </p:cNvPr>
@@ -11707,7 +11689,7 @@
           <p:cNvPr id="13" name="p15-question-3">
             <a:extLst xmlns:a="http://schemas.openxmlformats.org/drawingml/2006/main">
               <a:ext uri="{FF2B5EF4-FFF2-40B4-BE49-F238E27FC236}">
-                <a16:creationId xmlns:a16="http://schemas.microsoft.com/office/drawing/2014/main" id="{1A4EA5C7-0A04-4E66-996B-250E38E59359}"/>
+                <a16:creationId xmlns:a16="http://schemas.microsoft.com/office/drawing/2014/main" id="{E17EBB93-3C26-4930-9674-1F4490C85E41}"/>
               </a:ext>
             </a:extLst>
           </p:cNvPr>
@@ -11762,7 +11744,7 @@
           <p:cNvPr id="14" name="p15-label-4">
             <a:extLst xmlns:a="http://schemas.openxmlformats.org/drawingml/2006/main">
               <a:ext uri="{FF2B5EF4-FFF2-40B4-BE49-F238E27FC236}">
-                <a16:creationId xmlns:a16="http://schemas.microsoft.com/office/drawing/2014/main" id="{47F0F11A-75B3-4EA2-8C83-2923687FB377}"/>
+                <a16:creationId xmlns:a16="http://schemas.microsoft.com/office/drawing/2014/main" id="{769C9FE2-3840-4A6C-9713-9291C4BE7DD5}"/>
               </a:ext>
             </a:extLst>
           </p:cNvPr>
@@ -11819,7 +11801,7 @@
           <p:cNvPr id="15" name="p15-question-4">
             <a:extLst xmlns:a="http://schemas.openxmlformats.org/drawingml/2006/main">
               <a:ext uri="{FF2B5EF4-FFF2-40B4-BE49-F238E27FC236}">
-                <a16:creationId xmlns:a16="http://schemas.microsoft.com/office/drawing/2014/main" id="{8D81DC8A-E2FD-49FE-AD1E-56DDC45C58BB}"/>
+                <a16:creationId xmlns:a16="http://schemas.microsoft.com/office/drawing/2014/main" id="{8B13CD74-2D40-44A7-AA43-0AB5DACAD823}"/>
               </a:ext>
             </a:extLst>
           </p:cNvPr>
@@ -11874,7 +11856,7 @@
           <p:cNvPr id="16" name="p15-format">
             <a:extLst xmlns:a="http://schemas.openxmlformats.org/drawingml/2006/main">
               <a:ext uri="{FF2B5EF4-FFF2-40B4-BE49-F238E27FC236}">
-                <a16:creationId xmlns:a16="http://schemas.microsoft.com/office/drawing/2014/main" id="{45AC2CC6-3002-43A3-A486-9258AD91B370}"/>
+                <a16:creationId xmlns:a16="http://schemas.microsoft.com/office/drawing/2014/main" id="{28D2D8BF-0A50-41DF-977F-768BAA85058B}"/>
               </a:ext>
             </a:extLst>
           </p:cNvPr>
@@ -11927,7 +11909,7 @@
           <p:cNvPr id="17" name="p15-bottom">
             <a:extLst xmlns:a="http://schemas.openxmlformats.org/drawingml/2006/main">
               <a:ext uri="{FF2B5EF4-FFF2-40B4-BE49-F238E27FC236}">
-                <a16:creationId xmlns:a16="http://schemas.microsoft.com/office/drawing/2014/main" id="{BB9DCEFC-FEEC-44F2-875C-78F322023E24}"/>
+                <a16:creationId xmlns:a16="http://schemas.microsoft.com/office/drawing/2014/main" id="{5CB9E6EA-9C4E-47D8-9087-5839D3435109}"/>
               </a:ext>
             </a:extLst>
           </p:cNvPr>
@@ -12033,7 +12015,7 @@
                 <a:ea typeface="Microsoft YaHei"/>
                 <a:cs typeface="Microsoft YaHei"/>
               </a:rPr>
-              <a:t>退出卡：你的下一步实验真的会改变判断吗</a:t>
+              <a:t>本讲知识点总结</a:t>
             </a:r>
             <a:endParaRPr/>
           </a:p>
@@ -12069,10 +12051,690 @@
       </p:sp>
       <p:sp>
         <p:nvSpPr>
+          <p:cNvPr id="6" name="p16-n0">
+            <a:extLst xmlns:a="http://schemas.openxmlformats.org/drawingml/2006/main">
+              <a:ext uri="{FF2B5EF4-FFF2-40B4-BE49-F238E27FC236}">
+                <a16:creationId xmlns:a16="http://schemas.microsoft.com/office/drawing/2014/main" id="{F58F8834-45F5-4A43-AA64-E7056857BF95}"/>
+              </a:ext>
+            </a:extLst>
+          </p:cNvPr>
+          <p:cNvSpPr>
+            <a:spLocks xmlns:a="http://schemas.openxmlformats.org/drawingml/2006/main" noGrp="1"/>
+          </p:cNvSpPr>
+          <p:nvPr/>
+        </p:nvSpPr>
+        <p:spPr>
+          <a:xfrm xmlns:a="http://schemas.openxmlformats.org/drawingml/2006/main">
+            <a:off x="666750" y="1238250"/>
+            <a:ext cx="495300" cy="495300"/>
+          </a:xfrm>
+          <a:prstGeom xmlns:a="http://schemas.openxmlformats.org/drawingml/2006/main" prst="roundRect">
+            <a:avLst>
+              <a:gd name="adj" fmla="val 15385"/>
+            </a:avLst>
+          </a:prstGeom>
+          <a:solidFill xmlns:a="http://schemas.openxmlformats.org/drawingml/2006/main">
+            <a:srgbClr val="18354E"/>
+          </a:solidFill>
+          <a:ln xmlns:a="http://schemas.openxmlformats.org/drawingml/2006/main" w="0">
+            <a:noFill/>
+            <a:prstDash val="solid"/>
+          </a:ln>
+        </p:spPr>
+        <p:txBody>
+          <a:bodyPr xmlns:a="http://schemas.openxmlformats.org/drawingml/2006/main" lIns="76200" tIns="38100" rIns="76200" bIns="38100" anchor="ctr"/>
+          <a:lstStyle xmlns:a="http://schemas.openxmlformats.org/drawingml/2006/main"/>
+          <a:p xmlns:a="http://schemas.openxmlformats.org/drawingml/2006/main">
+            <a:pPr algn="ctr">
+              <a:defRPr sz="1500" b="1">
+                <a:solidFill>
+                  <a:srgbClr val="FFFFFF"/>
+                </a:solidFill>
+              </a:defRPr>
+            </a:pPr>
+            <a:r>
+              <a:rPr sz="1500" b="1">
+                <a:solidFill>
+                  <a:srgbClr val="FFFFFF"/>
+                </a:solidFill>
+                <a:latin typeface="Arial"/>
+                <a:ea typeface="Arial"/>
+                <a:cs typeface="Arial"/>
+              </a:rPr>
+              <a:t>1</a:t>
+            </a:r>
+          </a:p>
+        </p:txBody>
+      </p:sp>
+      <p:sp>
+        <p:nvSpPr>
+          <p:cNvPr id="7" name="p16-h0">
+            <a:extLst xmlns:a="http://schemas.openxmlformats.org/drawingml/2006/main">
+              <a:ext uri="{FF2B5EF4-FFF2-40B4-BE49-F238E27FC236}">
+                <a16:creationId xmlns:a16="http://schemas.microsoft.com/office/drawing/2014/main" id="{1662829E-DFF2-453E-BEAB-EB1DA2837BD3}"/>
+              </a:ext>
+            </a:extLst>
+          </p:cNvPr>
+          <p:cNvSpPr>
+            <a:spLocks xmlns:a="http://schemas.openxmlformats.org/drawingml/2006/main" noGrp="1"/>
+          </p:cNvSpPr>
+          <p:nvPr/>
+        </p:nvSpPr>
+        <p:spPr>
+          <a:xfrm xmlns:a="http://schemas.openxmlformats.org/drawingml/2006/main">
+            <a:off x="1285875" y="1181100"/>
+            <a:ext cx="2762250" cy="590550"/>
+          </a:xfrm>
+          <a:prstGeom xmlns:a="http://schemas.openxmlformats.org/drawingml/2006/main" prst="roundRect">
+            <a:avLst>
+              <a:gd name="adj" fmla="val 12903"/>
+            </a:avLst>
+          </a:prstGeom>
+          <a:solidFill xmlns:a="http://schemas.openxmlformats.org/drawingml/2006/main">
+            <a:srgbClr val="E8F0F6"/>
+          </a:solidFill>
+          <a:ln xmlns:a="http://schemas.openxmlformats.org/drawingml/2006/main" w="0">
+            <a:noFill/>
+            <a:prstDash val="solid"/>
+          </a:ln>
+        </p:spPr>
+        <p:txBody>
+          <a:bodyPr xmlns:a="http://schemas.openxmlformats.org/drawingml/2006/main" lIns="76200" tIns="38100" rIns="76200" bIns="38100" anchor="ctr"/>
+          <a:lstStyle xmlns:a="http://schemas.openxmlformats.org/drawingml/2006/main"/>
+          <a:p xmlns:a="http://schemas.openxmlformats.org/drawingml/2006/main">
+            <a:pPr algn="ctr">
+              <a:defRPr sz="1725" b="1">
+                <a:solidFill>
+                  <a:srgbClr val="18354E"/>
+                </a:solidFill>
+              </a:defRPr>
+            </a:pPr>
+            <a:r>
+              <a:rPr sz="1725" b="1">
+                <a:solidFill>
+                  <a:srgbClr val="18354E"/>
+                </a:solidFill>
+                <a:latin typeface="Microsoft YaHei"/>
+                <a:ea typeface="Microsoft YaHei"/>
+                <a:cs typeface="Microsoft YaHei"/>
+              </a:rPr>
+              <a:t>主机制 + 替代机制</a:t>
+            </a:r>
+          </a:p>
+        </p:txBody>
+      </p:sp>
+      <p:sp>
+        <p:nvSpPr>
+          <p:cNvPr id="8" name="p16-d0">
+            <a:extLst xmlns:a="http://schemas.openxmlformats.org/drawingml/2006/main">
+              <a:ext uri="{FF2B5EF4-FFF2-40B4-BE49-F238E27FC236}">
+                <a16:creationId xmlns:a16="http://schemas.microsoft.com/office/drawing/2014/main" id="{6E8D191F-8EA2-46D6-AFAC-568A542E493A}"/>
+              </a:ext>
+            </a:extLst>
+          </p:cNvPr>
+          <p:cNvSpPr>
+            <a:spLocks xmlns:a="http://schemas.openxmlformats.org/drawingml/2006/main" noGrp="1"/>
+          </p:cNvSpPr>
+          <p:nvPr/>
+        </p:nvSpPr>
+        <p:spPr>
+          <a:xfrm xmlns:a="http://schemas.openxmlformats.org/drawingml/2006/main">
+            <a:off x="666750" y="2143125"/>
+            <a:ext cx="3381375" cy="1524000"/>
+          </a:xfrm>
+          <a:prstGeom xmlns:a="http://schemas.openxmlformats.org/drawingml/2006/main" prst="roundRect">
+            <a:avLst>
+              <a:gd name="adj" fmla="val 5000"/>
+            </a:avLst>
+          </a:prstGeom>
+          <a:solidFill xmlns:a="http://schemas.openxmlformats.org/drawingml/2006/main">
+            <a:srgbClr val="FFFFFF"/>
+          </a:solidFill>
+          <a:ln xmlns:a="http://schemas.openxmlformats.org/drawingml/2006/main" w="9525">
+            <a:solidFill>
+              <a:srgbClr val="D6DDE2"/>
+            </a:solidFill>
+            <a:prstDash val="solid"/>
+          </a:ln>
+        </p:spPr>
+        <p:txBody>
+          <a:bodyPr xmlns:a="http://schemas.openxmlformats.org/drawingml/2006/main" lIns="76200" tIns="38100" rIns="76200" bIns="38100" anchor="ctr"/>
+          <a:lstStyle xmlns:a="http://schemas.openxmlformats.org/drawingml/2006/main"/>
+          <a:p xmlns:a="http://schemas.openxmlformats.org/drawingml/2006/main">
+            <a:pPr algn="ctr">
+              <a:lnSpc>
+                <a:spcPct val="115000"/>
+              </a:lnSpc>
+              <a:buNone/>
+              <a:defRPr sz="1575" b="1">
+                <a:solidFill>
+                  <a:srgbClr val="263746"/>
+                </a:solidFill>
+              </a:defRPr>
+            </a:pPr>
+            <a:r>
+              <a:rPr sz="1575" b="1">
+                <a:solidFill>
+                  <a:srgbClr val="263746"/>
+                </a:solidFill>
+                <a:latin typeface="Microsoft YaHei"/>
+                <a:ea typeface="Microsoft YaHei"/>
+                <a:cs typeface="Microsoft YaHei"/>
+              </a:rPr>
+              <a:t>对同一结果给出可区分解释</a:t>
+            </a:r>
+          </a:p>
+        </p:txBody>
+      </p:sp>
+      <p:sp>
+        <p:nvSpPr>
+          <p:cNvPr id="9" name="p16-n1">
+            <a:extLst xmlns:a="http://schemas.openxmlformats.org/drawingml/2006/main">
+              <a:ext uri="{FF2B5EF4-FFF2-40B4-BE49-F238E27FC236}">
+                <a16:creationId xmlns:a16="http://schemas.microsoft.com/office/drawing/2014/main" id="{840CFE6F-B3E9-4F5A-B42B-8D2BD94F16F8}"/>
+              </a:ext>
+            </a:extLst>
+          </p:cNvPr>
+          <p:cNvSpPr>
+            <a:spLocks xmlns:a="http://schemas.openxmlformats.org/drawingml/2006/main" noGrp="1"/>
+          </p:cNvSpPr>
+          <p:nvPr/>
+        </p:nvSpPr>
+        <p:spPr>
+          <a:xfrm xmlns:a="http://schemas.openxmlformats.org/drawingml/2006/main">
+            <a:off x="4524375" y="1238250"/>
+            <a:ext cx="495300" cy="495300"/>
+          </a:xfrm>
+          <a:prstGeom xmlns:a="http://schemas.openxmlformats.org/drawingml/2006/main" prst="roundRect">
+            <a:avLst>
+              <a:gd name="adj" fmla="val 15385"/>
+            </a:avLst>
+          </a:prstGeom>
+          <a:solidFill xmlns:a="http://schemas.openxmlformats.org/drawingml/2006/main">
+            <a:srgbClr val="28745A"/>
+          </a:solidFill>
+          <a:ln xmlns:a="http://schemas.openxmlformats.org/drawingml/2006/main" w="0">
+            <a:noFill/>
+            <a:prstDash val="solid"/>
+          </a:ln>
+        </p:spPr>
+        <p:txBody>
+          <a:bodyPr xmlns:a="http://schemas.openxmlformats.org/drawingml/2006/main" lIns="76200" tIns="38100" rIns="76200" bIns="38100" anchor="ctr"/>
+          <a:lstStyle xmlns:a="http://schemas.openxmlformats.org/drawingml/2006/main"/>
+          <a:p xmlns:a="http://schemas.openxmlformats.org/drawingml/2006/main">
+            <a:pPr algn="ctr">
+              <a:defRPr sz="1500" b="1">
+                <a:solidFill>
+                  <a:srgbClr val="FFFFFF"/>
+                </a:solidFill>
+              </a:defRPr>
+            </a:pPr>
+            <a:r>
+              <a:rPr sz="1500" b="1">
+                <a:solidFill>
+                  <a:srgbClr val="FFFFFF"/>
+                </a:solidFill>
+                <a:latin typeface="Arial"/>
+                <a:ea typeface="Arial"/>
+                <a:cs typeface="Arial"/>
+              </a:rPr>
+              <a:t>2</a:t>
+            </a:r>
+          </a:p>
+        </p:txBody>
+      </p:sp>
+      <p:sp>
+        <p:nvSpPr>
+          <p:cNvPr id="10" name="p16-h1">
+            <a:extLst xmlns:a="http://schemas.openxmlformats.org/drawingml/2006/main">
+              <a:ext uri="{FF2B5EF4-FFF2-40B4-BE49-F238E27FC236}">
+                <a16:creationId xmlns:a16="http://schemas.microsoft.com/office/drawing/2014/main" id="{4BD8CD55-9C9E-45A6-8F42-F737362D440D}"/>
+              </a:ext>
+            </a:extLst>
+          </p:cNvPr>
+          <p:cNvSpPr>
+            <a:spLocks xmlns:a="http://schemas.openxmlformats.org/drawingml/2006/main" noGrp="1"/>
+          </p:cNvSpPr>
+          <p:nvPr/>
+        </p:nvSpPr>
+        <p:spPr>
+          <a:xfrm xmlns:a="http://schemas.openxmlformats.org/drawingml/2006/main">
+            <a:off x="5143500" y="1181100"/>
+            <a:ext cx="2762250" cy="590550"/>
+          </a:xfrm>
+          <a:prstGeom xmlns:a="http://schemas.openxmlformats.org/drawingml/2006/main" prst="roundRect">
+            <a:avLst>
+              <a:gd name="adj" fmla="val 12903"/>
+            </a:avLst>
+          </a:prstGeom>
+          <a:solidFill xmlns:a="http://schemas.openxmlformats.org/drawingml/2006/main">
+            <a:srgbClr val="E7F2ED"/>
+          </a:solidFill>
+          <a:ln xmlns:a="http://schemas.openxmlformats.org/drawingml/2006/main" w="0">
+            <a:noFill/>
+            <a:prstDash val="solid"/>
+          </a:ln>
+        </p:spPr>
+        <p:txBody>
+          <a:bodyPr xmlns:a="http://schemas.openxmlformats.org/drawingml/2006/main" lIns="76200" tIns="38100" rIns="76200" bIns="38100" anchor="ctr"/>
+          <a:lstStyle xmlns:a="http://schemas.openxmlformats.org/drawingml/2006/main"/>
+          <a:p xmlns:a="http://schemas.openxmlformats.org/drawingml/2006/main">
+            <a:pPr algn="ctr">
+              <a:defRPr sz="1725" b="1">
+                <a:solidFill>
+                  <a:srgbClr val="28745A"/>
+                </a:solidFill>
+              </a:defRPr>
+            </a:pPr>
+            <a:r>
+              <a:rPr sz="1725" b="1">
+                <a:solidFill>
+                  <a:srgbClr val="28745A"/>
+                </a:solidFill>
+                <a:latin typeface="Microsoft YaHei"/>
+                <a:ea typeface="Microsoft YaHei"/>
+                <a:cs typeface="Microsoft YaHei"/>
+              </a:rPr>
+              <a:t>可区分实验</a:t>
+            </a:r>
+          </a:p>
+        </p:txBody>
+      </p:sp>
+      <p:sp>
+        <p:nvSpPr>
+          <p:cNvPr id="11" name="p16-d1">
+            <a:extLst xmlns:a="http://schemas.openxmlformats.org/drawingml/2006/main">
+              <a:ext uri="{FF2B5EF4-FFF2-40B4-BE49-F238E27FC236}">
+                <a16:creationId xmlns:a16="http://schemas.microsoft.com/office/drawing/2014/main" id="{91AD9E5D-5A82-4DA5-8D83-93658C2AA34A}"/>
+              </a:ext>
+            </a:extLst>
+          </p:cNvPr>
+          <p:cNvSpPr>
+            <a:spLocks xmlns:a="http://schemas.openxmlformats.org/drawingml/2006/main" noGrp="1"/>
+          </p:cNvSpPr>
+          <p:nvPr/>
+        </p:nvSpPr>
+        <p:spPr>
+          <a:xfrm xmlns:a="http://schemas.openxmlformats.org/drawingml/2006/main">
+            <a:off x="4524375" y="2143125"/>
+            <a:ext cx="3381375" cy="1524000"/>
+          </a:xfrm>
+          <a:prstGeom xmlns:a="http://schemas.openxmlformats.org/drawingml/2006/main" prst="roundRect">
+            <a:avLst>
+              <a:gd name="adj" fmla="val 5000"/>
+            </a:avLst>
+          </a:prstGeom>
+          <a:solidFill xmlns:a="http://schemas.openxmlformats.org/drawingml/2006/main">
+            <a:srgbClr val="FFFFFF"/>
+          </a:solidFill>
+          <a:ln xmlns:a="http://schemas.openxmlformats.org/drawingml/2006/main" w="9525">
+            <a:solidFill>
+              <a:srgbClr val="D6DDE2"/>
+            </a:solidFill>
+            <a:prstDash val="solid"/>
+          </a:ln>
+        </p:spPr>
+        <p:txBody>
+          <a:bodyPr xmlns:a="http://schemas.openxmlformats.org/drawingml/2006/main" lIns="76200" tIns="38100" rIns="76200" bIns="38100" anchor="ctr"/>
+          <a:lstStyle xmlns:a="http://schemas.openxmlformats.org/drawingml/2006/main"/>
+          <a:p xmlns:a="http://schemas.openxmlformats.org/drawingml/2006/main">
+            <a:pPr algn="ctr">
+              <a:lnSpc>
+                <a:spcPct val="115000"/>
+              </a:lnSpc>
+              <a:buNone/>
+              <a:defRPr sz="1575" b="1">
+                <a:solidFill>
+                  <a:srgbClr val="263746"/>
+                </a:solidFill>
+              </a:defRPr>
+            </a:pPr>
+            <a:r>
+              <a:rPr sz="1575" b="1">
+                <a:solidFill>
+                  <a:srgbClr val="263746"/>
+                </a:solidFill>
+                <a:latin typeface="Microsoft YaHei"/>
+                <a:ea typeface="Microsoft YaHei"/>
+                <a:cs typeface="Microsoft YaHei"/>
+              </a:rPr>
+              <a:t>结果必须能够支持、削弱或淘汰解释</a:t>
+            </a:r>
+          </a:p>
+        </p:txBody>
+      </p:sp>
+      <p:sp>
+        <p:nvSpPr>
+          <p:cNvPr id="12" name="p16-n2">
+            <a:extLst xmlns:a="http://schemas.openxmlformats.org/drawingml/2006/main">
+              <a:ext uri="{FF2B5EF4-FFF2-40B4-BE49-F238E27FC236}">
+                <a16:creationId xmlns:a16="http://schemas.microsoft.com/office/drawing/2014/main" id="{620FB665-F487-4D1F-9024-43FC7CDCC61B}"/>
+              </a:ext>
+            </a:extLst>
+          </p:cNvPr>
+          <p:cNvSpPr>
+            <a:spLocks xmlns:a="http://schemas.openxmlformats.org/drawingml/2006/main" noGrp="1"/>
+          </p:cNvSpPr>
+          <p:nvPr/>
+        </p:nvSpPr>
+        <p:spPr>
+          <a:xfrm xmlns:a="http://schemas.openxmlformats.org/drawingml/2006/main">
+            <a:off x="8382000" y="1238250"/>
+            <a:ext cx="495300" cy="495300"/>
+          </a:xfrm>
+          <a:prstGeom xmlns:a="http://schemas.openxmlformats.org/drawingml/2006/main" prst="roundRect">
+            <a:avLst>
+              <a:gd name="adj" fmla="val 15385"/>
+            </a:avLst>
+          </a:prstGeom>
+          <a:solidFill xmlns:a="http://schemas.openxmlformats.org/drawingml/2006/main">
+            <a:srgbClr val="C8161E"/>
+          </a:solidFill>
+          <a:ln xmlns:a="http://schemas.openxmlformats.org/drawingml/2006/main" w="0">
+            <a:noFill/>
+            <a:prstDash val="solid"/>
+          </a:ln>
+        </p:spPr>
+        <p:txBody>
+          <a:bodyPr xmlns:a="http://schemas.openxmlformats.org/drawingml/2006/main" lIns="76200" tIns="38100" rIns="76200" bIns="38100" anchor="ctr"/>
+          <a:lstStyle xmlns:a="http://schemas.openxmlformats.org/drawingml/2006/main"/>
+          <a:p xmlns:a="http://schemas.openxmlformats.org/drawingml/2006/main">
+            <a:pPr algn="ctr">
+              <a:defRPr sz="1500" b="1">
+                <a:solidFill>
+                  <a:srgbClr val="FFFFFF"/>
+                </a:solidFill>
+              </a:defRPr>
+            </a:pPr>
+            <a:r>
+              <a:rPr sz="1500" b="1">
+                <a:solidFill>
+                  <a:srgbClr val="FFFFFF"/>
+                </a:solidFill>
+                <a:latin typeface="Arial"/>
+                <a:ea typeface="Arial"/>
+                <a:cs typeface="Arial"/>
+              </a:rPr>
+              <a:t>3</a:t>
+            </a:r>
+          </a:p>
+        </p:txBody>
+      </p:sp>
+      <p:sp>
+        <p:nvSpPr>
+          <p:cNvPr id="13" name="p16-h2">
+            <a:extLst xmlns:a="http://schemas.openxmlformats.org/drawingml/2006/main">
+              <a:ext uri="{FF2B5EF4-FFF2-40B4-BE49-F238E27FC236}">
+                <a16:creationId xmlns:a16="http://schemas.microsoft.com/office/drawing/2014/main" id="{76B21D55-FCFC-43AF-AE27-D594D81BEBD4}"/>
+              </a:ext>
+            </a:extLst>
+          </p:cNvPr>
+          <p:cNvSpPr>
+            <a:spLocks xmlns:a="http://schemas.openxmlformats.org/drawingml/2006/main" noGrp="1"/>
+          </p:cNvSpPr>
+          <p:nvPr/>
+        </p:nvSpPr>
+        <p:spPr>
+          <a:xfrm xmlns:a="http://schemas.openxmlformats.org/drawingml/2006/main">
+            <a:off x="9001125" y="1181100"/>
+            <a:ext cx="2762250" cy="590550"/>
+          </a:xfrm>
+          <a:prstGeom xmlns:a="http://schemas.openxmlformats.org/drawingml/2006/main" prst="roundRect">
+            <a:avLst>
+              <a:gd name="adj" fmla="val 12903"/>
+            </a:avLst>
+          </a:prstGeom>
+          <a:solidFill xmlns:a="http://schemas.openxmlformats.org/drawingml/2006/main">
+            <a:srgbClr val="F8E9EA"/>
+          </a:solidFill>
+          <a:ln xmlns:a="http://schemas.openxmlformats.org/drawingml/2006/main" w="0">
+            <a:noFill/>
+            <a:prstDash val="solid"/>
+          </a:ln>
+        </p:spPr>
+        <p:txBody>
+          <a:bodyPr xmlns:a="http://schemas.openxmlformats.org/drawingml/2006/main" lIns="76200" tIns="38100" rIns="76200" bIns="38100" anchor="ctr"/>
+          <a:lstStyle xmlns:a="http://schemas.openxmlformats.org/drawingml/2006/main"/>
+          <a:p xmlns:a="http://schemas.openxmlformats.org/drawingml/2006/main">
+            <a:pPr algn="ctr">
+              <a:defRPr sz="1725" b="1">
+                <a:solidFill>
+                  <a:srgbClr val="C8161E"/>
+                </a:solidFill>
+              </a:defRPr>
+            </a:pPr>
+            <a:r>
+              <a:rPr sz="1725" b="1">
+                <a:solidFill>
+                  <a:srgbClr val="C8161E"/>
+                </a:solidFill>
+                <a:latin typeface="Microsoft YaHei"/>
+                <a:ea typeface="Microsoft YaHei"/>
+                <a:cs typeface="Microsoft YaHei"/>
+              </a:rPr>
+              <a:t>研究判断记录</a:t>
+            </a:r>
+          </a:p>
+        </p:txBody>
+      </p:sp>
+      <p:sp>
+        <p:nvSpPr>
+          <p:cNvPr id="14" name="p16-d2">
+            <a:extLst xmlns:a="http://schemas.openxmlformats.org/drawingml/2006/main">
+              <a:ext uri="{FF2B5EF4-FFF2-40B4-BE49-F238E27FC236}">
+                <a16:creationId xmlns:a16="http://schemas.microsoft.com/office/drawing/2014/main" id="{0A04B980-1B9F-49EB-8662-56DB81C02925}"/>
+              </a:ext>
+            </a:extLst>
+          </p:cNvPr>
+          <p:cNvSpPr>
+            <a:spLocks xmlns:a="http://schemas.openxmlformats.org/drawingml/2006/main" noGrp="1"/>
+          </p:cNvSpPr>
+          <p:nvPr/>
+        </p:nvSpPr>
+        <p:spPr>
+          <a:xfrm xmlns:a="http://schemas.openxmlformats.org/drawingml/2006/main">
+            <a:off x="8382000" y="2143125"/>
+            <a:ext cx="3381375" cy="1524000"/>
+          </a:xfrm>
+          <a:prstGeom xmlns:a="http://schemas.openxmlformats.org/drawingml/2006/main" prst="roundRect">
+            <a:avLst>
+              <a:gd name="adj" fmla="val 5000"/>
+            </a:avLst>
+          </a:prstGeom>
+          <a:solidFill xmlns:a="http://schemas.openxmlformats.org/drawingml/2006/main">
+            <a:srgbClr val="FFFFFF"/>
+          </a:solidFill>
+          <a:ln xmlns:a="http://schemas.openxmlformats.org/drawingml/2006/main" w="9525">
+            <a:solidFill>
+              <a:srgbClr val="D6DDE2"/>
+            </a:solidFill>
+            <a:prstDash val="solid"/>
+          </a:ln>
+        </p:spPr>
+        <p:txBody>
+          <a:bodyPr xmlns:a="http://schemas.openxmlformats.org/drawingml/2006/main" lIns="76200" tIns="38100" rIns="76200" bIns="38100" anchor="ctr"/>
+          <a:lstStyle xmlns:a="http://schemas.openxmlformats.org/drawingml/2006/main"/>
+          <a:p xmlns:a="http://schemas.openxmlformats.org/drawingml/2006/main">
+            <a:pPr algn="ctr">
+              <a:lnSpc>
+                <a:spcPct val="115000"/>
+              </a:lnSpc>
+              <a:buNone/>
+              <a:defRPr sz="1575" b="1">
+                <a:solidFill>
+                  <a:srgbClr val="263746"/>
+                </a:solidFill>
+              </a:defRPr>
+            </a:pPr>
+            <a:r>
+              <a:rPr sz="1575" b="1">
+                <a:solidFill>
+                  <a:srgbClr val="263746"/>
+                </a:solidFill>
+                <a:latin typeface="Microsoft YaHei"/>
+                <a:ea typeface="Microsoft YaHei"/>
+                <a:cs typeface="Microsoft YaHei"/>
+              </a:rPr>
+              <a:t>写清依据、取舍、反证点与下一步</a:t>
+            </a:r>
+          </a:p>
+        </p:txBody>
+      </p:sp>
+      <p:sp>
+        <p:nvSpPr>
+          <p:cNvPr id="15" name="p16-boundary">
+            <a:extLst xmlns:a="http://schemas.openxmlformats.org/drawingml/2006/main">
+              <a:ext uri="{FF2B5EF4-FFF2-40B4-BE49-F238E27FC236}">
+                <a16:creationId xmlns:a16="http://schemas.microsoft.com/office/drawing/2014/main" id="{6116FE3D-50CD-4DDF-89E7-C8847B3B6956}"/>
+              </a:ext>
+            </a:extLst>
+          </p:cNvPr>
+          <p:cNvSpPr>
+            <a:spLocks xmlns:a="http://schemas.openxmlformats.org/drawingml/2006/main" noGrp="1"/>
+          </p:cNvSpPr>
+          <p:nvPr/>
+        </p:nvSpPr>
+        <p:spPr>
+          <a:xfrm xmlns:a="http://schemas.openxmlformats.org/drawingml/2006/main">
+            <a:off x="1428750" y="4286250"/>
+            <a:ext cx="9334500" cy="781050"/>
+          </a:xfrm>
+          <a:prstGeom xmlns:a="http://schemas.openxmlformats.org/drawingml/2006/main" prst="roundRect">
+            <a:avLst>
+              <a:gd name="adj" fmla="val 9756"/>
+            </a:avLst>
+          </a:prstGeom>
+          <a:solidFill xmlns:a="http://schemas.openxmlformats.org/drawingml/2006/main">
+            <a:srgbClr val="F8E9EA"/>
+          </a:solidFill>
+          <a:ln xmlns:a="http://schemas.openxmlformats.org/drawingml/2006/main" w="0">
+            <a:noFill/>
+            <a:prstDash val="solid"/>
+          </a:ln>
+        </p:spPr>
+        <p:txBody>
+          <a:bodyPr xmlns:a="http://schemas.openxmlformats.org/drawingml/2006/main" lIns="76200" tIns="38100" rIns="76200" bIns="38100" anchor="ctr"/>
+          <a:lstStyle xmlns:a="http://schemas.openxmlformats.org/drawingml/2006/main"/>
+          <a:p xmlns:a="http://schemas.openxmlformats.org/drawingml/2006/main">
+            <a:pPr algn="ctr">
+              <a:defRPr sz="1875" b="1">
+                <a:solidFill>
+                  <a:srgbClr val="C8161E"/>
+                </a:solidFill>
+              </a:defRPr>
+            </a:pPr>
+            <a:r>
+              <a:rPr sz="1875" b="1">
+                <a:solidFill>
+                  <a:srgbClr val="C8161E"/>
+                </a:solidFill>
+                <a:latin typeface="Microsoft YaHei"/>
+                <a:ea typeface="Microsoft YaHei"/>
+                <a:cs typeface="Microsoft YaHei"/>
+              </a:rPr>
+              <a:t>关键边界：如果实验结果不会改变任何研究判断，这个实验就还没有完成可区分性设计。</a:t>
+            </a:r>
+          </a:p>
+        </p:txBody>
+      </p:sp>
+    </p:spTree>
+    <p:extLst>
+      <p:ext uri="{BB962C8B-B14F-4D97-AF65-F5344CB8AC3E}">
+        <p14:creationId xmlns:p14="http://schemas.microsoft.com/office/powerpoint/2010/main" val="1443728403"/>
+      </p:ext>
+    </p:extLst>
+  </p:cSld>
+</p:sld>
+</file>
+
+<file path=ppt/slides/slide17.xml><?xml version="1.0" encoding="utf-8"?>
+<p:sld xmlns:p="http://schemas.openxmlformats.org/presentationml/2006/main">
+  <p:cSld>
+    <p:spTree>
+      <p:nvGrpSpPr>
+        <p:cNvPr id="1" name=""/>
+        <p:cNvGrpSpPr/>
+        <p:nvPr/>
+      </p:nvGrpSpPr>
+      <p:grpSpPr>
+        <a:xfrm xmlns:a="http://schemas.openxmlformats.org/drawingml/2006/main"/>
+      </p:grpSpPr>
+      <p:sp>
+        <p:nvSpPr>
+          <p:cNvPr id="4" name="Text Placeholder 3">
+            <a:extLst xmlns:a="http://schemas.openxmlformats.org/drawingml/2006/main">
+              <a:ext uri="{FF2B5EF4-FFF2-40B4-BE49-F238E27FC236}">
+                <a16:creationId xmlns:a16="http://schemas.microsoft.com/office/drawing/2014/main" id="{4D941B40-7A0A-534E-3563-CA11753C8E3F}"/>
+              </a:ext>
+            </a:extLst>
+          </p:cNvPr>
+          <p:cNvSpPr>
+            <a:spLocks xmlns:a="http://schemas.openxmlformats.org/drawingml/2006/main" noGrp="1"/>
+          </p:cNvSpPr>
+          <p:nvPr>
+            <p:ph type="body" idx="14"/>
+          </p:nvPr>
+        </p:nvSpPr>
+        <p:spPr>
+          <a:xfrm xmlns:a="http://schemas.openxmlformats.org/drawingml/2006/main">
+            <a:off x="1028700" y="28575"/>
+            <a:ext cx="10668000" cy="628650"/>
+          </a:xfrm>
+        </p:spPr>
+        <p:txBody>
+          <a:bodyPr xmlns:a="http://schemas.openxmlformats.org/drawingml/2006/main" lIns="76200" tIns="0" rIns="76200" bIns="0" anchor="ctr"/>
+          <a:lstStyle xmlns:a="http://schemas.openxmlformats.org/drawingml/2006/main"/>
+          <a:p xmlns:a="http://schemas.openxmlformats.org/drawingml/2006/main">
+            <a:pPr algn="l"/>
+            <a:r>
+              <a:rPr sz="2250" b="1">
+                <a:solidFill>
+                  <a:srgbClr val="FFFFFF"/>
+                </a:solidFill>
+                <a:latin typeface="Microsoft YaHei"/>
+                <a:ea typeface="Microsoft YaHei"/>
+                <a:cs typeface="Microsoft YaHei"/>
+              </a:rPr>
+              <a:t>退出卡：你的下一步实验真的会改变判断吗</a:t>
+            </a:r>
+            <a:endParaRPr/>
+          </a:p>
+        </p:txBody>
+      </p:sp>
+      <p:sp>
+        <p:nvSpPr>
+          <p:cNvPr id="5" name="Slide Number Placeholder 4">
+            <a:extLst xmlns:a="http://schemas.openxmlformats.org/drawingml/2006/main">
+              <a:ext uri="{FF2B5EF4-FFF2-40B4-BE49-F238E27FC236}">
+                <a16:creationId xmlns:a16="http://schemas.microsoft.com/office/drawing/2014/main" id="{EBA5909F-738E-F60C-BE8C-B3F1D94548E5}"/>
+              </a:ext>
+            </a:extLst>
+          </p:cNvPr>
+          <p:cNvSpPr>
+            <a:spLocks xmlns:a="http://schemas.openxmlformats.org/drawingml/2006/main" noGrp="1"/>
+          </p:cNvSpPr>
+          <p:nvPr>
+            <p:ph type="sldNum" idx="10"/>
+          </p:nvPr>
+        </p:nvSpPr>
+        <p:spPr/>
+        <p:txBody>
+          <a:bodyPr xmlns:a="http://schemas.openxmlformats.org/drawingml/2006/main"/>
+          <a:lstStyle xmlns:a="http://schemas.openxmlformats.org/drawingml/2006/main"/>
+          <a:p xmlns:a="http://schemas.openxmlformats.org/drawingml/2006/main">
+            <a:fld id="{90F7333B-44AC-F7E9-D49D-FE92F45E0477}" type="slidenum">
+              <a:t>17</a:t>
+            </a:fld>
+            <a:endParaRPr/>
+          </a:p>
+        </p:txBody>
+      </p:sp>
+      <p:sp>
+        <p:nvSpPr>
           <p:cNvPr id="6" name="p16-exit-title">
             <a:extLst xmlns:a="http://schemas.openxmlformats.org/drawingml/2006/main">
               <a:ext uri="{FF2B5EF4-FFF2-40B4-BE49-F238E27FC236}">
-                <a16:creationId xmlns:a16="http://schemas.microsoft.com/office/drawing/2014/main" id="{FD047B50-F97D-40C4-A28E-EF7BD757F04E}"/>
+                <a16:creationId xmlns:a16="http://schemas.microsoft.com/office/drawing/2014/main" id="{0A281231-CF78-4A8A-80BB-47F5858904CB}"/>
               </a:ext>
             </a:extLst>
           </p:cNvPr>
@@ -12125,7 +12787,7 @@
           <p:cNvPr id="7" name="p16-n-0">
             <a:extLst xmlns:a="http://schemas.openxmlformats.org/drawingml/2006/main">
               <a:ext uri="{FF2B5EF4-FFF2-40B4-BE49-F238E27FC236}">
-                <a16:creationId xmlns:a16="http://schemas.microsoft.com/office/drawing/2014/main" id="{58E8F8ED-70B4-4BA5-870E-779525F4D6E4}"/>
+                <a16:creationId xmlns:a16="http://schemas.microsoft.com/office/drawing/2014/main" id="{1561D56A-F9B6-4B26-91AB-0F5CB8AC778E}"/>
               </a:ext>
             </a:extLst>
           </p:cNvPr>
@@ -12182,7 +12844,7 @@
           <p:cNvPr id="8" name="p16-q-0">
             <a:extLst xmlns:a="http://schemas.openxmlformats.org/drawingml/2006/main">
               <a:ext uri="{FF2B5EF4-FFF2-40B4-BE49-F238E27FC236}">
-                <a16:creationId xmlns:a16="http://schemas.microsoft.com/office/drawing/2014/main" id="{DF7C1D59-139C-4C1E-AC72-5C833A2B3E63}"/>
+                <a16:creationId xmlns:a16="http://schemas.microsoft.com/office/drawing/2014/main" id="{9E47CECB-F992-454A-B652-2C7F757AC53D}"/>
               </a:ext>
             </a:extLst>
           </p:cNvPr>
@@ -12237,7 +12899,7 @@
           <p:cNvPr id="9" name="p16-n-1">
             <a:extLst xmlns:a="http://schemas.openxmlformats.org/drawingml/2006/main">
               <a:ext uri="{FF2B5EF4-FFF2-40B4-BE49-F238E27FC236}">
-                <a16:creationId xmlns:a16="http://schemas.microsoft.com/office/drawing/2014/main" id="{B8B1D3F0-B9D3-4EBA-8808-FE52C50D55E9}"/>
+                <a16:creationId xmlns:a16="http://schemas.microsoft.com/office/drawing/2014/main" id="{FCD8896A-6762-47C5-B8A4-E5B77E22A2B2}"/>
               </a:ext>
             </a:extLst>
           </p:cNvPr>
@@ -12294,7 +12956,7 @@
           <p:cNvPr id="10" name="p16-q-1">
             <a:extLst xmlns:a="http://schemas.openxmlformats.org/drawingml/2006/main">
               <a:ext uri="{FF2B5EF4-FFF2-40B4-BE49-F238E27FC236}">
-                <a16:creationId xmlns:a16="http://schemas.microsoft.com/office/drawing/2014/main" id="{30A71BBB-BD40-499D-8036-C2F973DF3C88}"/>
+                <a16:creationId xmlns:a16="http://schemas.microsoft.com/office/drawing/2014/main" id="{C642DC7B-715E-4DE7-A464-1F9E97E93002}"/>
               </a:ext>
             </a:extLst>
           </p:cNvPr>
@@ -12349,7 +13011,7 @@
           <p:cNvPr id="11" name="p16-n-2">
             <a:extLst xmlns:a="http://schemas.openxmlformats.org/drawingml/2006/main">
               <a:ext uri="{FF2B5EF4-FFF2-40B4-BE49-F238E27FC236}">
-                <a16:creationId xmlns:a16="http://schemas.microsoft.com/office/drawing/2014/main" id="{2B061E36-5976-430D-B0A1-6FBEAFF0CAD5}"/>
+                <a16:creationId xmlns:a16="http://schemas.microsoft.com/office/drawing/2014/main" id="{F5D8917B-7339-45FC-8922-B0276936D1D5}"/>
               </a:ext>
             </a:extLst>
           </p:cNvPr>
@@ -12406,7 +13068,7 @@
           <p:cNvPr id="12" name="p16-q-2">
             <a:extLst xmlns:a="http://schemas.openxmlformats.org/drawingml/2006/main">
               <a:ext uri="{FF2B5EF4-FFF2-40B4-BE49-F238E27FC236}">
-                <a16:creationId xmlns:a16="http://schemas.microsoft.com/office/drawing/2014/main" id="{98608A37-CCDC-47F6-A637-B4B1C9BAAB77}"/>
+                <a16:creationId xmlns:a16="http://schemas.microsoft.com/office/drawing/2014/main" id="{1955F679-05E0-4815-812B-1E54695DF036}"/>
               </a:ext>
             </a:extLst>
           </p:cNvPr>
@@ -12461,7 +13123,7 @@
           <p:cNvPr id="13" name="p16-n-3">
             <a:extLst xmlns:a="http://schemas.openxmlformats.org/drawingml/2006/main">
               <a:ext uri="{FF2B5EF4-FFF2-40B4-BE49-F238E27FC236}">
-                <a16:creationId xmlns:a16="http://schemas.microsoft.com/office/drawing/2014/main" id="{CC6C4C1E-E268-48C6-99A1-DCB5E648228A}"/>
+                <a16:creationId xmlns:a16="http://schemas.microsoft.com/office/drawing/2014/main" id="{4FD7858C-D3FE-494E-A30E-9C0256DC2130}"/>
               </a:ext>
             </a:extLst>
           </p:cNvPr>
@@ -12518,7 +13180,7 @@
           <p:cNvPr id="14" name="p16-q-3">
             <a:extLst xmlns:a="http://schemas.openxmlformats.org/drawingml/2006/main">
               <a:ext uri="{FF2B5EF4-FFF2-40B4-BE49-F238E27FC236}">
-                <a16:creationId xmlns:a16="http://schemas.microsoft.com/office/drawing/2014/main" id="{5004880F-9F6A-47DA-A79A-3EFBA936659F}"/>
+                <a16:creationId xmlns:a16="http://schemas.microsoft.com/office/drawing/2014/main" id="{AA27B7AB-6951-4244-957C-105CD9AA6B04}"/>
               </a:ext>
             </a:extLst>
           </p:cNvPr>
@@ -12573,7 +13235,7 @@
           <p:cNvPr id="15" name="p16-n-4">
             <a:extLst xmlns:a="http://schemas.openxmlformats.org/drawingml/2006/main">
               <a:ext uri="{FF2B5EF4-FFF2-40B4-BE49-F238E27FC236}">
-                <a16:creationId xmlns:a16="http://schemas.microsoft.com/office/drawing/2014/main" id="{F2F67E4B-A249-4A88-89DA-44849204FB62}"/>
+                <a16:creationId xmlns:a16="http://schemas.microsoft.com/office/drawing/2014/main" id="{A8E1DE54-CA49-46BD-98A2-00F44AD52773}"/>
               </a:ext>
             </a:extLst>
           </p:cNvPr>
@@ -12630,7 +13292,7 @@
           <p:cNvPr id="16" name="p16-q-4">
             <a:extLst xmlns:a="http://schemas.openxmlformats.org/drawingml/2006/main">
               <a:ext uri="{FF2B5EF4-FFF2-40B4-BE49-F238E27FC236}">
-                <a16:creationId xmlns:a16="http://schemas.microsoft.com/office/drawing/2014/main" id="{7DDCBDAF-4CA3-4DD8-9693-350C63CAA9FF}"/>
+                <a16:creationId xmlns:a16="http://schemas.microsoft.com/office/drawing/2014/main" id="{1399A434-5B61-482F-8D4B-BE46D5C993D4}"/>
               </a:ext>
             </a:extLst>
           </p:cNvPr>
@@ -12685,7 +13347,7 @@
           <p:cNvPr id="17" name="p16-next-title">
             <a:extLst xmlns:a="http://schemas.openxmlformats.org/drawingml/2006/main">
               <a:ext uri="{FF2B5EF4-FFF2-40B4-BE49-F238E27FC236}">
-                <a16:creationId xmlns:a16="http://schemas.microsoft.com/office/drawing/2014/main" id="{9D876EA4-38A1-42B2-A171-1EEFFB1A3BD8}"/>
+                <a16:creationId xmlns:a16="http://schemas.microsoft.com/office/drawing/2014/main" id="{825813DC-2554-4B31-80B3-A88D4F0415D1}"/>
               </a:ext>
             </a:extLst>
           </p:cNvPr>
@@ -12738,7 +13400,7 @@
           <p:cNvPr id="18" name="p16-line-1">
             <a:extLst xmlns:a="http://schemas.openxmlformats.org/drawingml/2006/main">
               <a:ext uri="{FF2B5EF4-FFF2-40B4-BE49-F238E27FC236}">
-                <a16:creationId xmlns:a16="http://schemas.microsoft.com/office/drawing/2014/main" id="{2D21A0F9-EC27-42D7-8E0F-A0F1F5DF6732}"/>
+                <a16:creationId xmlns:a16="http://schemas.microsoft.com/office/drawing/2014/main" id="{DCE8B8AF-715C-48B3-B0EF-60CA8D6A5D61}"/>
               </a:ext>
             </a:extLst>
           </p:cNvPr>
@@ -12769,7 +13431,7 @@
           <p:cNvPr id="19" name="p16-line-2">
             <a:extLst xmlns:a="http://schemas.openxmlformats.org/drawingml/2006/main">
               <a:ext uri="{FF2B5EF4-FFF2-40B4-BE49-F238E27FC236}">
-                <a16:creationId xmlns:a16="http://schemas.microsoft.com/office/drawing/2014/main" id="{35134104-D4CD-4E44-A0F3-86AA2BAA78EF}"/>
+                <a16:creationId xmlns:a16="http://schemas.microsoft.com/office/drawing/2014/main" id="{8431B3EB-8A23-4200-9535-B987F7F7ECF6}"/>
               </a:ext>
             </a:extLst>
           </p:cNvPr>
@@ -12800,7 +13462,7 @@
           <p:cNvPr id="20" name="p16-now">
             <a:extLst xmlns:a="http://schemas.openxmlformats.org/drawingml/2006/main">
               <a:ext uri="{FF2B5EF4-FFF2-40B4-BE49-F238E27FC236}">
-                <a16:creationId xmlns:a16="http://schemas.microsoft.com/office/drawing/2014/main" id="{CBB9A12B-820B-462C-B317-C207F6FAAF10}"/>
+                <a16:creationId xmlns:a16="http://schemas.microsoft.com/office/drawing/2014/main" id="{99B16ACC-18AB-4084-AE79-B3B89EE7740B}"/>
               </a:ext>
             </a:extLst>
           </p:cNvPr>
@@ -12885,7 +13547,7 @@
           <p:cNvPr id="21" name="p16-week8">
             <a:extLst xmlns:a="http://schemas.openxmlformats.org/drawingml/2006/main">
               <a:ext uri="{FF2B5EF4-FFF2-40B4-BE49-F238E27FC236}">
-                <a16:creationId xmlns:a16="http://schemas.microsoft.com/office/drawing/2014/main" id="{389CDE09-1228-4B94-93CB-1CB7C638ED70}"/>
+                <a16:creationId xmlns:a16="http://schemas.microsoft.com/office/drawing/2014/main" id="{E8C5C694-C6B6-476B-BBDA-F68AF91CA687}"/>
               </a:ext>
             </a:extLst>
           </p:cNvPr>
@@ -12970,7 +13632,7 @@
           <p:cNvPr id="22" name="p16-week9">
             <a:extLst xmlns:a="http://schemas.openxmlformats.org/drawingml/2006/main">
               <a:ext uri="{FF2B5EF4-FFF2-40B4-BE49-F238E27FC236}">
-                <a16:creationId xmlns:a16="http://schemas.microsoft.com/office/drawing/2014/main" id="{0010DA40-4618-4DD1-A725-3C35BBA891E4}"/>
+                <a16:creationId xmlns:a16="http://schemas.microsoft.com/office/drawing/2014/main" id="{0FA64BFD-0E00-43E9-A415-F8D9868C24BC}"/>
               </a:ext>
             </a:extLst>
           </p:cNvPr>
@@ -13055,7 +13717,7 @@
           <p:cNvPr id="23" name="p16-bottom">
             <a:extLst xmlns:a="http://schemas.openxmlformats.org/drawingml/2006/main">
               <a:ext uri="{FF2B5EF4-FFF2-40B4-BE49-F238E27FC236}">
-                <a16:creationId xmlns:a16="http://schemas.microsoft.com/office/drawing/2014/main" id="{CD545FEF-3585-48AD-9A0F-163028D5842E}"/>
+                <a16:creationId xmlns:a16="http://schemas.microsoft.com/office/drawing/2014/main" id="{BBF69C6E-B9E7-4ECF-B2FF-4917E6FECB45}"/>
               </a:ext>
             </a:extLst>
           </p:cNvPr>
@@ -13200,7 +13862,7 @@
           <p:cNvPr id="6" name="p02-left-title">
             <a:extLst xmlns:a="http://schemas.openxmlformats.org/drawingml/2006/main">
               <a:ext uri="{FF2B5EF4-FFF2-40B4-BE49-F238E27FC236}">
-                <a16:creationId xmlns:a16="http://schemas.microsoft.com/office/drawing/2014/main" id="{B8549789-A1B8-464E-A1F9-E0D4BA754989}"/>
+                <a16:creationId xmlns:a16="http://schemas.microsoft.com/office/drawing/2014/main" id="{F01BCB36-6508-41AB-A2B6-AE678E4C195B}"/>
               </a:ext>
             </a:extLst>
           </p:cNvPr>
@@ -13253,7 +13915,7 @@
           <p:cNvPr id="7" name="p02-left-0">
             <a:extLst xmlns:a="http://schemas.openxmlformats.org/drawingml/2006/main">
               <a:ext uri="{FF2B5EF4-FFF2-40B4-BE49-F238E27FC236}">
-                <a16:creationId xmlns:a16="http://schemas.microsoft.com/office/drawing/2014/main" id="{0AAAD8A7-37F9-4BDB-90DE-4199B3A1EFD8}"/>
+                <a16:creationId xmlns:a16="http://schemas.microsoft.com/office/drawing/2014/main" id="{16C2D173-A5DD-4317-9FBC-1B64CB7B9953}"/>
               </a:ext>
             </a:extLst>
           </p:cNvPr>
@@ -13338,7 +14000,7 @@
           <p:cNvPr id="8" name="p02-left-1">
             <a:extLst xmlns:a="http://schemas.openxmlformats.org/drawingml/2006/main">
               <a:ext uri="{FF2B5EF4-FFF2-40B4-BE49-F238E27FC236}">
-                <a16:creationId xmlns:a16="http://schemas.microsoft.com/office/drawing/2014/main" id="{E44DB7DF-D632-40C5-8001-CC07E432D21D}"/>
+                <a16:creationId xmlns:a16="http://schemas.microsoft.com/office/drawing/2014/main" id="{657A910E-C0CB-4B1D-811A-B306EEA2B747}"/>
               </a:ext>
             </a:extLst>
           </p:cNvPr>
@@ -13423,7 +14085,7 @@
           <p:cNvPr id="9" name="p02-left-2">
             <a:extLst xmlns:a="http://schemas.openxmlformats.org/drawingml/2006/main">
               <a:ext uri="{FF2B5EF4-FFF2-40B4-BE49-F238E27FC236}">
-                <a16:creationId xmlns:a16="http://schemas.microsoft.com/office/drawing/2014/main" id="{88D16DBF-DEAA-4EC3-A09C-BCAF8A1B15E0}"/>
+                <a16:creationId xmlns:a16="http://schemas.microsoft.com/office/drawing/2014/main" id="{27BE5453-0505-4911-ADF2-E9D15658C814}"/>
               </a:ext>
             </a:extLst>
           </p:cNvPr>
@@ -13508,7 +14170,7 @@
           <p:cNvPr id="10" name="p02-separator">
             <a:extLst xmlns:a="http://schemas.openxmlformats.org/drawingml/2006/main">
               <a:ext uri="{FF2B5EF4-FFF2-40B4-BE49-F238E27FC236}">
-                <a16:creationId xmlns:a16="http://schemas.microsoft.com/office/drawing/2014/main" id="{1802A4D5-B824-4D95-827D-453A55237E5E}"/>
+                <a16:creationId xmlns:a16="http://schemas.microsoft.com/office/drawing/2014/main" id="{70BDD4DE-59AC-44F9-A93C-65D058A98976}"/>
               </a:ext>
             </a:extLst>
           </p:cNvPr>
@@ -13539,7 +14201,7 @@
           <p:cNvPr id="11" name="p02-not-equal">
             <a:extLst xmlns:a="http://schemas.openxmlformats.org/drawingml/2006/main">
               <a:ext uri="{FF2B5EF4-FFF2-40B4-BE49-F238E27FC236}">
-                <a16:creationId xmlns:a16="http://schemas.microsoft.com/office/drawing/2014/main" id="{A00DD4D2-6DF4-480F-AA56-5A44A5F55B1A}"/>
+                <a16:creationId xmlns:a16="http://schemas.microsoft.com/office/drawing/2014/main" id="{B71AB29E-63E9-4CD1-9063-100CADC2DF77}"/>
               </a:ext>
             </a:extLst>
           </p:cNvPr>
@@ -13596,7 +14258,7 @@
           <p:cNvPr id="12" name="p02-right-title">
             <a:extLst xmlns:a="http://schemas.openxmlformats.org/drawingml/2006/main">
               <a:ext uri="{FF2B5EF4-FFF2-40B4-BE49-F238E27FC236}">
-                <a16:creationId xmlns:a16="http://schemas.microsoft.com/office/drawing/2014/main" id="{C9EEA1DD-3779-4F00-950A-A0EC7D4FABFA}"/>
+                <a16:creationId xmlns:a16="http://schemas.microsoft.com/office/drawing/2014/main" id="{9508E22C-7F36-48A9-BC56-D6CB802FF8B8}"/>
               </a:ext>
             </a:extLst>
           </p:cNvPr>
@@ -13649,7 +14311,7 @@
           <p:cNvPr id="13" name="p02-right-0">
             <a:extLst xmlns:a="http://schemas.openxmlformats.org/drawingml/2006/main">
               <a:ext uri="{FF2B5EF4-FFF2-40B4-BE49-F238E27FC236}">
-                <a16:creationId xmlns:a16="http://schemas.microsoft.com/office/drawing/2014/main" id="{9154CE34-83D8-4E7E-9A97-3E7964D09A90}"/>
+                <a16:creationId xmlns:a16="http://schemas.microsoft.com/office/drawing/2014/main" id="{B068E343-F37F-403D-9E04-A624979DC81D}"/>
               </a:ext>
             </a:extLst>
           </p:cNvPr>
@@ -13734,7 +14396,7 @@
           <p:cNvPr id="14" name="p02-right-1">
             <a:extLst xmlns:a="http://schemas.openxmlformats.org/drawingml/2006/main">
               <a:ext uri="{FF2B5EF4-FFF2-40B4-BE49-F238E27FC236}">
-                <a16:creationId xmlns:a16="http://schemas.microsoft.com/office/drawing/2014/main" id="{E9302125-A8BB-4A5E-BA78-D6C3521BC45C}"/>
+                <a16:creationId xmlns:a16="http://schemas.microsoft.com/office/drawing/2014/main" id="{5133F2C0-6D1D-476E-9E83-F74C12F087EB}"/>
               </a:ext>
             </a:extLst>
           </p:cNvPr>
@@ -13819,7 +14481,7 @@
           <p:cNvPr id="15" name="p02-right-2">
             <a:extLst xmlns:a="http://schemas.openxmlformats.org/drawingml/2006/main">
               <a:ext uri="{FF2B5EF4-FFF2-40B4-BE49-F238E27FC236}">
-                <a16:creationId xmlns:a16="http://schemas.microsoft.com/office/drawing/2014/main" id="{C6DB9554-1EE0-4023-8DDB-38AAF2AB7BFB}"/>
+                <a16:creationId xmlns:a16="http://schemas.microsoft.com/office/drawing/2014/main" id="{88E3A877-23A8-490E-AA3F-87E3316979EB}"/>
               </a:ext>
             </a:extLst>
           </p:cNvPr>
@@ -13904,7 +14566,7 @@
           <p:cNvPr id="16" name="p02-bottom">
             <a:extLst xmlns:a="http://schemas.openxmlformats.org/drawingml/2006/main">
               <a:ext uri="{FF2B5EF4-FFF2-40B4-BE49-F238E27FC236}">
-                <a16:creationId xmlns:a16="http://schemas.microsoft.com/office/drawing/2014/main" id="{CF402B4F-6C51-4F6F-9BF2-60A2B2C058D7}"/>
+                <a16:creationId xmlns:a16="http://schemas.microsoft.com/office/drawing/2014/main" id="{4A11204F-0E01-431C-9065-0AC8461B4BDA}"/>
               </a:ext>
             </a:extLst>
           </p:cNvPr>
@@ -14049,7 +14711,7 @@
           <p:cNvPr id="6" name="p03-b-0">
             <a:extLst xmlns:a="http://schemas.openxmlformats.org/drawingml/2006/main">
               <a:ext uri="{FF2B5EF4-FFF2-40B4-BE49-F238E27FC236}">
-                <a16:creationId xmlns:a16="http://schemas.microsoft.com/office/drawing/2014/main" id="{30CBAF5C-AE3D-456C-AB54-9C24775AEBDB}"/>
+                <a16:creationId xmlns:a16="http://schemas.microsoft.com/office/drawing/2014/main" id="{2B2C54E6-1C5D-44C7-9E11-A582399CD9DC}"/>
               </a:ext>
             </a:extLst>
           </p:cNvPr>
@@ -14106,7 +14768,7 @@
           <p:cNvPr id="7" name="p03-g-0">
             <a:extLst xmlns:a="http://schemas.openxmlformats.org/drawingml/2006/main">
               <a:ext uri="{FF2B5EF4-FFF2-40B4-BE49-F238E27FC236}">
-                <a16:creationId xmlns:a16="http://schemas.microsoft.com/office/drawing/2014/main" id="{F5A77D47-B210-475E-A5F6-79BCA3B0CB8E}"/>
+                <a16:creationId xmlns:a16="http://schemas.microsoft.com/office/drawing/2014/main" id="{8544FA33-5E1E-48AD-8AF4-C45F9CE3A77F}"/>
               </a:ext>
             </a:extLst>
           </p:cNvPr>
@@ -14163,7 +14825,7 @@
           <p:cNvPr id="8" name="p03-b-1">
             <a:extLst xmlns:a="http://schemas.openxmlformats.org/drawingml/2006/main">
               <a:ext uri="{FF2B5EF4-FFF2-40B4-BE49-F238E27FC236}">
-                <a16:creationId xmlns:a16="http://schemas.microsoft.com/office/drawing/2014/main" id="{7F839DB1-4B87-4596-9430-C3BFB117DEA3}"/>
+                <a16:creationId xmlns:a16="http://schemas.microsoft.com/office/drawing/2014/main" id="{276433AE-3D13-420C-A269-4BB6A8F773AF}"/>
               </a:ext>
             </a:extLst>
           </p:cNvPr>
@@ -14220,7 +14882,7 @@
           <p:cNvPr id="9" name="p03-g-1">
             <a:extLst xmlns:a="http://schemas.openxmlformats.org/drawingml/2006/main">
               <a:ext uri="{FF2B5EF4-FFF2-40B4-BE49-F238E27FC236}">
-                <a16:creationId xmlns:a16="http://schemas.microsoft.com/office/drawing/2014/main" id="{89F4AF52-98DA-47C3-B826-2000A0F62C7F}"/>
+                <a16:creationId xmlns:a16="http://schemas.microsoft.com/office/drawing/2014/main" id="{526B9080-892B-4207-853D-E7A427198331}"/>
               </a:ext>
             </a:extLst>
           </p:cNvPr>
@@ -14277,7 +14939,7 @@
           <p:cNvPr id="10" name="p03-b-2">
             <a:extLst xmlns:a="http://schemas.openxmlformats.org/drawingml/2006/main">
               <a:ext uri="{FF2B5EF4-FFF2-40B4-BE49-F238E27FC236}">
-                <a16:creationId xmlns:a16="http://schemas.microsoft.com/office/drawing/2014/main" id="{0A20DFAE-A12C-44CD-93C8-22A46FB545D3}"/>
+                <a16:creationId xmlns:a16="http://schemas.microsoft.com/office/drawing/2014/main" id="{FEAB5108-3AF5-404A-BF5F-813E2628C0D4}"/>
               </a:ext>
             </a:extLst>
           </p:cNvPr>
@@ -14334,7 +14996,7 @@
           <p:cNvPr id="11" name="p03-g-2">
             <a:extLst xmlns:a="http://schemas.openxmlformats.org/drawingml/2006/main">
               <a:ext uri="{FF2B5EF4-FFF2-40B4-BE49-F238E27FC236}">
-                <a16:creationId xmlns:a16="http://schemas.microsoft.com/office/drawing/2014/main" id="{618B4E6A-E222-4C97-8EE9-8676E9E5C3EF}"/>
+                <a16:creationId xmlns:a16="http://schemas.microsoft.com/office/drawing/2014/main" id="{75158791-2DA7-4307-94BA-5011E94CBF36}"/>
               </a:ext>
             </a:extLst>
           </p:cNvPr>
@@ -14391,7 +15053,7 @@
           <p:cNvPr id="12" name="p03-b-3">
             <a:extLst xmlns:a="http://schemas.openxmlformats.org/drawingml/2006/main">
               <a:ext uri="{FF2B5EF4-FFF2-40B4-BE49-F238E27FC236}">
-                <a16:creationId xmlns:a16="http://schemas.microsoft.com/office/drawing/2014/main" id="{5FCC9A25-CE9A-4BF4-B675-E45DCEE3F4AB}"/>
+                <a16:creationId xmlns:a16="http://schemas.microsoft.com/office/drawing/2014/main" id="{BAEAC8F3-BCF8-4160-BEB7-4F2E62579A88}"/>
               </a:ext>
             </a:extLst>
           </p:cNvPr>
@@ -14448,7 +15110,7 @@
           <p:cNvPr id="13" name="p03-g-3">
             <a:extLst xmlns:a="http://schemas.openxmlformats.org/drawingml/2006/main">
               <a:ext uri="{FF2B5EF4-FFF2-40B4-BE49-F238E27FC236}">
-                <a16:creationId xmlns:a16="http://schemas.microsoft.com/office/drawing/2014/main" id="{5D09AEF9-E041-4D52-8B10-9C408470502A}"/>
+                <a16:creationId xmlns:a16="http://schemas.microsoft.com/office/drawing/2014/main" id="{0CE42816-E40D-467B-AB46-E6E48E839BBB}"/>
               </a:ext>
             </a:extLst>
           </p:cNvPr>
@@ -14505,7 +15167,7 @@
           <p:cNvPr id="14" name="p03-b-4">
             <a:extLst xmlns:a="http://schemas.openxmlformats.org/drawingml/2006/main">
               <a:ext uri="{FF2B5EF4-FFF2-40B4-BE49-F238E27FC236}">
-                <a16:creationId xmlns:a16="http://schemas.microsoft.com/office/drawing/2014/main" id="{751F9CD9-7DC5-4D4E-9A2D-A94591379A10}"/>
+                <a16:creationId xmlns:a16="http://schemas.microsoft.com/office/drawing/2014/main" id="{4C5DA87C-1731-4117-8C3F-E4B2B3EFA336}"/>
               </a:ext>
             </a:extLst>
           </p:cNvPr>
@@ -14562,7 +15224,7 @@
           <p:cNvPr id="15" name="p03-g-4">
             <a:extLst xmlns:a="http://schemas.openxmlformats.org/drawingml/2006/main">
               <a:ext uri="{FF2B5EF4-FFF2-40B4-BE49-F238E27FC236}">
-                <a16:creationId xmlns:a16="http://schemas.microsoft.com/office/drawing/2014/main" id="{A561C9C9-789E-4E49-8832-1C07969582B2}"/>
+                <a16:creationId xmlns:a16="http://schemas.microsoft.com/office/drawing/2014/main" id="{EEB4EC11-3425-4E4B-B094-1FF18CDF5601}"/>
               </a:ext>
             </a:extLst>
           </p:cNvPr>
@@ -14619,7 +15281,7 @@
           <p:cNvPr id="16" name="p03-b-5">
             <a:extLst xmlns:a="http://schemas.openxmlformats.org/drawingml/2006/main">
               <a:ext uri="{FF2B5EF4-FFF2-40B4-BE49-F238E27FC236}">
-                <a16:creationId xmlns:a16="http://schemas.microsoft.com/office/drawing/2014/main" id="{4C08D363-87F2-420C-B553-567EE7F6DD53}"/>
+                <a16:creationId xmlns:a16="http://schemas.microsoft.com/office/drawing/2014/main" id="{5F7BD22E-6C89-45F7-83B2-A13431D79CD2}"/>
               </a:ext>
             </a:extLst>
           </p:cNvPr>
@@ -14676,7 +15338,7 @@
           <p:cNvPr id="17" name="p03-g-5">
             <a:extLst xmlns:a="http://schemas.openxmlformats.org/drawingml/2006/main">
               <a:ext uri="{FF2B5EF4-FFF2-40B4-BE49-F238E27FC236}">
-                <a16:creationId xmlns:a16="http://schemas.microsoft.com/office/drawing/2014/main" id="{1573426E-A6DE-43D3-B306-232D29201016}"/>
+                <a16:creationId xmlns:a16="http://schemas.microsoft.com/office/drawing/2014/main" id="{BF288710-4F09-40A2-8CB5-A64D17FA4499}"/>
               </a:ext>
             </a:extLst>
           </p:cNvPr>
@@ -14733,7 +15395,7 @@
           <p:cNvPr id="18" name="p03-separator">
             <a:extLst xmlns:a="http://schemas.openxmlformats.org/drawingml/2006/main">
               <a:ext uri="{FF2B5EF4-FFF2-40B4-BE49-F238E27FC236}">
-                <a16:creationId xmlns:a16="http://schemas.microsoft.com/office/drawing/2014/main" id="{7B33B442-F0BD-47A3-8131-C50605F79993}"/>
+                <a16:creationId xmlns:a16="http://schemas.microsoft.com/office/drawing/2014/main" id="{94FB244E-35C2-42CE-88A1-2B7AED2D7359}"/>
               </a:ext>
             </a:extLst>
           </p:cNvPr>
@@ -14764,7 +15426,7 @@
           <p:cNvPr id="19" name="p03-output-title">
             <a:extLst xmlns:a="http://schemas.openxmlformats.org/drawingml/2006/main">
               <a:ext uri="{FF2B5EF4-FFF2-40B4-BE49-F238E27FC236}">
-                <a16:creationId xmlns:a16="http://schemas.microsoft.com/office/drawing/2014/main" id="{B90583CC-F12B-4A5D-B1B6-AFCC1F2C27D1}"/>
+                <a16:creationId xmlns:a16="http://schemas.microsoft.com/office/drawing/2014/main" id="{2A705491-1C83-4948-9119-3358EBC0010E}"/>
               </a:ext>
             </a:extLst>
           </p:cNvPr>
@@ -14817,7 +15479,7 @@
           <p:cNvPr id="20" name="p03-output">
             <a:extLst xmlns:a="http://schemas.openxmlformats.org/drawingml/2006/main">
               <a:ext uri="{FF2B5EF4-FFF2-40B4-BE49-F238E27FC236}">
-                <a16:creationId xmlns:a16="http://schemas.microsoft.com/office/drawing/2014/main" id="{41E507B7-7667-4DE3-B520-3AB8E5B5E701}"/>
+                <a16:creationId xmlns:a16="http://schemas.microsoft.com/office/drawing/2014/main" id="{5341C651-C177-43A9-8133-BF8F9C95E7E7}"/>
               </a:ext>
             </a:extLst>
           </p:cNvPr>
@@ -14952,7 +15614,7 @@
           <p:cNvPr id="21" name="p03-minimum">
             <a:extLst xmlns:a="http://schemas.openxmlformats.org/drawingml/2006/main">
               <a:ext uri="{FF2B5EF4-FFF2-40B4-BE49-F238E27FC236}">
-                <a16:creationId xmlns:a16="http://schemas.microsoft.com/office/drawing/2014/main" id="{53842175-DB60-4F91-A5E6-A745BABDE60B}"/>
+                <a16:creationId xmlns:a16="http://schemas.microsoft.com/office/drawing/2014/main" id="{5EC75691-45FE-4A2F-B28F-10FA40EE3B46}"/>
               </a:ext>
             </a:extLst>
           </p:cNvPr>
@@ -15037,7 +15699,7 @@
           <p:cNvPr id="22" name="p03-bottom">
             <a:extLst xmlns:a="http://schemas.openxmlformats.org/drawingml/2006/main">
               <a:ext uri="{FF2B5EF4-FFF2-40B4-BE49-F238E27FC236}">
-                <a16:creationId xmlns:a16="http://schemas.microsoft.com/office/drawing/2014/main" id="{2AB46AA5-D47B-4CE8-BFDA-EC86A48269C6}"/>
+                <a16:creationId xmlns:a16="http://schemas.microsoft.com/office/drawing/2014/main" id="{061D0803-43CD-43DC-8DC9-1FD4F3C40853}"/>
               </a:ext>
             </a:extLst>
           </p:cNvPr>
@@ -15182,7 +15844,7 @@
           <p:cNvPr id="6" name="p04-prediction">
             <a:extLst xmlns:a="http://schemas.openxmlformats.org/drawingml/2006/main">
               <a:ext uri="{FF2B5EF4-FFF2-40B4-BE49-F238E27FC236}">
-                <a16:creationId xmlns:a16="http://schemas.microsoft.com/office/drawing/2014/main" id="{3042F515-29C8-4D13-AC2F-89C268983B26}"/>
+                <a16:creationId xmlns:a16="http://schemas.microsoft.com/office/drawing/2014/main" id="{4421CB9D-1279-419D-80C2-739EE82ADAD1}"/>
               </a:ext>
             </a:extLst>
           </p:cNvPr>
@@ -15267,7 +15929,7 @@
           <p:cNvPr id="7" name="p04-vs">
             <a:extLst xmlns:a="http://schemas.openxmlformats.org/drawingml/2006/main">
               <a:ext uri="{FF2B5EF4-FFF2-40B4-BE49-F238E27FC236}">
-                <a16:creationId xmlns:a16="http://schemas.microsoft.com/office/drawing/2014/main" id="{50CFBF6D-7BBF-4630-85BC-DE69BE4BDDF5}"/>
+                <a16:creationId xmlns:a16="http://schemas.microsoft.com/office/drawing/2014/main" id="{5092210E-1BFE-4006-BC50-73D4D4C5F460}"/>
               </a:ext>
             </a:extLst>
           </p:cNvPr>
@@ -15320,7 +15982,7 @@
           <p:cNvPr id="8" name="p04-mechanism">
             <a:extLst xmlns:a="http://schemas.openxmlformats.org/drawingml/2006/main">
               <a:ext uri="{FF2B5EF4-FFF2-40B4-BE49-F238E27FC236}">
-                <a16:creationId xmlns:a16="http://schemas.microsoft.com/office/drawing/2014/main" id="{2AA72191-2386-45A7-A625-5C2348B1E32F}"/>
+                <a16:creationId xmlns:a16="http://schemas.microsoft.com/office/drawing/2014/main" id="{638C932E-97EE-4607-A40F-6937CA9F0175}"/>
               </a:ext>
             </a:extLst>
           </p:cNvPr>
@@ -15405,7 +16067,7 @@
           <p:cNvPr id="9" name="p04-chain-1">
             <a:extLst xmlns:a="http://schemas.openxmlformats.org/drawingml/2006/main">
               <a:ext uri="{FF2B5EF4-FFF2-40B4-BE49-F238E27FC236}">
-                <a16:creationId xmlns:a16="http://schemas.microsoft.com/office/drawing/2014/main" id="{A8830146-AADD-4F55-B958-67EE863241D7}"/>
+                <a16:creationId xmlns:a16="http://schemas.microsoft.com/office/drawing/2014/main" id="{C8C2D29F-BEC7-4ADE-8012-C66D2B32BA4B}"/>
               </a:ext>
             </a:extLst>
           </p:cNvPr>
@@ -15436,7 +16098,7 @@
           <p:cNvPr id="10" name="p04-chain-2">
             <a:extLst xmlns:a="http://schemas.openxmlformats.org/drawingml/2006/main">
               <a:ext uri="{FF2B5EF4-FFF2-40B4-BE49-F238E27FC236}">
-                <a16:creationId xmlns:a16="http://schemas.microsoft.com/office/drawing/2014/main" id="{24B3F661-A8FB-4234-BE22-820A81388360}"/>
+                <a16:creationId xmlns:a16="http://schemas.microsoft.com/office/drawing/2014/main" id="{4F3C2FCA-8B0B-4F1E-B766-28C12CB22FFA}"/>
               </a:ext>
             </a:extLst>
           </p:cNvPr>
@@ -15467,7 +16129,7 @@
           <p:cNvPr id="11" name="p04-chain-node-0">
             <a:extLst xmlns:a="http://schemas.openxmlformats.org/drawingml/2006/main">
               <a:ext uri="{FF2B5EF4-FFF2-40B4-BE49-F238E27FC236}">
-                <a16:creationId xmlns:a16="http://schemas.microsoft.com/office/drawing/2014/main" id="{4C7C4FA7-AD60-4925-93BF-32E2B2758268}"/>
+                <a16:creationId xmlns:a16="http://schemas.microsoft.com/office/drawing/2014/main" id="{915BF666-4475-45B1-910E-ECEBDB74739A}"/>
               </a:ext>
             </a:extLst>
           </p:cNvPr>
@@ -15528,7 +16190,7 @@
           <p:cNvPr id="12" name="p04-chain-node-1">
             <a:extLst xmlns:a="http://schemas.openxmlformats.org/drawingml/2006/main">
               <a:ext uri="{FF2B5EF4-FFF2-40B4-BE49-F238E27FC236}">
-                <a16:creationId xmlns:a16="http://schemas.microsoft.com/office/drawing/2014/main" id="{4751C260-B980-4823-84F4-5A2F73478093}"/>
+                <a16:creationId xmlns:a16="http://schemas.microsoft.com/office/drawing/2014/main" id="{ED04A867-A8A2-4A0E-8C76-BE8AE890B033}"/>
               </a:ext>
             </a:extLst>
           </p:cNvPr>
@@ -15589,7 +16251,7 @@
           <p:cNvPr id="13" name="p04-chain-node-2">
             <a:extLst xmlns:a="http://schemas.openxmlformats.org/drawingml/2006/main">
               <a:ext uri="{FF2B5EF4-FFF2-40B4-BE49-F238E27FC236}">
-                <a16:creationId xmlns:a16="http://schemas.microsoft.com/office/drawing/2014/main" id="{E213B78E-C155-4527-AD88-19BA739279EF}"/>
+                <a16:creationId xmlns:a16="http://schemas.microsoft.com/office/drawing/2014/main" id="{C6C4ABDE-C6A4-4759-AE57-58DE031AFDC6}"/>
               </a:ext>
             </a:extLst>
           </p:cNvPr>
@@ -15650,7 +16312,7 @@
           <p:cNvPr id="14" name="p04-e-label-0">
             <a:extLst xmlns:a="http://schemas.openxmlformats.org/drawingml/2006/main">
               <a:ext uri="{FF2B5EF4-FFF2-40B4-BE49-F238E27FC236}">
-                <a16:creationId xmlns:a16="http://schemas.microsoft.com/office/drawing/2014/main" id="{918AA731-24CB-4678-82C3-B7583F678251}"/>
+                <a16:creationId xmlns:a16="http://schemas.microsoft.com/office/drawing/2014/main" id="{1B8BF499-0560-45EE-B42B-6D0DFAD9AB4B}"/>
               </a:ext>
             </a:extLst>
           </p:cNvPr>
@@ -15707,7 +16369,7 @@
           <p:cNvPr id="15" name="p04-e-detail-0">
             <a:extLst xmlns:a="http://schemas.openxmlformats.org/drawingml/2006/main">
               <a:ext uri="{FF2B5EF4-FFF2-40B4-BE49-F238E27FC236}">
-                <a16:creationId xmlns:a16="http://schemas.microsoft.com/office/drawing/2014/main" id="{590F2152-11FC-448C-92CE-6850F413C263}"/>
+                <a16:creationId xmlns:a16="http://schemas.microsoft.com/office/drawing/2014/main" id="{185783D9-3D0B-4B10-9445-E9D43404E397}"/>
               </a:ext>
             </a:extLst>
           </p:cNvPr>
@@ -15762,7 +16424,7 @@
           <p:cNvPr id="16" name="p04-e-label-1">
             <a:extLst xmlns:a="http://schemas.openxmlformats.org/drawingml/2006/main">
               <a:ext uri="{FF2B5EF4-FFF2-40B4-BE49-F238E27FC236}">
-                <a16:creationId xmlns:a16="http://schemas.microsoft.com/office/drawing/2014/main" id="{E8B2694D-93FA-4568-9869-4DB7F6D78BDB}"/>
+                <a16:creationId xmlns:a16="http://schemas.microsoft.com/office/drawing/2014/main" id="{9327BDEE-EF42-43BA-AF38-0521A1461310}"/>
               </a:ext>
             </a:extLst>
           </p:cNvPr>
@@ -15819,7 +16481,7 @@
           <p:cNvPr id="17" name="p04-e-detail-1">
             <a:extLst xmlns:a="http://schemas.openxmlformats.org/drawingml/2006/main">
               <a:ext uri="{FF2B5EF4-FFF2-40B4-BE49-F238E27FC236}">
-                <a16:creationId xmlns:a16="http://schemas.microsoft.com/office/drawing/2014/main" id="{1B5970F8-32B2-4A51-8F1E-CD2D04EFFCCC}"/>
+                <a16:creationId xmlns:a16="http://schemas.microsoft.com/office/drawing/2014/main" id="{3DF0CB63-9393-403A-BA8A-ECE44EFCE4C5}"/>
               </a:ext>
             </a:extLst>
           </p:cNvPr>
@@ -15874,7 +16536,7 @@
           <p:cNvPr id="18" name="p04-e-label-2">
             <a:extLst xmlns:a="http://schemas.openxmlformats.org/drawingml/2006/main">
               <a:ext uri="{FF2B5EF4-FFF2-40B4-BE49-F238E27FC236}">
-                <a16:creationId xmlns:a16="http://schemas.microsoft.com/office/drawing/2014/main" id="{808DFA04-7EB9-46A1-8752-E055340A827E}"/>
+                <a16:creationId xmlns:a16="http://schemas.microsoft.com/office/drawing/2014/main" id="{C20EAD3C-55DB-439A-B7C6-40E0CB84C86F}"/>
               </a:ext>
             </a:extLst>
           </p:cNvPr>
@@ -15931,7 +16593,7 @@
           <p:cNvPr id="19" name="p04-e-detail-2">
             <a:extLst xmlns:a="http://schemas.openxmlformats.org/drawingml/2006/main">
               <a:ext uri="{FF2B5EF4-FFF2-40B4-BE49-F238E27FC236}">
-                <a16:creationId xmlns:a16="http://schemas.microsoft.com/office/drawing/2014/main" id="{E72201EA-3B88-4194-9103-E085D41C80C2}"/>
+                <a16:creationId xmlns:a16="http://schemas.microsoft.com/office/drawing/2014/main" id="{982344F9-CBFF-4C42-AC23-04643497A197}"/>
               </a:ext>
             </a:extLst>
           </p:cNvPr>
@@ -15986,7 +16648,7 @@
           <p:cNvPr id="20" name="p04-e-label-3">
             <a:extLst xmlns:a="http://schemas.openxmlformats.org/drawingml/2006/main">
               <a:ext uri="{FF2B5EF4-FFF2-40B4-BE49-F238E27FC236}">
-                <a16:creationId xmlns:a16="http://schemas.microsoft.com/office/drawing/2014/main" id="{1208DD4D-5E20-451D-B56E-2D80F6BD17C0}"/>
+                <a16:creationId xmlns:a16="http://schemas.microsoft.com/office/drawing/2014/main" id="{36771B13-DF26-485B-A559-DF7645AB6673}"/>
               </a:ext>
             </a:extLst>
           </p:cNvPr>
@@ -16043,7 +16705,7 @@
           <p:cNvPr id="21" name="p04-e-detail-3">
             <a:extLst xmlns:a="http://schemas.openxmlformats.org/drawingml/2006/main">
               <a:ext uri="{FF2B5EF4-FFF2-40B4-BE49-F238E27FC236}">
-                <a16:creationId xmlns:a16="http://schemas.microsoft.com/office/drawing/2014/main" id="{88ED7405-B4FC-44C2-83AC-8645D6633F32}"/>
+                <a16:creationId xmlns:a16="http://schemas.microsoft.com/office/drawing/2014/main" id="{9FB24594-5DEA-4CA3-8BCD-387B6D72F80F}"/>
               </a:ext>
             </a:extLst>
           </p:cNvPr>
@@ -16098,7 +16760,7 @@
           <p:cNvPr id="22" name="p04-errors">
             <a:extLst xmlns:a="http://schemas.openxmlformats.org/drawingml/2006/main">
               <a:ext uri="{FF2B5EF4-FFF2-40B4-BE49-F238E27FC236}">
-                <a16:creationId xmlns:a16="http://schemas.microsoft.com/office/drawing/2014/main" id="{FCD54E59-C628-4006-9E7D-AB5140B9F5C1}"/>
+                <a16:creationId xmlns:a16="http://schemas.microsoft.com/office/drawing/2014/main" id="{BCAF08E7-2521-42D9-B9E0-B42696D25D2B}"/>
               </a:ext>
             </a:extLst>
           </p:cNvPr>
@@ -16245,7 +16907,7 @@
           <p:cNvPr id="6" name="p05-line-left">
             <a:extLst xmlns:a="http://schemas.openxmlformats.org/drawingml/2006/main">
               <a:ext uri="{FF2B5EF4-FFF2-40B4-BE49-F238E27FC236}">
-                <a16:creationId xmlns:a16="http://schemas.microsoft.com/office/drawing/2014/main" id="{000E2B0F-8B2F-451F-AB2B-1FCF371021B6}"/>
+                <a16:creationId xmlns:a16="http://schemas.microsoft.com/office/drawing/2014/main" id="{A967A197-B1E6-466C-9D2A-003CFCC0E261}"/>
               </a:ext>
             </a:extLst>
           </p:cNvPr>
@@ -16276,7 +16938,7 @@
           <p:cNvPr id="7" name="p05-line-mid">
             <a:extLst xmlns:a="http://schemas.openxmlformats.org/drawingml/2006/main">
               <a:ext uri="{FF2B5EF4-FFF2-40B4-BE49-F238E27FC236}">
-                <a16:creationId xmlns:a16="http://schemas.microsoft.com/office/drawing/2014/main" id="{8C4331B7-7572-4640-AA6C-462EB0D72FD7}"/>
+                <a16:creationId xmlns:a16="http://schemas.microsoft.com/office/drawing/2014/main" id="{C3B35104-8B39-4099-B78D-9F7020B89BCC}"/>
               </a:ext>
             </a:extLst>
           </p:cNvPr>
@@ -16307,7 +16969,7 @@
           <p:cNvPr id="8" name="p05-line-right">
             <a:extLst xmlns:a="http://schemas.openxmlformats.org/drawingml/2006/main">
               <a:ext uri="{FF2B5EF4-FFF2-40B4-BE49-F238E27FC236}">
-                <a16:creationId xmlns:a16="http://schemas.microsoft.com/office/drawing/2014/main" id="{CDB32367-2FB7-4B1F-89AE-AA82670DDDF3}"/>
+                <a16:creationId xmlns:a16="http://schemas.microsoft.com/office/drawing/2014/main" id="{8FB71920-34F3-41F8-B299-31F50758E48A}"/>
               </a:ext>
             </a:extLst>
           </p:cNvPr>
@@ -16338,7 +17000,7 @@
           <p:cNvPr id="9" name="p05-main">
             <a:extLst xmlns:a="http://schemas.openxmlformats.org/drawingml/2006/main">
               <a:ext uri="{FF2B5EF4-FFF2-40B4-BE49-F238E27FC236}">
-                <a16:creationId xmlns:a16="http://schemas.microsoft.com/office/drawing/2014/main" id="{86C5AF43-B655-4CAD-A914-1B74DBACC0E1}"/>
+                <a16:creationId xmlns:a16="http://schemas.microsoft.com/office/drawing/2014/main" id="{7F30557D-F84D-4ABF-9634-09289DCF3E0B}"/>
               </a:ext>
             </a:extLst>
           </p:cNvPr>
@@ -16423,7 +17085,7 @@
           <p:cNvPr id="10" name="p05-alt-0">
             <a:extLst xmlns:a="http://schemas.openxmlformats.org/drawingml/2006/main">
               <a:ext uri="{FF2B5EF4-FFF2-40B4-BE49-F238E27FC236}">
-                <a16:creationId xmlns:a16="http://schemas.microsoft.com/office/drawing/2014/main" id="{15C2C6FF-19EF-4CC3-AF79-D5C6C6D7C277}"/>
+                <a16:creationId xmlns:a16="http://schemas.microsoft.com/office/drawing/2014/main" id="{B72971EB-AFAD-49E4-86C6-911FA2AD2E36}"/>
               </a:ext>
             </a:extLst>
           </p:cNvPr>
@@ -16508,7 +17170,7 @@
           <p:cNvPr id="11" name="p05-alt-1">
             <a:extLst xmlns:a="http://schemas.openxmlformats.org/drawingml/2006/main">
               <a:ext uri="{FF2B5EF4-FFF2-40B4-BE49-F238E27FC236}">
-                <a16:creationId xmlns:a16="http://schemas.microsoft.com/office/drawing/2014/main" id="{AB012EDC-56DB-4FB1-A44F-E274E3F3EB78}"/>
+                <a16:creationId xmlns:a16="http://schemas.microsoft.com/office/drawing/2014/main" id="{2C83B35A-FA75-4435-A906-5C1FB9013419}"/>
               </a:ext>
             </a:extLst>
           </p:cNvPr>
@@ -16593,7 +17255,7 @@
           <p:cNvPr id="12" name="p05-alt-2">
             <a:extLst xmlns:a="http://schemas.openxmlformats.org/drawingml/2006/main">
               <a:ext uri="{FF2B5EF4-FFF2-40B4-BE49-F238E27FC236}">
-                <a16:creationId xmlns:a16="http://schemas.microsoft.com/office/drawing/2014/main" id="{A3C4157B-42C5-488A-8554-DF59AB34E5FA}"/>
+                <a16:creationId xmlns:a16="http://schemas.microsoft.com/office/drawing/2014/main" id="{1A6C4AD4-D98D-43CF-9962-CF348B1116E2}"/>
               </a:ext>
             </a:extLst>
           </p:cNvPr>
@@ -16678,7 +17340,7 @@
           <p:cNvPr id="13" name="p05-definition">
             <a:extLst xmlns:a="http://schemas.openxmlformats.org/drawingml/2006/main">
               <a:ext uri="{FF2B5EF4-FFF2-40B4-BE49-F238E27FC236}">
-                <a16:creationId xmlns:a16="http://schemas.microsoft.com/office/drawing/2014/main" id="{2E3D1B62-9441-4D0B-B4B2-D465F7DB3A3C}"/>
+                <a16:creationId xmlns:a16="http://schemas.microsoft.com/office/drawing/2014/main" id="{352F30F5-00B6-4B24-90E2-0957CE85E079}"/>
               </a:ext>
             </a:extLst>
           </p:cNvPr>
@@ -16731,7 +17393,7 @@
           <p:cNvPr id="14" name="p05-eliminate">
             <a:extLst xmlns:a="http://schemas.openxmlformats.org/drawingml/2006/main">
               <a:ext uri="{FF2B5EF4-FFF2-40B4-BE49-F238E27FC236}">
-                <a16:creationId xmlns:a16="http://schemas.microsoft.com/office/drawing/2014/main" id="{B3ECC80A-358F-4CEE-BFD4-1CEDFA37F37F}"/>
+                <a16:creationId xmlns:a16="http://schemas.microsoft.com/office/drawing/2014/main" id="{B6F4DCAE-D416-43CB-95EF-C2FA39D68C49}"/>
               </a:ext>
             </a:extLst>
           </p:cNvPr>
@@ -16878,7 +17540,7 @@
           <p:cNvPr id="6" name="p06-label-0">
             <a:extLst xmlns:a="http://schemas.openxmlformats.org/drawingml/2006/main">
               <a:ext uri="{FF2B5EF4-FFF2-40B4-BE49-F238E27FC236}">
-                <a16:creationId xmlns:a16="http://schemas.microsoft.com/office/drawing/2014/main" id="{659BA608-45B4-4963-9763-23021EA63E62}"/>
+                <a16:creationId xmlns:a16="http://schemas.microsoft.com/office/drawing/2014/main" id="{AA449146-61C4-42B3-9CE7-317CFE0CF11A}"/>
               </a:ext>
             </a:extLst>
           </p:cNvPr>
@@ -16935,7 +17597,7 @@
           <p:cNvPr id="7" name="p06-type-0">
             <a:extLst xmlns:a="http://schemas.openxmlformats.org/drawingml/2006/main">
               <a:ext uri="{FF2B5EF4-FFF2-40B4-BE49-F238E27FC236}">
-                <a16:creationId xmlns:a16="http://schemas.microsoft.com/office/drawing/2014/main" id="{EA7BE4C3-1D8A-4F99-B915-9D33EFA364F2}"/>
+                <a16:creationId xmlns:a16="http://schemas.microsoft.com/office/drawing/2014/main" id="{E5287E12-4F03-4196-B687-07B21AA49F12}"/>
               </a:ext>
             </a:extLst>
           </p:cNvPr>
@@ -17020,7 +17682,7 @@
           <p:cNvPr id="8" name="p06-label-1">
             <a:extLst xmlns:a="http://schemas.openxmlformats.org/drawingml/2006/main">
               <a:ext uri="{FF2B5EF4-FFF2-40B4-BE49-F238E27FC236}">
-                <a16:creationId xmlns:a16="http://schemas.microsoft.com/office/drawing/2014/main" id="{C3710B53-BA99-498D-AAE7-478EDC939FDA}"/>
+                <a16:creationId xmlns:a16="http://schemas.microsoft.com/office/drawing/2014/main" id="{8F4AC14F-F49D-4E65-96A4-1FA756B5ABA1}"/>
               </a:ext>
             </a:extLst>
           </p:cNvPr>
@@ -17077,7 +17739,7 @@
           <p:cNvPr id="9" name="p06-type-1">
             <a:extLst xmlns:a="http://schemas.openxmlformats.org/drawingml/2006/main">
               <a:ext uri="{FF2B5EF4-FFF2-40B4-BE49-F238E27FC236}">
-                <a16:creationId xmlns:a16="http://schemas.microsoft.com/office/drawing/2014/main" id="{87866E89-21AB-4E2A-ACD1-F527C07D695B}"/>
+                <a16:creationId xmlns:a16="http://schemas.microsoft.com/office/drawing/2014/main" id="{85DC6236-9D4D-41F0-8482-3D3905CE0AB1}"/>
               </a:ext>
             </a:extLst>
           </p:cNvPr>
@@ -17162,7 +17824,7 @@
           <p:cNvPr id="10" name="p06-label-2">
             <a:extLst xmlns:a="http://schemas.openxmlformats.org/drawingml/2006/main">
               <a:ext uri="{FF2B5EF4-FFF2-40B4-BE49-F238E27FC236}">
-                <a16:creationId xmlns:a16="http://schemas.microsoft.com/office/drawing/2014/main" id="{31E8EA87-7AA2-4527-BD40-9E874B2BB6C5}"/>
+                <a16:creationId xmlns:a16="http://schemas.microsoft.com/office/drawing/2014/main" id="{88353CF2-FA3D-40A7-A832-17EBE2020457}"/>
               </a:ext>
             </a:extLst>
           </p:cNvPr>
@@ -17219,7 +17881,7 @@
           <p:cNvPr id="11" name="p06-type-2">
             <a:extLst xmlns:a="http://schemas.openxmlformats.org/drawingml/2006/main">
               <a:ext uri="{FF2B5EF4-FFF2-40B4-BE49-F238E27FC236}">
-                <a16:creationId xmlns:a16="http://schemas.microsoft.com/office/drawing/2014/main" id="{DBE56C9B-140A-4412-9732-D2189BB98D33}"/>
+                <a16:creationId xmlns:a16="http://schemas.microsoft.com/office/drawing/2014/main" id="{3341308B-FFCE-4361-BF73-1E0FC4C6B82D}"/>
               </a:ext>
             </a:extLst>
           </p:cNvPr>
@@ -17304,7 +17966,7 @@
           <p:cNvPr id="12" name="p06-label-3">
             <a:extLst xmlns:a="http://schemas.openxmlformats.org/drawingml/2006/main">
               <a:ext uri="{FF2B5EF4-FFF2-40B4-BE49-F238E27FC236}">
-                <a16:creationId xmlns:a16="http://schemas.microsoft.com/office/drawing/2014/main" id="{DEF41612-53C4-4B36-B789-D6C15297947F}"/>
+                <a16:creationId xmlns:a16="http://schemas.microsoft.com/office/drawing/2014/main" id="{33D5D608-7782-4A9C-8559-804CB646B5FA}"/>
               </a:ext>
             </a:extLst>
           </p:cNvPr>
@@ -17361,7 +18023,7 @@
           <p:cNvPr id="13" name="p06-type-3">
             <a:extLst xmlns:a="http://schemas.openxmlformats.org/drawingml/2006/main">
               <a:ext uri="{FF2B5EF4-FFF2-40B4-BE49-F238E27FC236}">
-                <a16:creationId xmlns:a16="http://schemas.microsoft.com/office/drawing/2014/main" id="{F03539C8-56AD-4868-863E-930B723CDF71}"/>
+                <a16:creationId xmlns:a16="http://schemas.microsoft.com/office/drawing/2014/main" id="{4FEAE699-4ED3-4489-A722-EC637F40FF24}"/>
               </a:ext>
             </a:extLst>
           </p:cNvPr>
@@ -17446,7 +18108,7 @@
           <p:cNvPr id="14" name="p06-record-title">
             <a:extLst xmlns:a="http://schemas.openxmlformats.org/drawingml/2006/main">
               <a:ext uri="{FF2B5EF4-FFF2-40B4-BE49-F238E27FC236}">
-                <a16:creationId xmlns:a16="http://schemas.microsoft.com/office/drawing/2014/main" id="{C1C39C5D-58CA-4AF2-B6A7-5035DDE242FB}"/>
+                <a16:creationId xmlns:a16="http://schemas.microsoft.com/office/drawing/2014/main" id="{CF0230F6-23E2-4C79-91DC-E28F03F6DBF2}"/>
               </a:ext>
             </a:extLst>
           </p:cNvPr>
@@ -17499,7 +18161,7 @@
           <p:cNvPr id="15" name="p06-field-label-0">
             <a:extLst xmlns:a="http://schemas.openxmlformats.org/drawingml/2006/main">
               <a:ext uri="{FF2B5EF4-FFF2-40B4-BE49-F238E27FC236}">
-                <a16:creationId xmlns:a16="http://schemas.microsoft.com/office/drawing/2014/main" id="{86791027-0ADD-4346-8A3D-5479E93E31F5}"/>
+                <a16:creationId xmlns:a16="http://schemas.microsoft.com/office/drawing/2014/main" id="{B47B7DEE-06C6-4029-80F6-ADD91AF4A4E2}"/>
               </a:ext>
             </a:extLst>
           </p:cNvPr>
@@ -17556,7 +18218,7 @@
           <p:cNvPr id="16" name="p06-field-detail-0">
             <a:extLst xmlns:a="http://schemas.openxmlformats.org/drawingml/2006/main">
               <a:ext uri="{FF2B5EF4-FFF2-40B4-BE49-F238E27FC236}">
-                <a16:creationId xmlns:a16="http://schemas.microsoft.com/office/drawing/2014/main" id="{B0C497C0-B0B9-4218-9033-D201CB550D0F}"/>
+                <a16:creationId xmlns:a16="http://schemas.microsoft.com/office/drawing/2014/main" id="{4C204850-4A61-41CB-A505-58AA6A2D975A}"/>
               </a:ext>
             </a:extLst>
           </p:cNvPr>
@@ -17611,7 +18273,7 @@
           <p:cNvPr id="17" name="p06-field-label-1">
             <a:extLst xmlns:a="http://schemas.openxmlformats.org/drawingml/2006/main">
               <a:ext uri="{FF2B5EF4-FFF2-40B4-BE49-F238E27FC236}">
-                <a16:creationId xmlns:a16="http://schemas.microsoft.com/office/drawing/2014/main" id="{2D0A2B68-43F3-40DD-BC6A-F585835A36F5}"/>
+                <a16:creationId xmlns:a16="http://schemas.microsoft.com/office/drawing/2014/main" id="{04C8D8AC-F3FA-4D2C-BE96-509D5D596C1D}"/>
               </a:ext>
             </a:extLst>
           </p:cNvPr>
@@ -17668,7 +18330,7 @@
           <p:cNvPr id="18" name="p06-field-detail-1">
             <a:extLst xmlns:a="http://schemas.openxmlformats.org/drawingml/2006/main">
               <a:ext uri="{FF2B5EF4-FFF2-40B4-BE49-F238E27FC236}">
-                <a16:creationId xmlns:a16="http://schemas.microsoft.com/office/drawing/2014/main" id="{A89C68CE-DEDA-4032-8D4E-578B3A3C2C74}"/>
+                <a16:creationId xmlns:a16="http://schemas.microsoft.com/office/drawing/2014/main" id="{A99D71EC-53EC-4911-9201-B2B157D61812}"/>
               </a:ext>
             </a:extLst>
           </p:cNvPr>
@@ -17723,7 +18385,7 @@
           <p:cNvPr id="19" name="p06-field-label-2">
             <a:extLst xmlns:a="http://schemas.openxmlformats.org/drawingml/2006/main">
               <a:ext uri="{FF2B5EF4-FFF2-40B4-BE49-F238E27FC236}">
-                <a16:creationId xmlns:a16="http://schemas.microsoft.com/office/drawing/2014/main" id="{8EFA8B0E-1EF4-4797-90D1-A8554270A660}"/>
+                <a16:creationId xmlns:a16="http://schemas.microsoft.com/office/drawing/2014/main" id="{AEE17FCC-9C28-4A40-85FD-20912E2E5B4C}"/>
               </a:ext>
             </a:extLst>
           </p:cNvPr>
@@ -17780,7 +18442,7 @@
           <p:cNvPr id="20" name="p06-field-detail-2">
             <a:extLst xmlns:a="http://schemas.openxmlformats.org/drawingml/2006/main">
               <a:ext uri="{FF2B5EF4-FFF2-40B4-BE49-F238E27FC236}">
-                <a16:creationId xmlns:a16="http://schemas.microsoft.com/office/drawing/2014/main" id="{0CDE363D-E5E1-4559-A295-E35E287E6F90}"/>
+                <a16:creationId xmlns:a16="http://schemas.microsoft.com/office/drawing/2014/main" id="{A7C0E4D7-49A6-4CCD-8E11-5885C6768A2B}"/>
               </a:ext>
             </a:extLst>
           </p:cNvPr>
@@ -17835,7 +18497,7 @@
           <p:cNvPr id="21" name="p06-field-label-3">
             <a:extLst xmlns:a="http://schemas.openxmlformats.org/drawingml/2006/main">
               <a:ext uri="{FF2B5EF4-FFF2-40B4-BE49-F238E27FC236}">
-                <a16:creationId xmlns:a16="http://schemas.microsoft.com/office/drawing/2014/main" id="{F0A125E0-03B6-48BB-B54D-40FC72A9B784}"/>
+                <a16:creationId xmlns:a16="http://schemas.microsoft.com/office/drawing/2014/main" id="{BDAFE85B-F958-4748-B341-DE1914CCC8B9}"/>
               </a:ext>
             </a:extLst>
           </p:cNvPr>
@@ -17892,7 +18554,7 @@
           <p:cNvPr id="22" name="p06-field-detail-3">
             <a:extLst xmlns:a="http://schemas.openxmlformats.org/drawingml/2006/main">
               <a:ext uri="{FF2B5EF4-FFF2-40B4-BE49-F238E27FC236}">
-                <a16:creationId xmlns:a16="http://schemas.microsoft.com/office/drawing/2014/main" id="{1A92FD36-5DCA-4E90-B399-DBB758E86752}"/>
+                <a16:creationId xmlns:a16="http://schemas.microsoft.com/office/drawing/2014/main" id="{DCB3CFE4-496D-4A6C-880C-2B670B7D1422}"/>
               </a:ext>
             </a:extLst>
           </p:cNvPr>
@@ -17947,7 +18609,7 @@
           <p:cNvPr id="23" name="p06-field-label-4">
             <a:extLst xmlns:a="http://schemas.openxmlformats.org/drawingml/2006/main">
               <a:ext uri="{FF2B5EF4-FFF2-40B4-BE49-F238E27FC236}">
-                <a16:creationId xmlns:a16="http://schemas.microsoft.com/office/drawing/2014/main" id="{1FE3005C-1CEA-4892-B458-8A1870A0A030}"/>
+                <a16:creationId xmlns:a16="http://schemas.microsoft.com/office/drawing/2014/main" id="{FBD937DA-F075-4A9F-AE8E-6FF5C1493AD3}"/>
               </a:ext>
             </a:extLst>
           </p:cNvPr>
@@ -18004,7 +18666,7 @@
           <p:cNvPr id="24" name="p06-field-detail-4">
             <a:extLst xmlns:a="http://schemas.openxmlformats.org/drawingml/2006/main">
               <a:ext uri="{FF2B5EF4-FFF2-40B4-BE49-F238E27FC236}">
-                <a16:creationId xmlns:a16="http://schemas.microsoft.com/office/drawing/2014/main" id="{18257D87-FD7E-445D-A8C7-77039CAEA23E}"/>
+                <a16:creationId xmlns:a16="http://schemas.microsoft.com/office/drawing/2014/main" id="{E1E547B4-27EC-4EC4-9B32-0F0B3D6F3169}"/>
               </a:ext>
             </a:extLst>
           </p:cNvPr>
@@ -18059,7 +18721,7 @@
           <p:cNvPr id="25" name="p06-field-label-5">
             <a:extLst xmlns:a="http://schemas.openxmlformats.org/drawingml/2006/main">
               <a:ext uri="{FF2B5EF4-FFF2-40B4-BE49-F238E27FC236}">
-                <a16:creationId xmlns:a16="http://schemas.microsoft.com/office/drawing/2014/main" id="{B37C9B62-0732-476B-8E90-562709901B06}"/>
+                <a16:creationId xmlns:a16="http://schemas.microsoft.com/office/drawing/2014/main" id="{06A16F18-DBBD-4E45-96DA-7F7C92690A69}"/>
               </a:ext>
             </a:extLst>
           </p:cNvPr>
@@ -18116,7 +18778,7 @@
           <p:cNvPr id="26" name="p06-field-detail-5">
             <a:extLst xmlns:a="http://schemas.openxmlformats.org/drawingml/2006/main">
               <a:ext uri="{FF2B5EF4-FFF2-40B4-BE49-F238E27FC236}">
-                <a16:creationId xmlns:a16="http://schemas.microsoft.com/office/drawing/2014/main" id="{73D6C459-FB8E-4602-9164-C29C71F5A70E}"/>
+                <a16:creationId xmlns:a16="http://schemas.microsoft.com/office/drawing/2014/main" id="{8241C734-5CB2-419C-9C87-B64504CE37F9}"/>
               </a:ext>
             </a:extLst>
           </p:cNvPr>
@@ -18171,7 +18833,7 @@
           <p:cNvPr id="27" name="p06-bottom">
             <a:extLst xmlns:a="http://schemas.openxmlformats.org/drawingml/2006/main">
               <a:ext uri="{FF2B5EF4-FFF2-40B4-BE49-F238E27FC236}">
-                <a16:creationId xmlns:a16="http://schemas.microsoft.com/office/drawing/2014/main" id="{A65A45B1-5A71-43BE-B1C0-FCF64E459012}"/>
+                <a16:creationId xmlns:a16="http://schemas.microsoft.com/office/drawing/2014/main" id="{F8F4D1E3-5400-4B9C-88F5-DD203C153E6E}"/>
               </a:ext>
             </a:extLst>
           </p:cNvPr>
@@ -18316,7 +18978,7 @@
           <p:cNvPr id="6" name="p07-a">
             <a:extLst xmlns:a="http://schemas.openxmlformats.org/drawingml/2006/main">
               <a:ext uri="{FF2B5EF4-FFF2-40B4-BE49-F238E27FC236}">
-                <a16:creationId xmlns:a16="http://schemas.microsoft.com/office/drawing/2014/main" id="{FEE05B5F-E096-4500-9B4D-EB80E27F577F}"/>
+                <a16:creationId xmlns:a16="http://schemas.microsoft.com/office/drawing/2014/main" id="{D2475B76-9E6A-4567-9901-5D9F3E15063C}"/>
               </a:ext>
             </a:extLst>
           </p:cNvPr>
@@ -18425,7 +19087,7 @@
           <p:cNvPr id="7" name="p07-b">
             <a:extLst xmlns:a="http://schemas.openxmlformats.org/drawingml/2006/main">
               <a:ext uri="{FF2B5EF4-FFF2-40B4-BE49-F238E27FC236}">
-                <a16:creationId xmlns:a16="http://schemas.microsoft.com/office/drawing/2014/main" id="{5960EACA-C262-4083-AD2C-B7C0EE0A3043}"/>
+                <a16:creationId xmlns:a16="http://schemas.microsoft.com/office/drawing/2014/main" id="{6DCF54C0-6FC2-4C97-90DE-48938A7475B0}"/>
               </a:ext>
             </a:extLst>
           </p:cNvPr>
@@ -18534,7 +19196,7 @@
           <p:cNvPr id="8" name="p07-a-risk">
             <a:extLst xmlns:a="http://schemas.openxmlformats.org/drawingml/2006/main">
               <a:ext uri="{FF2B5EF4-FFF2-40B4-BE49-F238E27FC236}">
-                <a16:creationId xmlns:a16="http://schemas.microsoft.com/office/drawing/2014/main" id="{0C8031C5-F083-4BD0-BEC6-ECCD6D9704DA}"/>
+                <a16:creationId xmlns:a16="http://schemas.microsoft.com/office/drawing/2014/main" id="{F9E8432A-937E-4495-8EE6-5CEDC51267A4}"/>
               </a:ext>
             </a:extLst>
           </p:cNvPr>
@@ -18615,7 +19277,7 @@
           <p:cNvPr id="9" name="p07-b-risk">
             <a:extLst xmlns:a="http://schemas.openxmlformats.org/drawingml/2006/main">
               <a:ext uri="{FF2B5EF4-FFF2-40B4-BE49-F238E27FC236}">
-                <a16:creationId xmlns:a16="http://schemas.microsoft.com/office/drawing/2014/main" id="{CCB531E1-5077-4233-9374-91CF64C432EB}"/>
+                <a16:creationId xmlns:a16="http://schemas.microsoft.com/office/drawing/2014/main" id="{CD9B0246-8125-4AEE-8008-E3527D3C5A67}"/>
               </a:ext>
             </a:extLst>
           </p:cNvPr>
@@ -18696,7 +19358,7 @@
           <p:cNvPr id="10" name="p07-compare-title">
             <a:extLst xmlns:a="http://schemas.openxmlformats.org/drawingml/2006/main">
               <a:ext uri="{FF2B5EF4-FFF2-40B4-BE49-F238E27FC236}">
-                <a16:creationId xmlns:a16="http://schemas.microsoft.com/office/drawing/2014/main" id="{628DD533-56AD-44D6-852E-7CDFDF8AAD0D}"/>
+                <a16:creationId xmlns:a16="http://schemas.microsoft.com/office/drawing/2014/main" id="{274C4650-A991-4D0D-9743-726365FF6CC1}"/>
               </a:ext>
             </a:extLst>
           </p:cNvPr>
@@ -18749,7 +19411,7 @@
           <p:cNvPr id="11" name="p07-dim-0">
             <a:extLst xmlns:a="http://schemas.openxmlformats.org/drawingml/2006/main">
               <a:ext uri="{FF2B5EF4-FFF2-40B4-BE49-F238E27FC236}">
-                <a16:creationId xmlns:a16="http://schemas.microsoft.com/office/drawing/2014/main" id="{AD847F2D-AE83-4F41-B53A-0BA30AEA50E9}"/>
+                <a16:creationId xmlns:a16="http://schemas.microsoft.com/office/drawing/2014/main" id="{7AC38484-E8BD-4EBA-9424-F2B0494288D6}"/>
               </a:ext>
             </a:extLst>
           </p:cNvPr>
@@ -18810,7 +19472,7 @@
           <p:cNvPr id="12" name="p07-dim-1">
             <a:extLst xmlns:a="http://schemas.openxmlformats.org/drawingml/2006/main">
               <a:ext uri="{FF2B5EF4-FFF2-40B4-BE49-F238E27FC236}">
-                <a16:creationId xmlns:a16="http://schemas.microsoft.com/office/drawing/2014/main" id="{F87077EC-F219-4CF9-A69C-F959026C97D7}"/>
+                <a16:creationId xmlns:a16="http://schemas.microsoft.com/office/drawing/2014/main" id="{5B767EDE-EA33-475F-8555-4818E0194CE3}"/>
               </a:ext>
             </a:extLst>
           </p:cNvPr>
@@ -18871,7 +19533,7 @@
           <p:cNvPr id="13" name="p07-dim-2">
             <a:extLst xmlns:a="http://schemas.openxmlformats.org/drawingml/2006/main">
               <a:ext uri="{FF2B5EF4-FFF2-40B4-BE49-F238E27FC236}">
-                <a16:creationId xmlns:a16="http://schemas.microsoft.com/office/drawing/2014/main" id="{F97AD7C1-1139-4695-AF2E-DB921494856C}"/>
+                <a16:creationId xmlns:a16="http://schemas.microsoft.com/office/drawing/2014/main" id="{51CDF446-8948-4561-BB3C-3FEFB5D5B9D9}"/>
               </a:ext>
             </a:extLst>
           </p:cNvPr>
@@ -18932,7 +19594,7 @@
           <p:cNvPr id="14" name="p07-dim-3">
             <a:extLst xmlns:a="http://schemas.openxmlformats.org/drawingml/2006/main">
               <a:ext uri="{FF2B5EF4-FFF2-40B4-BE49-F238E27FC236}">
-                <a16:creationId xmlns:a16="http://schemas.microsoft.com/office/drawing/2014/main" id="{C403BC37-EB2F-43D7-BA50-F1327C891520}"/>
+                <a16:creationId xmlns:a16="http://schemas.microsoft.com/office/drawing/2014/main" id="{543D2465-EE32-4CE3-B86C-295530D284D3}"/>
               </a:ext>
             </a:extLst>
           </p:cNvPr>
@@ -18993,7 +19655,7 @@
           <p:cNvPr id="15" name="p07-dim-4">
             <a:extLst xmlns:a="http://schemas.openxmlformats.org/drawingml/2006/main">
               <a:ext uri="{FF2B5EF4-FFF2-40B4-BE49-F238E27FC236}">
-                <a16:creationId xmlns:a16="http://schemas.microsoft.com/office/drawing/2014/main" id="{BA1AA54B-BCE5-44EE-8CCE-FFBCC926924A}"/>
+                <a16:creationId xmlns:a16="http://schemas.microsoft.com/office/drawing/2014/main" id="{29931DD7-5D1D-4BE6-9DCB-F0F9E73EA7DE}"/>
               </a:ext>
             </a:extLst>
           </p:cNvPr>
@@ -19054,7 +19716,7 @@
           <p:cNvPr id="16" name="p07-decision">
             <a:extLst xmlns:a="http://schemas.openxmlformats.org/drawingml/2006/main">
               <a:ext uri="{FF2B5EF4-FFF2-40B4-BE49-F238E27FC236}">
-                <a16:creationId xmlns:a16="http://schemas.microsoft.com/office/drawing/2014/main" id="{0F615710-E14D-4FAD-B22F-E94AD7369A26}"/>
+                <a16:creationId xmlns:a16="http://schemas.microsoft.com/office/drawing/2014/main" id="{59CDD56B-C70A-4911-AFE1-775B773C59FD}"/>
               </a:ext>
             </a:extLst>
           </p:cNvPr>
@@ -19199,7 +19861,7 @@
           <p:cNvPr id="6" name="p08-h-0">
             <a:extLst xmlns:a="http://schemas.openxmlformats.org/drawingml/2006/main">
               <a:ext uri="{FF2B5EF4-FFF2-40B4-BE49-F238E27FC236}">
-                <a16:creationId xmlns:a16="http://schemas.microsoft.com/office/drawing/2014/main" id="{C31EABF0-20B1-4C59-802E-8A9B8CFEF11D}"/>
+                <a16:creationId xmlns:a16="http://schemas.microsoft.com/office/drawing/2014/main" id="{268C8B0F-FB7D-47BF-AC49-7853BB0D6784}"/>
               </a:ext>
             </a:extLst>
           </p:cNvPr>
@@ -19254,7 +19916,7 @@
           <p:cNvPr id="7" name="p08-h-1">
             <a:extLst xmlns:a="http://schemas.openxmlformats.org/drawingml/2006/main">
               <a:ext uri="{FF2B5EF4-FFF2-40B4-BE49-F238E27FC236}">
-                <a16:creationId xmlns:a16="http://schemas.microsoft.com/office/drawing/2014/main" id="{7AD8166B-03E5-40A5-98A9-69349A1A96AE}"/>
+                <a16:creationId xmlns:a16="http://schemas.microsoft.com/office/drawing/2014/main" id="{C1856E1E-ECEB-4A53-8158-AF5C9F6C8C32}"/>
               </a:ext>
             </a:extLst>
           </p:cNvPr>
@@ -19309,7 +19971,7 @@
           <p:cNvPr id="8" name="p08-h-2">
             <a:extLst xmlns:a="http://schemas.openxmlformats.org/drawingml/2006/main">
               <a:ext uri="{FF2B5EF4-FFF2-40B4-BE49-F238E27FC236}">
-                <a16:creationId xmlns:a16="http://schemas.microsoft.com/office/drawing/2014/main" id="{33415905-339A-429C-B3D3-757B94178E27}"/>
+                <a16:creationId xmlns:a16="http://schemas.microsoft.com/office/drawing/2014/main" id="{C967AC15-9FE0-4D60-B714-DAF58EF5EBBF}"/>
               </a:ext>
             </a:extLst>
           </p:cNvPr>
@@ -19364,7 +20026,7 @@
           <p:cNvPr id="9" name="p08-h-3">
             <a:extLst xmlns:a="http://schemas.openxmlformats.org/drawingml/2006/main">
               <a:ext uri="{FF2B5EF4-FFF2-40B4-BE49-F238E27FC236}">
-                <a16:creationId xmlns:a16="http://schemas.microsoft.com/office/drawing/2014/main" id="{B0ACDCA1-C4DD-4CB5-9B0C-C20C2132D9D2}"/>
+                <a16:creationId xmlns:a16="http://schemas.microsoft.com/office/drawing/2014/main" id="{F9C01936-83EE-4A39-8852-D634A300ABB9}"/>
               </a:ext>
             </a:extLst>
           </p:cNvPr>
@@ -19419,7 +20081,7 @@
           <p:cNvPr id="10" name="p08-h-4">
             <a:extLst xmlns:a="http://schemas.openxmlformats.org/drawingml/2006/main">
               <a:ext uri="{FF2B5EF4-FFF2-40B4-BE49-F238E27FC236}">
-                <a16:creationId xmlns:a16="http://schemas.microsoft.com/office/drawing/2014/main" id="{6C2F48CF-EF01-4775-9C8D-720EB973A20B}"/>
+                <a16:creationId xmlns:a16="http://schemas.microsoft.com/office/drawing/2014/main" id="{3C082D98-6761-4D5D-AB44-D22C8A1E9237}"/>
               </a:ext>
             </a:extLst>
           </p:cNvPr>
@@ -19474,7 +20136,7 @@
           <p:cNvPr id="11" name="p08-r0-0">
             <a:extLst xmlns:a="http://schemas.openxmlformats.org/drawingml/2006/main">
               <a:ext uri="{FF2B5EF4-FFF2-40B4-BE49-F238E27FC236}">
-                <a16:creationId xmlns:a16="http://schemas.microsoft.com/office/drawing/2014/main" id="{50AC7206-5566-4C17-AA8E-6CBF49A29D7A}"/>
+                <a16:creationId xmlns:a16="http://schemas.microsoft.com/office/drawing/2014/main" id="{A25C9AB0-2C7F-4D72-94C3-92165768A619}"/>
               </a:ext>
             </a:extLst>
           </p:cNvPr>
@@ -19535,7 +20197,7 @@
           <p:cNvPr id="12" name="p08-r0-1">
             <a:extLst xmlns:a="http://schemas.openxmlformats.org/drawingml/2006/main">
               <a:ext uri="{FF2B5EF4-FFF2-40B4-BE49-F238E27FC236}">
-                <a16:creationId xmlns:a16="http://schemas.microsoft.com/office/drawing/2014/main" id="{6198EC58-1C2F-4203-8AB3-01644D72DDC8}"/>
+                <a16:creationId xmlns:a16="http://schemas.microsoft.com/office/drawing/2014/main" id="{B487F76A-59EB-4581-BDF2-2A4688C73554}"/>
               </a:ext>
             </a:extLst>
           </p:cNvPr>
@@ -19596,7 +20258,7 @@
           <p:cNvPr id="13" name="p08-r0-2">
             <a:extLst xmlns:a="http://schemas.openxmlformats.org/drawingml/2006/main">
               <a:ext uri="{FF2B5EF4-FFF2-40B4-BE49-F238E27FC236}">
-                <a16:creationId xmlns:a16="http://schemas.microsoft.com/office/drawing/2014/main" id="{0A80A17E-6265-4283-B59A-7192C06E3679}"/>
+                <a16:creationId xmlns:a16="http://schemas.microsoft.com/office/drawing/2014/main" id="{4E0505AC-1C25-4629-AD11-AE13E87B7087}"/>
               </a:ext>
             </a:extLst>
           </p:cNvPr>
@@ -19681,7 +20343,7 @@
           <p:cNvPr id="14" name="p08-r0-3">
             <a:extLst xmlns:a="http://schemas.openxmlformats.org/drawingml/2006/main">
               <a:ext uri="{FF2B5EF4-FFF2-40B4-BE49-F238E27FC236}">
-                <a16:creationId xmlns:a16="http://schemas.microsoft.com/office/drawing/2014/main" id="{C5258090-4482-4650-8C77-2882A56D3D93}"/>
+                <a16:creationId xmlns:a16="http://schemas.microsoft.com/office/drawing/2014/main" id="{31FB6D23-EA03-4E27-8C2B-A0984342ADC7}"/>
               </a:ext>
             </a:extLst>
           </p:cNvPr>
@@ -19742,7 +20404,7 @@
           <p:cNvPr id="15" name="p08-r0-4">
             <a:extLst xmlns:a="http://schemas.openxmlformats.org/drawingml/2006/main">
               <a:ext uri="{FF2B5EF4-FFF2-40B4-BE49-F238E27FC236}">
-                <a16:creationId xmlns:a16="http://schemas.microsoft.com/office/drawing/2014/main" id="{967E2FFE-9CF2-4106-9B4C-122188DBE5BE}"/>
+                <a16:creationId xmlns:a16="http://schemas.microsoft.com/office/drawing/2014/main" id="{933C6489-1330-4288-9D72-3C10D1EDFCBC}"/>
               </a:ext>
             </a:extLst>
           </p:cNvPr>
@@ -19803,7 +20465,7 @@
           <p:cNvPr id="16" name="p08-r1-0">
             <a:extLst xmlns:a="http://schemas.openxmlformats.org/drawingml/2006/main">
               <a:ext uri="{FF2B5EF4-FFF2-40B4-BE49-F238E27FC236}">
-                <a16:creationId xmlns:a16="http://schemas.microsoft.com/office/drawing/2014/main" id="{769769F7-BA76-4436-B685-C05D51AAE1A2}"/>
+                <a16:creationId xmlns:a16="http://schemas.microsoft.com/office/drawing/2014/main" id="{69B37EA7-825A-4237-9D85-85520F109B84}"/>
               </a:ext>
             </a:extLst>
           </p:cNvPr>
@@ -19864,7 +20526,7 @@
           <p:cNvPr id="17" name="p08-r1-1">
             <a:extLst xmlns:a="http://schemas.openxmlformats.org/drawingml/2006/main">
               <a:ext uri="{FF2B5EF4-FFF2-40B4-BE49-F238E27FC236}">
-                <a16:creationId xmlns:a16="http://schemas.microsoft.com/office/drawing/2014/main" id="{5374BD83-D49D-4F61-8F8D-67824B3F20AE}"/>
+                <a16:creationId xmlns:a16="http://schemas.microsoft.com/office/drawing/2014/main" id="{D1DF04D3-D299-4C45-8D20-4A4BDB4647C2}"/>
               </a:ext>
             </a:extLst>
           </p:cNvPr>
@@ -19925,7 +20587,7 @@
           <p:cNvPr id="18" name="p08-r1-2">
             <a:extLst xmlns:a="http://schemas.openxmlformats.org/drawingml/2006/main">
               <a:ext uri="{FF2B5EF4-FFF2-40B4-BE49-F238E27FC236}">
-                <a16:creationId xmlns:a16="http://schemas.microsoft.com/office/drawing/2014/main" id="{122B3068-2F88-44A6-849F-1B5582156D03}"/>
+                <a16:creationId xmlns:a16="http://schemas.microsoft.com/office/drawing/2014/main" id="{583C3215-C3D4-4D85-A393-DD49C144C3E5}"/>
               </a:ext>
             </a:extLst>
           </p:cNvPr>
@@ -19986,7 +20648,7 @@
           <p:cNvPr id="19" name="p08-r1-3">
             <a:extLst xmlns:a="http://schemas.openxmlformats.org/drawingml/2006/main">
               <a:ext uri="{FF2B5EF4-FFF2-40B4-BE49-F238E27FC236}">
-                <a16:creationId xmlns:a16="http://schemas.microsoft.com/office/drawing/2014/main" id="{00420968-E843-4AE2-A213-859B9BE5419C}"/>
+                <a16:creationId xmlns:a16="http://schemas.microsoft.com/office/drawing/2014/main" id="{49B9BF41-544E-4310-8149-25EEFA9B7415}"/>
               </a:ext>
             </a:extLst>
           </p:cNvPr>
@@ -20047,7 +20709,7 @@
           <p:cNvPr id="20" name="p08-r1-4">
             <a:extLst xmlns:a="http://schemas.openxmlformats.org/drawingml/2006/main">
               <a:ext uri="{FF2B5EF4-FFF2-40B4-BE49-F238E27FC236}">
-                <a16:creationId xmlns:a16="http://schemas.microsoft.com/office/drawing/2014/main" id="{118E77A9-4AD5-47D8-AEE0-CCDCE7D2EE86}"/>
+                <a16:creationId xmlns:a16="http://schemas.microsoft.com/office/drawing/2014/main" id="{1DF094B6-C802-44E9-B5ED-CB8A1CBEF4EA}"/>
               </a:ext>
             </a:extLst>
           </p:cNvPr>
@@ -20108,7 +20770,7 @@
           <p:cNvPr id="21" name="p08-r2-0">
             <a:extLst xmlns:a="http://schemas.openxmlformats.org/drawingml/2006/main">
               <a:ext uri="{FF2B5EF4-FFF2-40B4-BE49-F238E27FC236}">
-                <a16:creationId xmlns:a16="http://schemas.microsoft.com/office/drawing/2014/main" id="{4BEABF32-027F-4128-A9DB-ED4F99B629B8}"/>
+                <a16:creationId xmlns:a16="http://schemas.microsoft.com/office/drawing/2014/main" id="{AE7D4FD7-4F70-4702-8DBF-4F2952498575}"/>
               </a:ext>
             </a:extLst>
           </p:cNvPr>
@@ -20169,7 +20831,7 @@
           <p:cNvPr id="22" name="p08-r2-1">
             <a:extLst xmlns:a="http://schemas.openxmlformats.org/drawingml/2006/main">
               <a:ext uri="{FF2B5EF4-FFF2-40B4-BE49-F238E27FC236}">
-                <a16:creationId xmlns:a16="http://schemas.microsoft.com/office/drawing/2014/main" id="{2272BD60-25FA-44FA-BC0D-F81D56E31516}"/>
+                <a16:creationId xmlns:a16="http://schemas.microsoft.com/office/drawing/2014/main" id="{691CD62C-9B74-4924-A394-C63C864D8161}"/>
               </a:ext>
             </a:extLst>
           </p:cNvPr>
@@ -20230,7 +20892,7 @@
           <p:cNvPr id="23" name="p08-r2-2">
             <a:extLst xmlns:a="http://schemas.openxmlformats.org/drawingml/2006/main">
               <a:ext uri="{FF2B5EF4-FFF2-40B4-BE49-F238E27FC236}">
-                <a16:creationId xmlns:a16="http://schemas.microsoft.com/office/drawing/2014/main" id="{B093CB37-9388-489F-85BD-B1776C063C12}"/>
+                <a16:creationId xmlns:a16="http://schemas.microsoft.com/office/drawing/2014/main" id="{60983269-0670-4159-96F2-B505807AE202}"/>
               </a:ext>
             </a:extLst>
           </p:cNvPr>
@@ -20291,7 +20953,7 @@
           <p:cNvPr id="24" name="p08-r2-3">
             <a:extLst xmlns:a="http://schemas.openxmlformats.org/drawingml/2006/main">
               <a:ext uri="{FF2B5EF4-FFF2-40B4-BE49-F238E27FC236}">
-                <a16:creationId xmlns:a16="http://schemas.microsoft.com/office/drawing/2014/main" id="{7D129B09-3CF9-467C-B9DA-50F0B01EE153}"/>
+                <a16:creationId xmlns:a16="http://schemas.microsoft.com/office/drawing/2014/main" id="{B0A178A1-3DBF-44B6-9808-F1F6E4D7DDA3}"/>
               </a:ext>
             </a:extLst>
           </p:cNvPr>
@@ -20352,7 +21014,7 @@
           <p:cNvPr id="25" name="p08-r2-4">
             <a:extLst xmlns:a="http://schemas.openxmlformats.org/drawingml/2006/main">
               <a:ext uri="{FF2B5EF4-FFF2-40B4-BE49-F238E27FC236}">
-                <a16:creationId xmlns:a16="http://schemas.microsoft.com/office/drawing/2014/main" id="{23A8CA86-3C7B-4D81-B09C-DE2763082FAE}"/>
+                <a16:creationId xmlns:a16="http://schemas.microsoft.com/office/drawing/2014/main" id="{18444ADB-EFCC-4111-9AF9-7C4658F9756B}"/>
               </a:ext>
             </a:extLst>
           </p:cNvPr>
@@ -20413,7 +21075,7 @@
           <p:cNvPr id="26" name="p08-bottom">
             <a:extLst xmlns:a="http://schemas.openxmlformats.org/drawingml/2006/main">
               <a:ext uri="{FF2B5EF4-FFF2-40B4-BE49-F238E27FC236}">
-                <a16:creationId xmlns:a16="http://schemas.microsoft.com/office/drawing/2014/main" id="{781BE5A7-A189-4EA5-A5EC-0D9581940132}"/>
+                <a16:creationId xmlns:a16="http://schemas.microsoft.com/office/drawing/2014/main" id="{8349F77C-4D00-41EE-8226-3D8B099771FA}"/>
               </a:ext>
             </a:extLst>
           </p:cNvPr>
@@ -20560,7 +21222,7 @@
           <p:cNvPr id="6" name="p09-var-title">
             <a:extLst xmlns:a="http://schemas.openxmlformats.org/drawingml/2006/main">
               <a:ext uri="{FF2B5EF4-FFF2-40B4-BE49-F238E27FC236}">
-                <a16:creationId xmlns:a16="http://schemas.microsoft.com/office/drawing/2014/main" id="{B06D2818-D5B9-4390-A866-4F93247D5865}"/>
+                <a16:creationId xmlns:a16="http://schemas.microsoft.com/office/drawing/2014/main" id="{655AD825-A152-4688-8256-D563688505E6}"/>
               </a:ext>
             </a:extLst>
           </p:cNvPr>
@@ -20613,7 +21275,7 @@
           <p:cNvPr id="7" name="p09-vars-h-0">
             <a:extLst xmlns:a="http://schemas.openxmlformats.org/drawingml/2006/main">
               <a:ext uri="{FF2B5EF4-FFF2-40B4-BE49-F238E27FC236}">
-                <a16:creationId xmlns:a16="http://schemas.microsoft.com/office/drawing/2014/main" id="{499B8BF1-ABD2-44A6-A703-9EB7190A8278}"/>
+                <a16:creationId xmlns:a16="http://schemas.microsoft.com/office/drawing/2014/main" id="{E9EABEC6-10E6-4381-88EE-C7D76513C92F}"/>
               </a:ext>
             </a:extLst>
           </p:cNvPr>
@@ -20668,7 +21330,7 @@
           <p:cNvPr id="8" name="p09-vars-h-1">
             <a:extLst xmlns:a="http://schemas.openxmlformats.org/drawingml/2006/main">
               <a:ext uri="{FF2B5EF4-FFF2-40B4-BE49-F238E27FC236}">
-                <a16:creationId xmlns:a16="http://schemas.microsoft.com/office/drawing/2014/main" id="{4F4974C4-2408-4ED9-95C7-9E4AC721AAF7}"/>
+                <a16:creationId xmlns:a16="http://schemas.microsoft.com/office/drawing/2014/main" id="{6FF7FA77-9EFF-4898-80F2-6261917ADC32}"/>
               </a:ext>
             </a:extLst>
           </p:cNvPr>
@@ -20723,7 +21385,7 @@
           <p:cNvPr id="9" name="p09-vars-r0-0">
             <a:extLst xmlns:a="http://schemas.openxmlformats.org/drawingml/2006/main">
               <a:ext uri="{FF2B5EF4-FFF2-40B4-BE49-F238E27FC236}">
-                <a16:creationId xmlns:a16="http://schemas.microsoft.com/office/drawing/2014/main" id="{0518B415-4744-4202-9F83-AAD755E200D7}"/>
+                <a16:creationId xmlns:a16="http://schemas.microsoft.com/office/drawing/2014/main" id="{FE01DBEB-28CE-4138-BA0B-E458DD9A0648}"/>
               </a:ext>
             </a:extLst>
           </p:cNvPr>
@@ -20784,7 +21446,7 @@
           <p:cNvPr id="10" name="p09-vars-r0-1">
             <a:extLst xmlns:a="http://schemas.openxmlformats.org/drawingml/2006/main">
               <a:ext uri="{FF2B5EF4-FFF2-40B4-BE49-F238E27FC236}">
-                <a16:creationId xmlns:a16="http://schemas.microsoft.com/office/drawing/2014/main" id="{B5AC222E-12BE-48C4-A916-DB5C818B347A}"/>
+                <a16:creationId xmlns:a16="http://schemas.microsoft.com/office/drawing/2014/main" id="{9D3F0583-FD99-4E17-99C7-D18E8AFA8A88}"/>
               </a:ext>
             </a:extLst>
           </p:cNvPr>
@@ -20845,7 +21507,7 @@
           <p:cNvPr id="11" name="p09-vars-r1-0">
             <a:extLst xmlns:a="http://schemas.openxmlformats.org/drawingml/2006/main">
               <a:ext uri="{FF2B5EF4-FFF2-40B4-BE49-F238E27FC236}">
-                <a16:creationId xmlns:a16="http://schemas.microsoft.com/office/drawing/2014/main" id="{4652490D-0408-4E22-8BA2-21E2573E3D66}"/>
+                <a16:creationId xmlns:a16="http://schemas.microsoft.com/office/drawing/2014/main" id="{F6F911C7-FA28-4576-987B-AA2C908C3165}"/>
               </a:ext>
             </a:extLst>
           </p:cNvPr>
@@ -20906,7 +21568,7 @@
           <p:cNvPr id="12" name="p09-vars-r1-1">
             <a:extLst xmlns:a="http://schemas.openxmlformats.org/drawingml/2006/main">
               <a:ext uri="{FF2B5EF4-FFF2-40B4-BE49-F238E27FC236}">
-                <a16:creationId xmlns:a16="http://schemas.microsoft.com/office/drawing/2014/main" id="{029B523A-E290-4821-A140-36ABA0673E0B}"/>
+                <a16:creationId xmlns:a16="http://schemas.microsoft.com/office/drawing/2014/main" id="{A0BCBE55-2541-4B2A-91BF-C170A9FBADBD}"/>
               </a:ext>
             </a:extLst>
           </p:cNvPr>
@@ -20967,7 +21629,7 @@
           <p:cNvPr id="13" name="p09-vars-r2-0">
             <a:extLst xmlns:a="http://schemas.openxmlformats.org/drawingml/2006/main">
               <a:ext uri="{FF2B5EF4-FFF2-40B4-BE49-F238E27FC236}">
-                <a16:creationId xmlns:a16="http://schemas.microsoft.com/office/drawing/2014/main" id="{2CBADAB9-CF04-4CFF-BCA3-E01913985546}"/>
+                <a16:creationId xmlns:a16="http://schemas.microsoft.com/office/drawing/2014/main" id="{176CC678-C70C-4C46-AD0F-ACAE608452D5}"/>
               </a:ext>
             </a:extLst>
           </p:cNvPr>
@@ -21028,7 +21690,7 @@
           <p:cNvPr id="14" name="p09-vars-r2-1">
             <a:extLst xmlns:a="http://schemas.openxmlformats.org/drawingml/2006/main">
               <a:ext uri="{FF2B5EF4-FFF2-40B4-BE49-F238E27FC236}">
-                <a16:creationId xmlns:a16="http://schemas.microsoft.com/office/drawing/2014/main" id="{DB0B7E44-1DFB-4D4A-A64B-EF0A92C123CD}"/>
+                <a16:creationId xmlns:a16="http://schemas.microsoft.com/office/drawing/2014/main" id="{601046B1-A834-4DB7-AF97-B2BE97BC7B91}"/>
               </a:ext>
             </a:extLst>
           </p:cNvPr>
@@ -21089,7 +21751,7 @@
           <p:cNvPr id="15" name="p09-vars-r3-0">
             <a:extLst xmlns:a="http://schemas.openxmlformats.org/drawingml/2006/main">
               <a:ext uri="{FF2B5EF4-FFF2-40B4-BE49-F238E27FC236}">
-                <a16:creationId xmlns:a16="http://schemas.microsoft.com/office/drawing/2014/main" id="{39FE52C4-2F57-48CF-8115-D69443830144}"/>
+                <a16:creationId xmlns:a16="http://schemas.microsoft.com/office/drawing/2014/main" id="{23C1D350-F91D-43FA-9F31-5B2E20CB12F3}"/>
               </a:ext>
             </a:extLst>
           </p:cNvPr>
@@ -21150,7 +21812,7 @@
           <p:cNvPr id="16" name="p09-vars-r3-1">
             <a:extLst xmlns:a="http://schemas.openxmlformats.org/drawingml/2006/main">
               <a:ext uri="{FF2B5EF4-FFF2-40B4-BE49-F238E27FC236}">
-                <a16:creationId xmlns:a16="http://schemas.microsoft.com/office/drawing/2014/main" id="{4E0FE342-D43F-49F2-9131-5E5D9D4AB55C}"/>
+                <a16:creationId xmlns:a16="http://schemas.microsoft.com/office/drawing/2014/main" id="{EB7B30A8-CC1F-45E9-A02D-BA2465ED8B13}"/>
               </a:ext>
             </a:extLst>
           </p:cNvPr>
@@ -21211,7 +21873,7 @@
           <p:cNvPr id="17" name="p09-spec-title">
             <a:extLst xmlns:a="http://schemas.openxmlformats.org/drawingml/2006/main">
               <a:ext uri="{FF2B5EF4-FFF2-40B4-BE49-F238E27FC236}">
-                <a16:creationId xmlns:a16="http://schemas.microsoft.com/office/drawing/2014/main" id="{136E8090-65A4-492C-8241-4DFC532E27D8}"/>
+                <a16:creationId xmlns:a16="http://schemas.microsoft.com/office/drawing/2014/main" id="{595C843C-3935-4A27-A388-9814A633309B}"/>
               </a:ext>
             </a:extLst>
           </p:cNvPr>
@@ -21264,7 +21926,7 @@
           <p:cNvPr id="18" name="p09-n-0">
             <a:extLst xmlns:a="http://schemas.openxmlformats.org/drawingml/2006/main">
               <a:ext uri="{FF2B5EF4-FFF2-40B4-BE49-F238E27FC236}">
-                <a16:creationId xmlns:a16="http://schemas.microsoft.com/office/drawing/2014/main" id="{486C5A6B-3117-44F7-A6F5-3D160E855131}"/>
+                <a16:creationId xmlns:a16="http://schemas.microsoft.com/office/drawing/2014/main" id="{C8CB542E-2931-4144-AE3B-A85A189E8084}"/>
               </a:ext>
             </a:extLst>
           </p:cNvPr>
@@ -21321,7 +21983,7 @@
           <p:cNvPr id="19" name="p09-s-0">
             <a:extLst xmlns:a="http://schemas.openxmlformats.org/drawingml/2006/main">
               <a:ext uri="{FF2B5EF4-FFF2-40B4-BE49-F238E27FC236}">
-                <a16:creationId xmlns:a16="http://schemas.microsoft.com/office/drawing/2014/main" id="{C5D5C846-153B-4E1A-B1F9-517A593DBEDF}"/>
+                <a16:creationId xmlns:a16="http://schemas.microsoft.com/office/drawing/2014/main" id="{8C8340C3-C9FB-4F8E-AA6B-79E2ECD5A1BF}"/>
               </a:ext>
             </a:extLst>
           </p:cNvPr>
@@ -21376,7 +22038,7 @@
           <p:cNvPr id="20" name="p09-n-1">
             <a:extLst xmlns:a="http://schemas.openxmlformats.org/drawingml/2006/main">
               <a:ext uri="{FF2B5EF4-FFF2-40B4-BE49-F238E27FC236}">
-                <a16:creationId xmlns:a16="http://schemas.microsoft.com/office/drawing/2014/main" id="{BFFC5F0F-F746-478D-BEFC-9C9D62C0A970}"/>
+                <a16:creationId xmlns:a16="http://schemas.microsoft.com/office/drawing/2014/main" id="{38F422F3-F058-4126-BA6B-0118D83E7AE6}"/>
               </a:ext>
             </a:extLst>
           </p:cNvPr>
@@ -21433,7 +22095,7 @@
           <p:cNvPr id="21" name="p09-s-1">
             <a:extLst xmlns:a="http://schemas.openxmlformats.org/drawingml/2006/main">
               <a:ext uri="{FF2B5EF4-FFF2-40B4-BE49-F238E27FC236}">
-                <a16:creationId xmlns:a16="http://schemas.microsoft.com/office/drawing/2014/main" id="{D34C1614-C568-4B1F-823A-861ACE0D4D33}"/>
+                <a16:creationId xmlns:a16="http://schemas.microsoft.com/office/drawing/2014/main" id="{F2C09563-B5E8-4789-95AC-9B9FD289FF5B}"/>
               </a:ext>
             </a:extLst>
           </p:cNvPr>
@@ -21488,7 +22150,7 @@
           <p:cNvPr id="22" name="p09-n-2">
             <a:extLst xmlns:a="http://schemas.openxmlformats.org/drawingml/2006/main">
               <a:ext uri="{FF2B5EF4-FFF2-40B4-BE49-F238E27FC236}">
-                <a16:creationId xmlns:a16="http://schemas.microsoft.com/office/drawing/2014/main" id="{BCE2B360-05E3-4D4B-A1D9-A33F770FF83F}"/>
+                <a16:creationId xmlns:a16="http://schemas.microsoft.com/office/drawing/2014/main" id="{043052A0-D240-4F23-9167-6ED247E27EFE}"/>
               </a:ext>
             </a:extLst>
           </p:cNvPr>
@@ -21545,7 +22207,7 @@
           <p:cNvPr id="23" name="p09-s-2">
             <a:extLst xmlns:a="http://schemas.openxmlformats.org/drawingml/2006/main">
               <a:ext uri="{FF2B5EF4-FFF2-40B4-BE49-F238E27FC236}">
-                <a16:creationId xmlns:a16="http://schemas.microsoft.com/office/drawing/2014/main" id="{C80A92C1-1330-43A9-9378-74309863956D}"/>
+                <a16:creationId xmlns:a16="http://schemas.microsoft.com/office/drawing/2014/main" id="{55EDD49F-8572-4549-BA1C-08F50A9DA46C}"/>
               </a:ext>
             </a:extLst>
           </p:cNvPr>
@@ -21600,7 +22262,7 @@
           <p:cNvPr id="24" name="p09-n-3">
             <a:extLst xmlns:a="http://schemas.openxmlformats.org/drawingml/2006/main">
               <a:ext uri="{FF2B5EF4-FFF2-40B4-BE49-F238E27FC236}">
-                <a16:creationId xmlns:a16="http://schemas.microsoft.com/office/drawing/2014/main" id="{C3BE3EEC-75EB-4B85-AA12-A0B3A2A1CF8A}"/>
+                <a16:creationId xmlns:a16="http://schemas.microsoft.com/office/drawing/2014/main" id="{1B2BD2E2-075D-419A-BC85-E6B31E65467C}"/>
               </a:ext>
             </a:extLst>
           </p:cNvPr>
@@ -21657,7 +22319,7 @@
           <p:cNvPr id="25" name="p09-s-3">
             <a:extLst xmlns:a="http://schemas.openxmlformats.org/drawingml/2006/main">
               <a:ext uri="{FF2B5EF4-FFF2-40B4-BE49-F238E27FC236}">
-                <a16:creationId xmlns:a16="http://schemas.microsoft.com/office/drawing/2014/main" id="{7EE4A86C-AB5A-4401-9A4C-35BC3DF56CAC}"/>
+                <a16:creationId xmlns:a16="http://schemas.microsoft.com/office/drawing/2014/main" id="{DE79B89F-EC1A-4004-B271-C09D6211D13A}"/>
               </a:ext>
             </a:extLst>
           </p:cNvPr>
@@ -21712,7 +22374,7 @@
           <p:cNvPr id="26" name="p09-n-4">
             <a:extLst xmlns:a="http://schemas.openxmlformats.org/drawingml/2006/main">
               <a:ext uri="{FF2B5EF4-FFF2-40B4-BE49-F238E27FC236}">
-                <a16:creationId xmlns:a16="http://schemas.microsoft.com/office/drawing/2014/main" id="{9D3F94A4-574C-45C3-9272-319978E73D78}"/>
+                <a16:creationId xmlns:a16="http://schemas.microsoft.com/office/drawing/2014/main" id="{CF6B62E2-3C9E-4D3B-937D-02BD8B43684F}"/>
               </a:ext>
             </a:extLst>
           </p:cNvPr>
@@ -21769,7 +22431,7 @@
           <p:cNvPr id="27" name="p09-s-4">
             <a:extLst xmlns:a="http://schemas.openxmlformats.org/drawingml/2006/main">
               <a:ext uri="{FF2B5EF4-FFF2-40B4-BE49-F238E27FC236}">
-                <a16:creationId xmlns:a16="http://schemas.microsoft.com/office/drawing/2014/main" id="{AB6D7C7F-EA9F-4074-BFB2-6FFD263D04B0}"/>
+                <a16:creationId xmlns:a16="http://schemas.microsoft.com/office/drawing/2014/main" id="{E219728F-D592-45E1-B294-F85DDDC38FF2}"/>
               </a:ext>
             </a:extLst>
           </p:cNvPr>
@@ -21824,7 +22486,7 @@
           <p:cNvPr id="28" name="p09-n-5">
             <a:extLst xmlns:a="http://schemas.openxmlformats.org/drawingml/2006/main">
               <a:ext uri="{FF2B5EF4-FFF2-40B4-BE49-F238E27FC236}">
-                <a16:creationId xmlns:a16="http://schemas.microsoft.com/office/drawing/2014/main" id="{D9F833D9-FC8C-4E43-A4F5-7436E57CA92D}"/>
+                <a16:creationId xmlns:a16="http://schemas.microsoft.com/office/drawing/2014/main" id="{BBA934F1-4643-4D45-86F9-8D483BD5CF04}"/>
               </a:ext>
             </a:extLst>
           </p:cNvPr>
@@ -21881,7 +22543,7 @@
           <p:cNvPr id="29" name="p09-s-5">
             <a:extLst xmlns:a="http://schemas.openxmlformats.org/drawingml/2006/main">
               <a:ext uri="{FF2B5EF4-FFF2-40B4-BE49-F238E27FC236}">
-                <a16:creationId xmlns:a16="http://schemas.microsoft.com/office/drawing/2014/main" id="{DC6DDA8F-0C4F-4833-B91D-02D19B635E91}"/>
+                <a16:creationId xmlns:a16="http://schemas.microsoft.com/office/drawing/2014/main" id="{B21B8ED9-DC8D-4916-A8A0-CCF4DF2E82EE}"/>
               </a:ext>
             </a:extLst>
           </p:cNvPr>
@@ -21936,7 +22598,7 @@
           <p:cNvPr id="30" name="p09-n-6">
             <a:extLst xmlns:a="http://schemas.openxmlformats.org/drawingml/2006/main">
               <a:ext uri="{FF2B5EF4-FFF2-40B4-BE49-F238E27FC236}">
-                <a16:creationId xmlns:a16="http://schemas.microsoft.com/office/drawing/2014/main" id="{3A328361-C0B9-4DED-844D-043653DD12B9}"/>
+                <a16:creationId xmlns:a16="http://schemas.microsoft.com/office/drawing/2014/main" id="{940C4B2A-7925-4448-90F4-990211A35B35}"/>
               </a:ext>
             </a:extLst>
           </p:cNvPr>
@@ -21993,7 +22655,7 @@
           <p:cNvPr id="31" name="p09-s-6">
             <a:extLst xmlns:a="http://schemas.openxmlformats.org/drawingml/2006/main">
               <a:ext uri="{FF2B5EF4-FFF2-40B4-BE49-F238E27FC236}">
-                <a16:creationId xmlns:a16="http://schemas.microsoft.com/office/drawing/2014/main" id="{AF7FCAEB-7E89-475D-A9ED-45192DEBA277}"/>
+                <a16:creationId xmlns:a16="http://schemas.microsoft.com/office/drawing/2014/main" id="{CBBED620-E07C-4BBB-A654-568F8562A673}"/>
               </a:ext>
             </a:extLst>
           </p:cNvPr>
@@ -22048,7 +22710,7 @@
           <p:cNvPr id="32" name="p09-n-7">
             <a:extLst xmlns:a="http://schemas.openxmlformats.org/drawingml/2006/main">
               <a:ext uri="{FF2B5EF4-FFF2-40B4-BE49-F238E27FC236}">
-                <a16:creationId xmlns:a16="http://schemas.microsoft.com/office/drawing/2014/main" id="{E97646D9-2973-467C-80B0-6862AE005509}"/>
+                <a16:creationId xmlns:a16="http://schemas.microsoft.com/office/drawing/2014/main" id="{73409022-5160-4C40-B339-0AD092451D86}"/>
               </a:ext>
             </a:extLst>
           </p:cNvPr>
@@ -22105,7 +22767,7 @@
           <p:cNvPr id="33" name="p09-s-7">
             <a:extLst xmlns:a="http://schemas.openxmlformats.org/drawingml/2006/main">
               <a:ext uri="{FF2B5EF4-FFF2-40B4-BE49-F238E27FC236}">
-                <a16:creationId xmlns:a16="http://schemas.microsoft.com/office/drawing/2014/main" id="{EA897C02-3507-462A-9FE7-72B384C8B9E6}"/>
+                <a16:creationId xmlns:a16="http://schemas.microsoft.com/office/drawing/2014/main" id="{FC0AD37F-58D7-4585-860A-BDE988B71115}"/>
               </a:ext>
             </a:extLst>
           </p:cNvPr>
@@ -22160,7 +22822,7 @@
           <p:cNvPr id="34" name="p09-bottom">
             <a:extLst xmlns:a="http://schemas.openxmlformats.org/drawingml/2006/main">
               <a:ext uri="{FF2B5EF4-FFF2-40B4-BE49-F238E27FC236}">
-                <a16:creationId xmlns:a16="http://schemas.microsoft.com/office/drawing/2014/main" id="{334FF718-E802-42D1-9F4C-158CBB318FA2}"/>
+                <a16:creationId xmlns:a16="http://schemas.microsoft.com/office/drawing/2014/main" id="{EABF43F7-8AAB-4E70-A935-6B3C0DFF01A8}"/>
               </a:ext>
             </a:extLst>
           </p:cNvPr>
